--- a/output/wordlabs-prepare-3day.pptx
+++ b/output/wordlabs-prepare-3day.pptx
@@ -6040,7 +6040,7 @@
                 <a:ea typeface="Calibri" pitchFamily="34" charset="-122"/>
                 <a:cs typeface="Calibri" pitchFamily="34" charset="-120"/>
               </a:rPr>
-              <a:t>She spent the afternoon </a:t>
+              <a:t>The team's careful </a:t>
             </a:r>
             <a:pPr algn="l" indent="0" marL="0">
               <a:buNone/>
@@ -6057,7 +6057,7 @@
                 <a:ea typeface="Calibri" pitchFamily="34" charset="-122"/>
                 <a:cs typeface="Calibri" pitchFamily="34" charset="-120"/>
               </a:rPr>
-              <a:t>preparing</a:t>
+              <a:t>preparation</a:t>
             </a:r>
             <a:pPr algn="l" indent="0" marL="0">
               <a:buNone/>
@@ -6071,7 +6071,7 @@
                 <a:ea typeface="Calibri" pitchFamily="34" charset="-122"/>
                 <a:cs typeface="Calibri" pitchFamily="34" charset="-120"/>
               </a:rPr>
-              <a:t> the decorations, so everything was perfectly </a:t>
+              <a:t> meant they were fully </a:t>
             </a:r>
             <a:pPr algn="l" indent="0" marL="0">
               <a:buNone/>
@@ -6102,7 +6102,7 @@
                 <a:ea typeface="Calibri" pitchFamily="34" charset="-122"/>
                 <a:cs typeface="Calibri" pitchFamily="34" charset="-120"/>
               </a:rPr>
-              <a:t> for the party.</a:t>
+              <a:t> for the big championship game.</a:t>
             </a:r>
             <a:endParaRPr lang="en-US" sz="1800" dirty="0"/>
           </a:p>
@@ -6257,7 +6257,7 @@
                 <a:ea typeface="Trebuchet MS" pitchFamily="34" charset="-122"/>
                 <a:cs typeface="Trebuchet MS" pitchFamily="34" charset="-120"/>
               </a:rPr>
-              <a:t>preparing</a:t>
+              <a:t>preparation</a:t>
             </a:r>
             <a:endParaRPr lang="en-US" sz="1400" dirty="0"/>
           </a:p>
@@ -6855,7 +6855,7 @@
                 <a:ea typeface="Trebuchet MS" pitchFamily="34" charset="-122"/>
                 <a:cs typeface="Trebuchet MS" pitchFamily="34" charset="-120"/>
               </a:rPr>
-              <a:t>preparing</a:t>
+              <a:t>preparation</a:t>
             </a:r>
             <a:endParaRPr lang="en-US" sz="2800" dirty="0"/>
           </a:p>
@@ -7682,7 +7682,7 @@
                 <a:ea typeface="Trebuchet MS" pitchFamily="34" charset="-122"/>
                 <a:cs typeface="Trebuchet MS" pitchFamily="34" charset="-120"/>
               </a:rPr>
-              <a:t>preparing</a:t>
+              <a:t>preparation</a:t>
             </a:r>
             <a:endParaRPr lang="en-US" sz="2800" dirty="0"/>
           </a:p>
@@ -8084,7 +8084,7 @@
                 <a:ea typeface="Trebuchet MS" pitchFamily="34" charset="-122"/>
                 <a:cs typeface="Trebuchet MS" pitchFamily="34" charset="-120"/>
               </a:rPr>
-              <a:t>ing</a:t>
+              <a:t>ation</a:t>
             </a:r>
             <a:endParaRPr lang="en-US" sz="1300" dirty="0"/>
           </a:p>
@@ -8123,7 +8123,7 @@
                 <a:ea typeface="Calibri" pitchFamily="34" charset="-122"/>
                 <a:cs typeface="Calibri" pitchFamily="34" charset="-120"/>
               </a:rPr>
-              <a:t>action in progress</a:t>
+              <a:t>act or process of</a:t>
             </a:r>
             <a:endParaRPr lang="en-US" sz="850" dirty="0"/>
           </a:p>
@@ -8818,7 +8818,7 @@
                 <a:ea typeface="Trebuchet MS" pitchFamily="34" charset="-122"/>
                 <a:cs typeface="Trebuchet MS" pitchFamily="34" charset="-120"/>
               </a:rPr>
-              <a:t>preparing</a:t>
+              <a:t>preparation</a:t>
             </a:r>
             <a:endParaRPr lang="en-US" sz="2800" dirty="0"/>
           </a:p>
@@ -9220,7 +9220,7 @@
                 <a:ea typeface="Trebuchet MS" pitchFamily="34" charset="-122"/>
                 <a:cs typeface="Trebuchet MS" pitchFamily="34" charset="-120"/>
               </a:rPr>
-              <a:t>ing</a:t>
+              <a:t>ation</a:t>
             </a:r>
             <a:endParaRPr lang="en-US" sz="1300" dirty="0"/>
           </a:p>
@@ -9259,7 +9259,7 @@
                 <a:ea typeface="Calibri" pitchFamily="34" charset="-122"/>
                 <a:cs typeface="Calibri" pitchFamily="34" charset="-120"/>
               </a:rPr>
-              <a:t>action in progress</a:t>
+              <a:t>act or process of</a:t>
             </a:r>
             <a:endParaRPr lang="en-US" sz="850" dirty="0"/>
           </a:p>
@@ -9366,8 +9366,8 @@
         </p:nvSpPr>
         <p:spPr>
           <a:xfrm>
-            <a:off x="2313432" y="3364992"/>
-            <a:ext cx="1645920" cy="475488"/>
+            <a:off x="1975104" y="3364992"/>
+            <a:ext cx="1554480" cy="475488"/>
           </a:xfrm>
           <a:prstGeom prst="rect">
             <a:avLst>
@@ -9393,8 +9393,8 @@
         </p:nvSpPr>
         <p:spPr>
           <a:xfrm>
-            <a:off x="2313432" y="3364992"/>
-            <a:ext cx="1645920" cy="475488"/>
+            <a:off x="1975104" y="3364992"/>
+            <a:ext cx="1554480" cy="475488"/>
           </a:xfrm>
           <a:prstGeom prst="rect">
             <a:avLst/>
@@ -9418,7 +9418,7 @@
                 <a:ea typeface="Trebuchet MS" pitchFamily="34" charset="-122"/>
                 <a:cs typeface="Trebuchet MS" pitchFamily="34" charset="-120"/>
               </a:rPr>
-              <a:t>pre</a:t>
+              <a:t>prep</a:t>
             </a:r>
             <a:endParaRPr lang="en-US" sz="1400" dirty="0"/>
           </a:p>
@@ -9432,8 +9432,8 @@
         </p:nvSpPr>
         <p:spPr>
           <a:xfrm>
-            <a:off x="3959352" y="3364992"/>
-            <a:ext cx="411480" cy="475488"/>
+            <a:off x="3529584" y="3364992"/>
+            <a:ext cx="73152" cy="475488"/>
           </a:xfrm>
           <a:prstGeom prst="rect">
             <a:avLst/>
@@ -9471,8 +9471,8 @@
         </p:nvSpPr>
         <p:spPr>
           <a:xfrm>
-            <a:off x="4370832" y="3364992"/>
-            <a:ext cx="1645920" cy="475488"/>
+            <a:off x="3602736" y="3364992"/>
+            <a:ext cx="1554480" cy="475488"/>
           </a:xfrm>
           <a:prstGeom prst="rect">
             <a:avLst>
@@ -9498,8 +9498,8 @@
         </p:nvSpPr>
         <p:spPr>
           <a:xfrm>
-            <a:off x="4370832" y="3364992"/>
-            <a:ext cx="1645920" cy="475488"/>
+            <a:off x="3602736" y="3364992"/>
+            <a:ext cx="1554480" cy="475488"/>
           </a:xfrm>
           <a:prstGeom prst="rect">
             <a:avLst/>
@@ -9523,7 +9523,7 @@
                 <a:ea typeface="Trebuchet MS" pitchFamily="34" charset="-122"/>
                 <a:cs typeface="Trebuchet MS" pitchFamily="34" charset="-120"/>
               </a:rPr>
-              <a:t>par</a:t>
+              <a:t>a</a:t>
             </a:r>
             <a:endParaRPr lang="en-US" sz="1400" dirty="0"/>
           </a:p>
@@ -9537,8 +9537,8 @@
         </p:nvSpPr>
         <p:spPr>
           <a:xfrm>
-            <a:off x="6016752" y="3364992"/>
-            <a:ext cx="411480" cy="475488"/>
+            <a:off x="5157216" y="3364992"/>
+            <a:ext cx="73152" cy="475488"/>
           </a:xfrm>
           <a:prstGeom prst="rect">
             <a:avLst/>
@@ -9576,8 +9576,8 @@
         </p:nvSpPr>
         <p:spPr>
           <a:xfrm>
-            <a:off x="6428232" y="3364992"/>
-            <a:ext cx="1645920" cy="475488"/>
+            <a:off x="5230368" y="3364992"/>
+            <a:ext cx="1554480" cy="475488"/>
           </a:xfrm>
           <a:prstGeom prst="rect">
             <a:avLst>
@@ -9603,8 +9603,8 @@
         </p:nvSpPr>
         <p:spPr>
           <a:xfrm>
-            <a:off x="6428232" y="3364992"/>
-            <a:ext cx="1645920" cy="475488"/>
+            <a:off x="5230368" y="3364992"/>
+            <a:ext cx="1554480" cy="475488"/>
           </a:xfrm>
           <a:prstGeom prst="rect">
             <a:avLst/>
@@ -9628,7 +9628,7 @@
                 <a:ea typeface="Trebuchet MS" pitchFamily="34" charset="-122"/>
                 <a:cs typeface="Trebuchet MS" pitchFamily="34" charset="-120"/>
               </a:rPr>
-              <a:t>ing</a:t>
+              <a:t>ra</a:t>
             </a:r>
             <a:endParaRPr lang="en-US" sz="1400" dirty="0"/>
           </a:p>
@@ -9636,7 +9636,112 @@
       </p:sp>
       <p:sp>
         <p:nvSpPr>
-          <p:cNvPr id="37" name="Shape 35"/>
+          <p:cNvPr id="37" name="Text 35"/>
+          <p:cNvSpPr/>
+          <p:nvPr/>
+        </p:nvSpPr>
+        <p:spPr>
+          <a:xfrm>
+            <a:off x="6784848" y="3364992"/>
+            <a:ext cx="73152" cy="475488"/>
+          </a:xfrm>
+          <a:prstGeom prst="rect">
+            <a:avLst/>
+          </a:prstGeom>
+          <a:noFill/>
+          <a:ln/>
+        </p:spPr>
+        <p:txBody>
+          <a:bodyPr wrap="square" lIns="0" tIns="0" rIns="0" bIns="0" rtlCol="0" anchor="ctr"/>
+          <a:lstStyle/>
+          <a:p>
+            <a:pPr algn="ctr" indent="0" marL="0">
+              <a:buNone/>
+            </a:pPr>
+            <a:r>
+              <a:rPr lang="en-US" sz="1600" b="1" dirty="0">
+                <a:solidFill>
+                  <a:srgbClr val="0D9488"/>
+                </a:solidFill>
+                <a:latin typeface="Trebuchet MS" pitchFamily="34" charset="0"/>
+                <a:ea typeface="Trebuchet MS" pitchFamily="34" charset="-122"/>
+                <a:cs typeface="Trebuchet MS" pitchFamily="34" charset="-120"/>
+              </a:rPr>
+              <a:t>·</a:t>
+            </a:r>
+            <a:endParaRPr lang="en-US" sz="1600" dirty="0"/>
+          </a:p>
+        </p:txBody>
+      </p:sp>
+      <p:sp>
+        <p:nvSpPr>
+          <p:cNvPr id="38" name="Shape 36"/>
+          <p:cNvSpPr/>
+          <p:nvPr/>
+        </p:nvSpPr>
+        <p:spPr>
+          <a:xfrm>
+            <a:off x="6858000" y="3364992"/>
+            <a:ext cx="1554480" cy="475488"/>
+          </a:xfrm>
+          <a:prstGeom prst="rect">
+            <a:avLst>
+              <a:gd name="adj" fmla="val 9615"/>
+            </a:avLst>
+          </a:prstGeom>
+          <a:solidFill>
+            <a:srgbClr val="FFFFFF"/>
+          </a:solidFill>
+          <a:ln w="12700">
+            <a:solidFill>
+              <a:srgbClr val="0D9488"/>
+            </a:solidFill>
+            <a:prstDash val="solid"/>
+          </a:ln>
+        </p:spPr>
+      </p:sp>
+      <p:sp>
+        <p:nvSpPr>
+          <p:cNvPr id="39" name="Text 37"/>
+          <p:cNvSpPr/>
+          <p:nvPr/>
+        </p:nvSpPr>
+        <p:spPr>
+          <a:xfrm>
+            <a:off x="6858000" y="3364992"/>
+            <a:ext cx="1554480" cy="475488"/>
+          </a:xfrm>
+          <a:prstGeom prst="rect">
+            <a:avLst/>
+          </a:prstGeom>
+          <a:noFill/>
+          <a:ln/>
+        </p:spPr>
+        <p:txBody>
+          <a:bodyPr wrap="square" lIns="0" tIns="0" rIns="0" bIns="0" rtlCol="0" anchor="ctr"/>
+          <a:lstStyle/>
+          <a:p>
+            <a:pPr algn="ctr" indent="0" marL="0">
+              <a:buNone/>
+            </a:pPr>
+            <a:r>
+              <a:rPr lang="en-US" sz="1400" b="1" dirty="0">
+                <a:solidFill>
+                  <a:srgbClr val="0D9488"/>
+                </a:solidFill>
+                <a:latin typeface="Trebuchet MS" pitchFamily="34" charset="0"/>
+                <a:ea typeface="Trebuchet MS" pitchFamily="34" charset="-122"/>
+                <a:cs typeface="Trebuchet MS" pitchFamily="34" charset="-120"/>
+              </a:rPr>
+              <a:t>tion</a:t>
+            </a:r>
+            <a:endParaRPr lang="en-US" sz="1400" dirty="0"/>
+          </a:p>
+        </p:txBody>
+      </p:sp>
+      <p:sp>
+        <p:nvSpPr>
+          <p:cNvPr id="40" name="Shape 38"/>
           <p:cNvSpPr/>
           <p:nvPr/>
         </p:nvSpPr>
@@ -9663,7 +9768,7 @@
       </p:sp>
       <p:sp>
         <p:nvSpPr>
-          <p:cNvPr id="38" name="Text 36"/>
+          <p:cNvPr id="41" name="Text 39"/>
           <p:cNvSpPr/>
           <p:nvPr/>
         </p:nvSpPr>
@@ -9702,7 +9807,7 @@
       </p:sp>
       <p:sp>
         <p:nvSpPr>
-          <p:cNvPr id="39" name="Shape 37"/>
+          <p:cNvPr id="42" name="Shape 40"/>
           <p:cNvSpPr/>
           <p:nvPr/>
         </p:nvSpPr>
@@ -9729,7 +9834,7 @@
       </p:sp>
       <p:sp>
         <p:nvSpPr>
-          <p:cNvPr id="40" name="Text 38"/>
+          <p:cNvPr id="43" name="Text 41"/>
           <p:cNvSpPr/>
           <p:nvPr/>
         </p:nvSpPr>
@@ -10191,7 +10296,7 @@
                 <a:ea typeface="Trebuchet MS" pitchFamily="34" charset="-122"/>
                 <a:cs typeface="Trebuchet MS" pitchFamily="34" charset="-120"/>
               </a:rPr>
-              <a:t>preparing</a:t>
+              <a:t>preparation</a:t>
             </a:r>
             <a:endParaRPr lang="en-US" sz="2800" dirty="0"/>
           </a:p>
@@ -10593,7 +10698,7 @@
                 <a:ea typeface="Trebuchet MS" pitchFamily="34" charset="-122"/>
                 <a:cs typeface="Trebuchet MS" pitchFamily="34" charset="-120"/>
               </a:rPr>
-              <a:t>ing</a:t>
+              <a:t>ation</a:t>
             </a:r>
             <a:endParaRPr lang="en-US" sz="1300" dirty="0"/>
           </a:p>
@@ -10632,7 +10737,7 @@
                 <a:ea typeface="Calibri" pitchFamily="34" charset="-122"/>
                 <a:cs typeface="Calibri" pitchFamily="34" charset="-120"/>
               </a:rPr>
-              <a:t>action in progress</a:t>
+              <a:t>act or process of</a:t>
             </a:r>
             <a:endParaRPr lang="en-US" sz="850" dirty="0"/>
           </a:p>
@@ -10739,8 +10844,8 @@
         </p:nvSpPr>
         <p:spPr>
           <a:xfrm>
-            <a:off x="2313432" y="3364992"/>
-            <a:ext cx="1645920" cy="475488"/>
+            <a:off x="1975104" y="3364992"/>
+            <a:ext cx="1554480" cy="475488"/>
           </a:xfrm>
           <a:prstGeom prst="rect">
             <a:avLst>
@@ -10766,8 +10871,8 @@
         </p:nvSpPr>
         <p:spPr>
           <a:xfrm>
-            <a:off x="2313432" y="3364992"/>
-            <a:ext cx="1645920" cy="475488"/>
+            <a:off x="1975104" y="3364992"/>
+            <a:ext cx="1554480" cy="475488"/>
           </a:xfrm>
           <a:prstGeom prst="rect">
             <a:avLst/>
@@ -10791,7 +10896,7 @@
                 <a:ea typeface="Trebuchet MS" pitchFamily="34" charset="-122"/>
                 <a:cs typeface="Trebuchet MS" pitchFamily="34" charset="-120"/>
               </a:rPr>
-              <a:t>pre</a:t>
+              <a:t>prep</a:t>
             </a:r>
             <a:endParaRPr lang="en-US" sz="1400" dirty="0"/>
           </a:p>
@@ -10805,8 +10910,8 @@
         </p:nvSpPr>
         <p:spPr>
           <a:xfrm>
-            <a:off x="3959352" y="3364992"/>
-            <a:ext cx="411480" cy="475488"/>
+            <a:off x="3529584" y="3364992"/>
+            <a:ext cx="73152" cy="475488"/>
           </a:xfrm>
           <a:prstGeom prst="rect">
             <a:avLst/>
@@ -10844,8 +10949,8 @@
         </p:nvSpPr>
         <p:spPr>
           <a:xfrm>
-            <a:off x="4370832" y="3364992"/>
-            <a:ext cx="1645920" cy="475488"/>
+            <a:off x="3602736" y="3364992"/>
+            <a:ext cx="1554480" cy="475488"/>
           </a:xfrm>
           <a:prstGeom prst="rect">
             <a:avLst>
@@ -10871,8 +10976,8 @@
         </p:nvSpPr>
         <p:spPr>
           <a:xfrm>
-            <a:off x="4370832" y="3364992"/>
-            <a:ext cx="1645920" cy="475488"/>
+            <a:off x="3602736" y="3364992"/>
+            <a:ext cx="1554480" cy="475488"/>
           </a:xfrm>
           <a:prstGeom prst="rect">
             <a:avLst/>
@@ -10896,7 +11001,7 @@
                 <a:ea typeface="Trebuchet MS" pitchFamily="34" charset="-122"/>
                 <a:cs typeface="Trebuchet MS" pitchFamily="34" charset="-120"/>
               </a:rPr>
-              <a:t>par</a:t>
+              <a:t>a</a:t>
             </a:r>
             <a:endParaRPr lang="en-US" sz="1400" dirty="0"/>
           </a:p>
@@ -10910,8 +11015,8 @@
         </p:nvSpPr>
         <p:spPr>
           <a:xfrm>
-            <a:off x="6016752" y="3364992"/>
-            <a:ext cx="411480" cy="475488"/>
+            <a:off x="5157216" y="3364992"/>
+            <a:ext cx="73152" cy="475488"/>
           </a:xfrm>
           <a:prstGeom prst="rect">
             <a:avLst/>
@@ -10949,8 +11054,8 @@
         </p:nvSpPr>
         <p:spPr>
           <a:xfrm>
-            <a:off x="6428232" y="3364992"/>
-            <a:ext cx="1645920" cy="475488"/>
+            <a:off x="5230368" y="3364992"/>
+            <a:ext cx="1554480" cy="475488"/>
           </a:xfrm>
           <a:prstGeom prst="rect">
             <a:avLst>
@@ -10976,8 +11081,8 @@
         </p:nvSpPr>
         <p:spPr>
           <a:xfrm>
-            <a:off x="6428232" y="3364992"/>
-            <a:ext cx="1645920" cy="475488"/>
+            <a:off x="5230368" y="3364992"/>
+            <a:ext cx="1554480" cy="475488"/>
           </a:xfrm>
           <a:prstGeom prst="rect">
             <a:avLst/>
@@ -11001,7 +11106,7 @@
                 <a:ea typeface="Trebuchet MS" pitchFamily="34" charset="-122"/>
                 <a:cs typeface="Trebuchet MS" pitchFamily="34" charset="-120"/>
               </a:rPr>
-              <a:t>ing</a:t>
+              <a:t>ra</a:t>
             </a:r>
             <a:endParaRPr lang="en-US" sz="1400" dirty="0"/>
           </a:p>
@@ -11009,7 +11114,112 @@
       </p:sp>
       <p:sp>
         <p:nvSpPr>
-          <p:cNvPr id="37" name="Shape 35"/>
+          <p:cNvPr id="37" name="Text 35"/>
+          <p:cNvSpPr/>
+          <p:nvPr/>
+        </p:nvSpPr>
+        <p:spPr>
+          <a:xfrm>
+            <a:off x="6784848" y="3364992"/>
+            <a:ext cx="73152" cy="475488"/>
+          </a:xfrm>
+          <a:prstGeom prst="rect">
+            <a:avLst/>
+          </a:prstGeom>
+          <a:noFill/>
+          <a:ln/>
+        </p:spPr>
+        <p:txBody>
+          <a:bodyPr wrap="square" lIns="0" tIns="0" rIns="0" bIns="0" rtlCol="0" anchor="ctr"/>
+          <a:lstStyle/>
+          <a:p>
+            <a:pPr algn="ctr" indent="0" marL="0">
+              <a:buNone/>
+            </a:pPr>
+            <a:r>
+              <a:rPr lang="en-US" sz="1600" b="1" dirty="0">
+                <a:solidFill>
+                  <a:srgbClr val="0D9488"/>
+                </a:solidFill>
+                <a:latin typeface="Trebuchet MS" pitchFamily="34" charset="0"/>
+                <a:ea typeface="Trebuchet MS" pitchFamily="34" charset="-122"/>
+                <a:cs typeface="Trebuchet MS" pitchFamily="34" charset="-120"/>
+              </a:rPr>
+              <a:t>·</a:t>
+            </a:r>
+            <a:endParaRPr lang="en-US" sz="1600" dirty="0"/>
+          </a:p>
+        </p:txBody>
+      </p:sp>
+      <p:sp>
+        <p:nvSpPr>
+          <p:cNvPr id="38" name="Shape 36"/>
+          <p:cNvSpPr/>
+          <p:nvPr/>
+        </p:nvSpPr>
+        <p:spPr>
+          <a:xfrm>
+            <a:off x="6858000" y="3364992"/>
+            <a:ext cx="1554480" cy="475488"/>
+          </a:xfrm>
+          <a:prstGeom prst="rect">
+            <a:avLst>
+              <a:gd name="adj" fmla="val 9615"/>
+            </a:avLst>
+          </a:prstGeom>
+          <a:solidFill>
+            <a:srgbClr val="FFFFFF"/>
+          </a:solidFill>
+          <a:ln w="12700">
+            <a:solidFill>
+              <a:srgbClr val="0D9488"/>
+            </a:solidFill>
+            <a:prstDash val="solid"/>
+          </a:ln>
+        </p:spPr>
+      </p:sp>
+      <p:sp>
+        <p:nvSpPr>
+          <p:cNvPr id="39" name="Text 37"/>
+          <p:cNvSpPr/>
+          <p:nvPr/>
+        </p:nvSpPr>
+        <p:spPr>
+          <a:xfrm>
+            <a:off x="6858000" y="3364992"/>
+            <a:ext cx="1554480" cy="475488"/>
+          </a:xfrm>
+          <a:prstGeom prst="rect">
+            <a:avLst/>
+          </a:prstGeom>
+          <a:noFill/>
+          <a:ln/>
+        </p:spPr>
+        <p:txBody>
+          <a:bodyPr wrap="square" lIns="0" tIns="0" rIns="0" bIns="0" rtlCol="0" anchor="ctr"/>
+          <a:lstStyle/>
+          <a:p>
+            <a:pPr algn="ctr" indent="0" marL="0">
+              <a:buNone/>
+            </a:pPr>
+            <a:r>
+              <a:rPr lang="en-US" sz="1400" b="1" dirty="0">
+                <a:solidFill>
+                  <a:srgbClr val="0D9488"/>
+                </a:solidFill>
+                <a:latin typeface="Trebuchet MS" pitchFamily="34" charset="0"/>
+                <a:ea typeface="Trebuchet MS" pitchFamily="34" charset="-122"/>
+                <a:cs typeface="Trebuchet MS" pitchFamily="34" charset="-120"/>
+              </a:rPr>
+              <a:t>tion</a:t>
+            </a:r>
+            <a:endParaRPr lang="en-US" sz="1400" dirty="0"/>
+          </a:p>
+        </p:txBody>
+      </p:sp>
+      <p:sp>
+        <p:nvSpPr>
+          <p:cNvPr id="40" name="Shape 38"/>
           <p:cNvSpPr/>
           <p:nvPr/>
         </p:nvSpPr>
@@ -11036,7 +11246,7 @@
       </p:sp>
       <p:sp>
         <p:nvSpPr>
-          <p:cNvPr id="38" name="Text 36"/>
+          <p:cNvPr id="41" name="Text 39"/>
           <p:cNvSpPr/>
           <p:nvPr/>
         </p:nvSpPr>
@@ -11075,18 +11285,18 @@
       </p:sp>
       <p:sp>
         <p:nvSpPr>
-          <p:cNvPr id="39" name="Shape 37"/>
+          <p:cNvPr id="42" name="Shape 40"/>
           <p:cNvSpPr/>
           <p:nvPr/>
         </p:nvSpPr>
         <p:spPr>
           <a:xfrm>
             <a:off x="1874520" y="4096512"/>
-            <a:ext cx="6903720" cy="658368"/>
+            <a:ext cx="6903720" cy="804672"/>
           </a:xfrm>
           <a:prstGeom prst="rect">
             <a:avLst>
-              <a:gd name="adj" fmla="val 8333"/>
+              <a:gd name="adj" fmla="val 6818"/>
             </a:avLst>
           </a:prstGeom>
           <a:solidFill>
@@ -11102,18 +11312,18 @@
       </p:sp>
       <p:sp>
         <p:nvSpPr>
-          <p:cNvPr id="40" name="Shape 38"/>
-          <p:cNvSpPr/>
-          <p:nvPr/>
-        </p:nvSpPr>
-        <p:spPr>
-          <a:xfrm>
-            <a:off x="2254649" y="4169664"/>
-            <a:ext cx="685800" cy="475488"/>
+          <p:cNvPr id="43" name="Shape 41"/>
+          <p:cNvSpPr/>
+          <p:nvPr/>
+        </p:nvSpPr>
+        <p:spPr>
+          <a:xfrm>
+            <a:off x="1951828" y="4169664"/>
+            <a:ext cx="603504" cy="384048"/>
           </a:xfrm>
           <a:prstGeom prst="rect">
             <a:avLst>
-              <a:gd name="adj" fmla="val 7692"/>
+              <a:gd name="adj" fmla="val 9524"/>
             </a:avLst>
           </a:prstGeom>
           <a:solidFill>
@@ -11129,14 +11339,14 @@
       </p:sp>
       <p:sp>
         <p:nvSpPr>
-          <p:cNvPr id="41" name="Text 39"/>
-          <p:cNvSpPr/>
-          <p:nvPr/>
-        </p:nvSpPr>
-        <p:spPr>
-          <a:xfrm>
-            <a:off x="2254649" y="4169664"/>
-            <a:ext cx="685800" cy="475488"/>
+          <p:cNvPr id="44" name="Text 42"/>
+          <p:cNvSpPr/>
+          <p:nvPr/>
+        </p:nvSpPr>
+        <p:spPr>
+          <a:xfrm>
+            <a:off x="1951828" y="4169664"/>
+            <a:ext cx="603504" cy="384048"/>
           </a:xfrm>
           <a:prstGeom prst="rect">
             <a:avLst/>
@@ -11168,18 +11378,18 @@
       </p:sp>
       <p:sp>
         <p:nvSpPr>
-          <p:cNvPr id="42" name="Shape 40"/>
-          <p:cNvSpPr/>
-          <p:nvPr/>
-        </p:nvSpPr>
-        <p:spPr>
-          <a:xfrm>
-            <a:off x="3293146" y="4169664"/>
-            <a:ext cx="685800" cy="475488"/>
+          <p:cNvPr id="45" name="Shape 43"/>
+          <p:cNvSpPr/>
+          <p:nvPr/>
+        </p:nvSpPr>
+        <p:spPr>
+          <a:xfrm>
+            <a:off x="2605209" y="4169664"/>
+            <a:ext cx="603504" cy="384048"/>
           </a:xfrm>
           <a:prstGeom prst="rect">
             <a:avLst>
-              <a:gd name="adj" fmla="val 7692"/>
+              <a:gd name="adj" fmla="val 9524"/>
             </a:avLst>
           </a:prstGeom>
           <a:solidFill>
@@ -11195,14 +11405,14 @@
       </p:sp>
       <p:sp>
         <p:nvSpPr>
-          <p:cNvPr id="43" name="Text 41"/>
-          <p:cNvSpPr/>
-          <p:nvPr/>
-        </p:nvSpPr>
-        <p:spPr>
-          <a:xfrm>
-            <a:off x="3293146" y="4169664"/>
-            <a:ext cx="685800" cy="475488"/>
+          <p:cNvPr id="46" name="Text 44"/>
+          <p:cNvSpPr/>
+          <p:nvPr/>
+        </p:nvSpPr>
+        <p:spPr>
+          <a:xfrm>
+            <a:off x="2605209" y="4169664"/>
+            <a:ext cx="603504" cy="384048"/>
           </a:xfrm>
           <a:prstGeom prst="rect">
             <a:avLst/>
@@ -11234,18 +11444,18 @@
       </p:sp>
       <p:sp>
         <p:nvSpPr>
-          <p:cNvPr id="44" name="Shape 42"/>
-          <p:cNvSpPr/>
-          <p:nvPr/>
-        </p:nvSpPr>
-        <p:spPr>
-          <a:xfrm>
-            <a:off x="4331643" y="4169664"/>
-            <a:ext cx="685800" cy="475488"/>
+          <p:cNvPr id="47" name="Shape 45"/>
+          <p:cNvSpPr/>
+          <p:nvPr/>
+        </p:nvSpPr>
+        <p:spPr>
+          <a:xfrm>
+            <a:off x="3258589" y="4169664"/>
+            <a:ext cx="603504" cy="384048"/>
           </a:xfrm>
           <a:prstGeom prst="rect">
             <a:avLst>
-              <a:gd name="adj" fmla="val 7692"/>
+              <a:gd name="adj" fmla="val 9524"/>
             </a:avLst>
           </a:prstGeom>
           <a:solidFill>
@@ -11261,14 +11471,14 @@
       </p:sp>
       <p:sp>
         <p:nvSpPr>
-          <p:cNvPr id="45" name="Text 43"/>
-          <p:cNvSpPr/>
-          <p:nvPr/>
-        </p:nvSpPr>
-        <p:spPr>
-          <a:xfrm>
-            <a:off x="4331643" y="4169664"/>
-            <a:ext cx="685800" cy="475488"/>
+          <p:cNvPr id="48" name="Text 46"/>
+          <p:cNvSpPr/>
+          <p:nvPr/>
+        </p:nvSpPr>
+        <p:spPr>
+          <a:xfrm>
+            <a:off x="3258589" y="4169664"/>
+            <a:ext cx="603504" cy="384048"/>
           </a:xfrm>
           <a:prstGeom prst="rect">
             <a:avLst/>
@@ -11300,18 +11510,18 @@
       </p:sp>
       <p:sp>
         <p:nvSpPr>
-          <p:cNvPr id="46" name="Shape 44"/>
-          <p:cNvSpPr/>
-          <p:nvPr/>
-        </p:nvSpPr>
-        <p:spPr>
-          <a:xfrm>
-            <a:off x="5370141" y="4169664"/>
-            <a:ext cx="685800" cy="475488"/>
+          <p:cNvPr id="49" name="Shape 47"/>
+          <p:cNvSpPr/>
+          <p:nvPr/>
+        </p:nvSpPr>
+        <p:spPr>
+          <a:xfrm>
+            <a:off x="3911969" y="4169664"/>
+            <a:ext cx="603504" cy="384048"/>
           </a:xfrm>
           <a:prstGeom prst="rect">
             <a:avLst>
-              <a:gd name="adj" fmla="val 7692"/>
+              <a:gd name="adj" fmla="val 9524"/>
             </a:avLst>
           </a:prstGeom>
           <a:solidFill>
@@ -11327,14 +11537,14 @@
       </p:sp>
       <p:sp>
         <p:nvSpPr>
-          <p:cNvPr id="47" name="Text 45"/>
-          <p:cNvSpPr/>
-          <p:nvPr/>
-        </p:nvSpPr>
-        <p:spPr>
-          <a:xfrm>
-            <a:off x="5370141" y="4169664"/>
-            <a:ext cx="685800" cy="475488"/>
+          <p:cNvPr id="50" name="Text 48"/>
+          <p:cNvSpPr/>
+          <p:nvPr/>
+        </p:nvSpPr>
+        <p:spPr>
+          <a:xfrm>
+            <a:off x="3911969" y="4169664"/>
+            <a:ext cx="603504" cy="384048"/>
           </a:xfrm>
           <a:prstGeom prst="rect">
             <a:avLst/>
@@ -11366,18 +11576,18 @@
       </p:sp>
       <p:sp>
         <p:nvSpPr>
-          <p:cNvPr id="48" name="Shape 46"/>
-          <p:cNvSpPr/>
-          <p:nvPr/>
-        </p:nvSpPr>
-        <p:spPr>
-          <a:xfrm>
-            <a:off x="6408638" y="4169664"/>
-            <a:ext cx="685800" cy="475488"/>
+          <p:cNvPr id="51" name="Shape 49"/>
+          <p:cNvSpPr/>
+          <p:nvPr/>
+        </p:nvSpPr>
+        <p:spPr>
+          <a:xfrm>
+            <a:off x="4565350" y="4169664"/>
+            <a:ext cx="603504" cy="384048"/>
           </a:xfrm>
           <a:prstGeom prst="rect">
             <a:avLst>
-              <a:gd name="adj" fmla="val 7692"/>
+              <a:gd name="adj" fmla="val 9524"/>
             </a:avLst>
           </a:prstGeom>
           <a:solidFill>
@@ -11393,14 +11603,14 @@
       </p:sp>
       <p:sp>
         <p:nvSpPr>
-          <p:cNvPr id="49" name="Text 47"/>
-          <p:cNvSpPr/>
-          <p:nvPr/>
-        </p:nvSpPr>
-        <p:spPr>
-          <a:xfrm>
-            <a:off x="6408638" y="4169664"/>
-            <a:ext cx="685800" cy="475488"/>
+          <p:cNvPr id="52" name="Text 50"/>
+          <p:cNvSpPr/>
+          <p:nvPr/>
+        </p:nvSpPr>
+        <p:spPr>
+          <a:xfrm>
+            <a:off x="4565350" y="4169664"/>
+            <a:ext cx="603504" cy="384048"/>
           </a:xfrm>
           <a:prstGeom prst="rect">
             <a:avLst/>
@@ -11424,7 +11634,7 @@
                 <a:ea typeface="Trebuchet MS" pitchFamily="34" charset="-122"/>
                 <a:cs typeface="Trebuchet MS" pitchFamily="34" charset="-120"/>
               </a:rPr>
-              <a:t>ar</a:t>
+              <a:t>a</a:t>
             </a:r>
             <a:endParaRPr lang="en-US" sz="900" dirty="0"/>
           </a:p>
@@ -11432,18 +11642,18 @@
       </p:sp>
       <p:sp>
         <p:nvSpPr>
-          <p:cNvPr id="50" name="Shape 48"/>
-          <p:cNvSpPr/>
-          <p:nvPr/>
-        </p:nvSpPr>
-        <p:spPr>
-          <a:xfrm>
-            <a:off x="7447135" y="4169664"/>
-            <a:ext cx="685800" cy="475488"/>
+          <p:cNvPr id="53" name="Shape 51"/>
+          <p:cNvSpPr/>
+          <p:nvPr/>
+        </p:nvSpPr>
+        <p:spPr>
+          <a:xfrm>
+            <a:off x="5218730" y="4169664"/>
+            <a:ext cx="603504" cy="384048"/>
           </a:xfrm>
           <a:prstGeom prst="rect">
             <a:avLst>
-              <a:gd name="adj" fmla="val 7692"/>
+              <a:gd name="adj" fmla="val 9524"/>
             </a:avLst>
           </a:prstGeom>
           <a:solidFill>
@@ -11459,14 +11669,14 @@
       </p:sp>
       <p:sp>
         <p:nvSpPr>
-          <p:cNvPr id="51" name="Text 49"/>
-          <p:cNvSpPr/>
-          <p:nvPr/>
-        </p:nvSpPr>
-        <p:spPr>
-          <a:xfrm>
-            <a:off x="7447135" y="4169664"/>
-            <a:ext cx="685800" cy="475488"/>
+          <p:cNvPr id="54" name="Text 52"/>
+          <p:cNvSpPr/>
+          <p:nvPr/>
+        </p:nvSpPr>
+        <p:spPr>
+          <a:xfrm>
+            <a:off x="5218730" y="4169664"/>
+            <a:ext cx="603504" cy="384048"/>
           </a:xfrm>
           <a:prstGeom prst="rect">
             <a:avLst/>
@@ -11490,7 +11700,310 @@
                 <a:ea typeface="Trebuchet MS" pitchFamily="34" charset="-122"/>
                 <a:cs typeface="Trebuchet MS" pitchFamily="34" charset="-120"/>
               </a:rPr>
-              <a:t>ing</a:t>
+              <a:t>r</a:t>
+            </a:r>
+            <a:endParaRPr lang="en-US" sz="900" dirty="0"/>
+          </a:p>
+        </p:txBody>
+      </p:sp>
+      <p:sp>
+        <p:nvSpPr>
+          <p:cNvPr id="55" name="Shape 53"/>
+          <p:cNvSpPr/>
+          <p:nvPr/>
+        </p:nvSpPr>
+        <p:spPr>
+          <a:xfrm>
+            <a:off x="5872111" y="4169664"/>
+            <a:ext cx="603504" cy="384048"/>
+          </a:xfrm>
+          <a:prstGeom prst="rect">
+            <a:avLst>
+              <a:gd name="adj" fmla="val 9524"/>
+            </a:avLst>
+          </a:prstGeom>
+          <a:solidFill>
+            <a:srgbClr val="FFFFFF"/>
+          </a:solidFill>
+          <a:ln w="12700">
+            <a:solidFill>
+              <a:srgbClr val="DB2777"/>
+            </a:solidFill>
+            <a:prstDash val="solid"/>
+          </a:ln>
+        </p:spPr>
+      </p:sp>
+      <p:sp>
+        <p:nvSpPr>
+          <p:cNvPr id="56" name="Text 54"/>
+          <p:cNvSpPr/>
+          <p:nvPr/>
+        </p:nvSpPr>
+        <p:spPr>
+          <a:xfrm>
+            <a:off x="5872111" y="4169664"/>
+            <a:ext cx="603504" cy="384048"/>
+          </a:xfrm>
+          <a:prstGeom prst="rect">
+            <a:avLst/>
+          </a:prstGeom>
+          <a:noFill/>
+          <a:ln/>
+        </p:spPr>
+        <p:txBody>
+          <a:bodyPr wrap="square" lIns="0" tIns="0" rIns="0" bIns="0" rtlCol="0" anchor="ctr"/>
+          <a:lstStyle/>
+          <a:p>
+            <a:pPr algn="ctr" indent="0" marL="0">
+              <a:buNone/>
+            </a:pPr>
+            <a:r>
+              <a:rPr lang="en-US" sz="900" b="1" dirty="0">
+                <a:solidFill>
+                  <a:srgbClr val="9D174D"/>
+                </a:solidFill>
+                <a:latin typeface="Trebuchet MS" pitchFamily="34" charset="0"/>
+                <a:ea typeface="Trebuchet MS" pitchFamily="34" charset="-122"/>
+                <a:cs typeface="Trebuchet MS" pitchFamily="34" charset="-120"/>
+              </a:rPr>
+              <a:t>a</a:t>
+            </a:r>
+            <a:endParaRPr lang="en-US" sz="900" dirty="0"/>
+          </a:p>
+        </p:txBody>
+      </p:sp>
+      <p:sp>
+        <p:nvSpPr>
+          <p:cNvPr id="57" name="Shape 55"/>
+          <p:cNvSpPr/>
+          <p:nvPr/>
+        </p:nvSpPr>
+        <p:spPr>
+          <a:xfrm>
+            <a:off x="6525491" y="4169664"/>
+            <a:ext cx="603504" cy="384048"/>
+          </a:xfrm>
+          <a:prstGeom prst="rect">
+            <a:avLst>
+              <a:gd name="adj" fmla="val 9524"/>
+            </a:avLst>
+          </a:prstGeom>
+          <a:solidFill>
+            <a:srgbClr val="FFFFFF"/>
+          </a:solidFill>
+          <a:ln w="12700">
+            <a:solidFill>
+              <a:srgbClr val="DB2777"/>
+            </a:solidFill>
+            <a:prstDash val="solid"/>
+          </a:ln>
+        </p:spPr>
+      </p:sp>
+      <p:sp>
+        <p:nvSpPr>
+          <p:cNvPr id="58" name="Text 56"/>
+          <p:cNvSpPr/>
+          <p:nvPr/>
+        </p:nvSpPr>
+        <p:spPr>
+          <a:xfrm>
+            <a:off x="6525491" y="4169664"/>
+            <a:ext cx="603504" cy="384048"/>
+          </a:xfrm>
+          <a:prstGeom prst="rect">
+            <a:avLst/>
+          </a:prstGeom>
+          <a:noFill/>
+          <a:ln/>
+        </p:spPr>
+        <p:txBody>
+          <a:bodyPr wrap="square" lIns="0" tIns="0" rIns="0" bIns="0" rtlCol="0" anchor="ctr"/>
+          <a:lstStyle/>
+          <a:p>
+            <a:pPr algn="ctr" indent="0" marL="0">
+              <a:buNone/>
+            </a:pPr>
+            <a:r>
+              <a:rPr lang="en-US" sz="900" b="1" dirty="0">
+                <a:solidFill>
+                  <a:srgbClr val="9D174D"/>
+                </a:solidFill>
+                <a:latin typeface="Trebuchet MS" pitchFamily="34" charset="0"/>
+                <a:ea typeface="Trebuchet MS" pitchFamily="34" charset="-122"/>
+                <a:cs typeface="Trebuchet MS" pitchFamily="34" charset="-120"/>
+              </a:rPr>
+              <a:t>t</a:t>
+            </a:r>
+            <a:endParaRPr lang="en-US" sz="900" dirty="0"/>
+          </a:p>
+        </p:txBody>
+      </p:sp>
+      <p:sp>
+        <p:nvSpPr>
+          <p:cNvPr id="59" name="Text 57"/>
+          <p:cNvSpPr/>
+          <p:nvPr/>
+        </p:nvSpPr>
+        <p:spPr>
+          <a:xfrm>
+            <a:off x="6525491" y="4572000"/>
+            <a:ext cx="603504" cy="219456"/>
+          </a:xfrm>
+          <a:prstGeom prst="rect">
+            <a:avLst/>
+          </a:prstGeom>
+          <a:noFill/>
+          <a:ln/>
+        </p:spPr>
+        <p:txBody>
+          <a:bodyPr wrap="square" lIns="0" tIns="0" rIns="0" bIns="0" rtlCol="0" anchor="t"/>
+          <a:lstStyle/>
+          <a:p>
+            <a:pPr algn="ctr" indent="0" marL="0">
+              <a:buNone/>
+            </a:pPr>
+            <a:r>
+              <a:rPr lang="en-US" sz="750" i="1" dirty="0">
+                <a:solidFill>
+                  <a:srgbClr val="94A3B8"/>
+                </a:solidFill>
+                <a:latin typeface="Calibri" pitchFamily="34" charset="0"/>
+                <a:ea typeface="Calibri" pitchFamily="34" charset="-122"/>
+                <a:cs typeface="Calibri" pitchFamily="34" charset="-120"/>
+              </a:rPr>
+              <a:t>/sh/</a:t>
+            </a:r>
+            <a:endParaRPr lang="en-US" sz="750" dirty="0"/>
+          </a:p>
+        </p:txBody>
+      </p:sp>
+      <p:sp>
+        <p:nvSpPr>
+          <p:cNvPr id="60" name="Shape 58"/>
+          <p:cNvSpPr/>
+          <p:nvPr/>
+        </p:nvSpPr>
+        <p:spPr>
+          <a:xfrm>
+            <a:off x="7178871" y="4169664"/>
+            <a:ext cx="603504" cy="384048"/>
+          </a:xfrm>
+          <a:prstGeom prst="rect">
+            <a:avLst>
+              <a:gd name="adj" fmla="val 9524"/>
+            </a:avLst>
+          </a:prstGeom>
+          <a:solidFill>
+            <a:srgbClr val="FFFFFF"/>
+          </a:solidFill>
+          <a:ln w="12700">
+            <a:solidFill>
+              <a:srgbClr val="DB2777"/>
+            </a:solidFill>
+            <a:prstDash val="solid"/>
+          </a:ln>
+        </p:spPr>
+      </p:sp>
+      <p:sp>
+        <p:nvSpPr>
+          <p:cNvPr id="61" name="Text 59"/>
+          <p:cNvSpPr/>
+          <p:nvPr/>
+        </p:nvSpPr>
+        <p:spPr>
+          <a:xfrm>
+            <a:off x="7178871" y="4169664"/>
+            <a:ext cx="603504" cy="384048"/>
+          </a:xfrm>
+          <a:prstGeom prst="rect">
+            <a:avLst/>
+          </a:prstGeom>
+          <a:noFill/>
+          <a:ln/>
+        </p:spPr>
+        <p:txBody>
+          <a:bodyPr wrap="square" lIns="0" tIns="0" rIns="0" bIns="0" rtlCol="0" anchor="ctr"/>
+          <a:lstStyle/>
+          <a:p>
+            <a:pPr algn="ctr" indent="0" marL="0">
+              <a:buNone/>
+            </a:pPr>
+            <a:r>
+              <a:rPr lang="en-US" sz="900" b="1" dirty="0">
+                <a:solidFill>
+                  <a:srgbClr val="9D174D"/>
+                </a:solidFill>
+                <a:latin typeface="Trebuchet MS" pitchFamily="34" charset="0"/>
+                <a:ea typeface="Trebuchet MS" pitchFamily="34" charset="-122"/>
+                <a:cs typeface="Trebuchet MS" pitchFamily="34" charset="-120"/>
+              </a:rPr>
+              <a:t>io</a:t>
+            </a:r>
+            <a:endParaRPr lang="en-US" sz="900" dirty="0"/>
+          </a:p>
+        </p:txBody>
+      </p:sp>
+      <p:sp>
+        <p:nvSpPr>
+          <p:cNvPr id="62" name="Shape 60"/>
+          <p:cNvSpPr/>
+          <p:nvPr/>
+        </p:nvSpPr>
+        <p:spPr>
+          <a:xfrm>
+            <a:off x="7832252" y="4169664"/>
+            <a:ext cx="603504" cy="384048"/>
+          </a:xfrm>
+          <a:prstGeom prst="rect">
+            <a:avLst>
+              <a:gd name="adj" fmla="val 9524"/>
+            </a:avLst>
+          </a:prstGeom>
+          <a:solidFill>
+            <a:srgbClr val="FFFFFF"/>
+          </a:solidFill>
+          <a:ln w="12700">
+            <a:solidFill>
+              <a:srgbClr val="DB2777"/>
+            </a:solidFill>
+            <a:prstDash val="solid"/>
+          </a:ln>
+        </p:spPr>
+      </p:sp>
+      <p:sp>
+        <p:nvSpPr>
+          <p:cNvPr id="63" name="Text 61"/>
+          <p:cNvSpPr/>
+          <p:nvPr/>
+        </p:nvSpPr>
+        <p:spPr>
+          <a:xfrm>
+            <a:off x="7832252" y="4169664"/>
+            <a:ext cx="603504" cy="384048"/>
+          </a:xfrm>
+          <a:prstGeom prst="rect">
+            <a:avLst/>
+          </a:prstGeom>
+          <a:noFill/>
+          <a:ln/>
+        </p:spPr>
+        <p:txBody>
+          <a:bodyPr wrap="square" lIns="0" tIns="0" rIns="0" bIns="0" rtlCol="0" anchor="ctr"/>
+          <a:lstStyle/>
+          <a:p>
+            <a:pPr algn="ctr" indent="0" marL="0">
+              <a:buNone/>
+            </a:pPr>
+            <a:r>
+              <a:rPr lang="en-US" sz="900" b="1" dirty="0">
+                <a:solidFill>
+                  <a:srgbClr val="9D174D"/>
+                </a:solidFill>
+                <a:latin typeface="Trebuchet MS" pitchFamily="34" charset="0"/>
+                <a:ea typeface="Trebuchet MS" pitchFamily="34" charset="-122"/>
+                <a:cs typeface="Trebuchet MS" pitchFamily="34" charset="-120"/>
+              </a:rPr>
+              <a:t>n</a:t>
             </a:r>
             <a:endParaRPr lang="en-US" sz="900" dirty="0"/>
           </a:p>
@@ -13150,7 +13663,7 @@
                 <a:ea typeface="Trebuchet MS" pitchFamily="34" charset="-122"/>
                 <a:cs typeface="Trebuchet MS" pitchFamily="34" charset="-120"/>
               </a:rPr>
-              <a:t>d</a:t>
+              <a:t>ed</a:t>
             </a:r>
             <a:endParaRPr lang="en-US" sz="1300" dirty="0"/>
           </a:p>
@@ -14286,7 +14799,7 @@
                 <a:ea typeface="Trebuchet MS" pitchFamily="34" charset="-122"/>
                 <a:cs typeface="Trebuchet MS" pitchFamily="34" charset="-120"/>
               </a:rPr>
-              <a:t>d</a:t>
+              <a:t>ed</a:t>
             </a:r>
             <a:endParaRPr lang="en-US" sz="1300" dirty="0"/>
           </a:p>
@@ -15819,7 +16332,7 @@
                 <a:ea typeface="Trebuchet MS" pitchFamily="34" charset="-122"/>
                 <a:cs typeface="Trebuchet MS" pitchFamily="34" charset="-120"/>
               </a:rPr>
-              <a:t>d</a:t>
+              <a:t>ed</a:t>
             </a:r>
             <a:endParaRPr lang="en-US" sz="1300" dirty="0"/>
           </a:p>
@@ -16203,11 +16716,11 @@
         <p:spPr>
           <a:xfrm>
             <a:off x="1874520" y="4096512"/>
-            <a:ext cx="6903720" cy="804672"/>
+            <a:ext cx="6903720" cy="658368"/>
           </a:xfrm>
           <a:prstGeom prst="rect">
             <a:avLst>
-              <a:gd name="adj" fmla="val 6818"/>
+              <a:gd name="adj" fmla="val 8333"/>
             </a:avLst>
           </a:prstGeom>
           <a:solidFill>
@@ -16230,11 +16743,11 @@
         <p:spPr>
           <a:xfrm>
             <a:off x="2254649" y="4169664"/>
-            <a:ext cx="685800" cy="384048"/>
+            <a:ext cx="685800" cy="475488"/>
           </a:xfrm>
           <a:prstGeom prst="rect">
             <a:avLst>
-              <a:gd name="adj" fmla="val 9524"/>
+              <a:gd name="adj" fmla="val 7692"/>
             </a:avLst>
           </a:prstGeom>
           <a:solidFill>
@@ -16257,7 +16770,7 @@
         <p:spPr>
           <a:xfrm>
             <a:off x="2254649" y="4169664"/>
-            <a:ext cx="685800" cy="384048"/>
+            <a:ext cx="685800" cy="475488"/>
           </a:xfrm>
           <a:prstGeom prst="rect">
             <a:avLst/>
@@ -16296,11 +16809,11 @@
         <p:spPr>
           <a:xfrm>
             <a:off x="3293146" y="4169664"/>
-            <a:ext cx="685800" cy="384048"/>
+            <a:ext cx="685800" cy="475488"/>
           </a:xfrm>
           <a:prstGeom prst="rect">
             <a:avLst>
-              <a:gd name="adj" fmla="val 9524"/>
+              <a:gd name="adj" fmla="val 7692"/>
             </a:avLst>
           </a:prstGeom>
           <a:solidFill>
@@ -16323,7 +16836,7 @@
         <p:spPr>
           <a:xfrm>
             <a:off x="3293146" y="4169664"/>
-            <a:ext cx="685800" cy="384048"/>
+            <a:ext cx="685800" cy="475488"/>
           </a:xfrm>
           <a:prstGeom prst="rect">
             <a:avLst/>
@@ -16362,11 +16875,11 @@
         <p:spPr>
           <a:xfrm>
             <a:off x="4331643" y="4169664"/>
-            <a:ext cx="685800" cy="384048"/>
+            <a:ext cx="685800" cy="475488"/>
           </a:xfrm>
           <a:prstGeom prst="rect">
             <a:avLst>
-              <a:gd name="adj" fmla="val 9524"/>
+              <a:gd name="adj" fmla="val 7692"/>
             </a:avLst>
           </a:prstGeom>
           <a:solidFill>
@@ -16389,7 +16902,7 @@
         <p:spPr>
           <a:xfrm>
             <a:off x="4331643" y="4169664"/>
-            <a:ext cx="685800" cy="384048"/>
+            <a:ext cx="685800" cy="475488"/>
           </a:xfrm>
           <a:prstGeom prst="rect">
             <a:avLst/>
@@ -16428,11 +16941,11 @@
         <p:spPr>
           <a:xfrm>
             <a:off x="5370141" y="4169664"/>
-            <a:ext cx="685800" cy="384048"/>
+            <a:ext cx="685800" cy="475488"/>
           </a:xfrm>
           <a:prstGeom prst="rect">
             <a:avLst>
-              <a:gd name="adj" fmla="val 9524"/>
+              <a:gd name="adj" fmla="val 7692"/>
             </a:avLst>
           </a:prstGeom>
           <a:solidFill>
@@ -16455,7 +16968,7 @@
         <p:spPr>
           <a:xfrm>
             <a:off x="5370141" y="4169664"/>
-            <a:ext cx="685800" cy="384048"/>
+            <a:ext cx="685800" cy="475488"/>
           </a:xfrm>
           <a:prstGeom prst="rect">
             <a:avLst/>
@@ -16494,11 +17007,11 @@
         <p:spPr>
           <a:xfrm>
             <a:off x="6408638" y="4169664"/>
-            <a:ext cx="685800" cy="384048"/>
+            <a:ext cx="685800" cy="475488"/>
           </a:xfrm>
           <a:prstGeom prst="rect">
             <a:avLst>
-              <a:gd name="adj" fmla="val 9524"/>
+              <a:gd name="adj" fmla="val 7692"/>
             </a:avLst>
           </a:prstGeom>
           <a:solidFill>
@@ -16521,7 +17034,7 @@
         <p:spPr>
           <a:xfrm>
             <a:off x="6408638" y="4169664"/>
-            <a:ext cx="685800" cy="384048"/>
+            <a:ext cx="685800" cy="475488"/>
           </a:xfrm>
           <a:prstGeom prst="rect">
             <a:avLst/>
@@ -16560,11 +17073,11 @@
         <p:spPr>
           <a:xfrm>
             <a:off x="7447135" y="4169664"/>
-            <a:ext cx="685800" cy="384048"/>
+            <a:ext cx="685800" cy="475488"/>
           </a:xfrm>
           <a:prstGeom prst="rect">
             <a:avLst>
-              <a:gd name="adj" fmla="val 9524"/>
+              <a:gd name="adj" fmla="val 7692"/>
             </a:avLst>
           </a:prstGeom>
           <a:solidFill>
@@ -16587,7 +17100,7 @@
         <p:spPr>
           <a:xfrm>
             <a:off x="7447135" y="4169664"/>
-            <a:ext cx="685800" cy="384048"/>
+            <a:ext cx="685800" cy="475488"/>
           </a:xfrm>
           <a:prstGeom prst="rect">
             <a:avLst/>
@@ -16614,45 +17127,6 @@
               <a:t>ed</a:t>
             </a:r>
             <a:endParaRPr lang="en-US" sz="900" dirty="0"/>
-          </a:p>
-        </p:txBody>
-      </p:sp>
-      <p:sp>
-        <p:nvSpPr>
-          <p:cNvPr id="49" name="Text 47"/>
-          <p:cNvSpPr/>
-          <p:nvPr/>
-        </p:nvSpPr>
-        <p:spPr>
-          <a:xfrm>
-            <a:off x="7447135" y="4572000"/>
-            <a:ext cx="685800" cy="219456"/>
-          </a:xfrm>
-          <a:prstGeom prst="rect">
-            <a:avLst/>
-          </a:prstGeom>
-          <a:noFill/>
-          <a:ln/>
-        </p:spPr>
-        <p:txBody>
-          <a:bodyPr wrap="square" lIns="0" tIns="0" rIns="0" bIns="0" rtlCol="0" anchor="t"/>
-          <a:lstStyle/>
-          <a:p>
-            <a:pPr algn="ctr" indent="0" marL="0">
-              <a:buNone/>
-            </a:pPr>
-            <a:r>
-              <a:rPr lang="en-US" sz="750" i="1" dirty="0">
-                <a:solidFill>
-                  <a:srgbClr val="94A3B8"/>
-                </a:solidFill>
-                <a:latin typeface="Calibri" pitchFamily="34" charset="0"/>
-                <a:ea typeface="Calibri" pitchFamily="34" charset="-122"/>
-                <a:cs typeface="Calibri" pitchFamily="34" charset="-120"/>
-              </a:rPr>
-              <a:t>/d/</a:t>
-            </a:r>
-            <a:endParaRPr lang="en-US" sz="750" dirty="0"/>
           </a:p>
         </p:txBody>
       </p:sp>
@@ -17558,7 +18032,7 @@
                 <a:ea typeface="Trebuchet MS" pitchFamily="34" charset="-122"/>
                 <a:cs typeface="Trebuchet MS" pitchFamily="34" charset="-120"/>
               </a:rPr>
-              <a:t>1</a:t>
+              <a:t>2</a:t>
             </a:r>
             <a:pPr algn="ctr" indent="0" marL="0">
               <a:buNone/>
@@ -17572,7 +18046,7 @@
                 <a:ea typeface="Trebuchet MS" pitchFamily="34" charset="-122"/>
                 <a:cs typeface="Trebuchet MS" pitchFamily="34" charset="-120"/>
               </a:rPr>
-              <a:t>  punctuation mark</a:t>
+              <a:t>  punctuation marks</a:t>
             </a:r>
             <a:endParaRPr lang="en-US" sz="2800" dirty="0"/>
           </a:p>
@@ -17976,7 +18450,7 @@
                 <a:ea typeface="Calibri" pitchFamily="34" charset="-122"/>
                 <a:cs typeface="Calibri" pitchFamily="34" charset="-120"/>
               </a:rPr>
-              <a:t>With careful </a:t>
+              <a:t>Although she was </a:t>
             </a:r>
             <a:pPr algn="l" indent="0" marL="0">
               <a:buNone/>
@@ -17993,7 +18467,7 @@
                 <a:ea typeface="Calibri" pitchFamily="34" charset="-122"/>
                 <a:cs typeface="Calibri" pitchFamily="34" charset="-120"/>
               </a:rPr>
-              <a:t>preparation</a:t>
+              <a:t>unprepared</a:t>
             </a:r>
             <a:pPr algn="l" indent="0" marL="0">
               <a:buNone/>
@@ -18007,7 +18481,7 @@
                 <a:ea typeface="Calibri" pitchFamily="34" charset="-122"/>
                 <a:cs typeface="Calibri" pitchFamily="34" charset="-120"/>
               </a:rPr>
-              <a:t>, the </a:t>
+              <a:t> at first, her </a:t>
             </a:r>
             <a:pPr algn="l" indent="0" marL="0">
               <a:buNone/>
@@ -18024,7 +18498,7 @@
                 <a:ea typeface="Calibri" pitchFamily="34" charset="-122"/>
                 <a:cs typeface="Calibri" pitchFamily="34" charset="-120"/>
               </a:rPr>
-              <a:t>unprepared</a:t>
+              <a:t>preparedness</a:t>
             </a:r>
             <a:pPr algn="l" indent="0" marL="0">
               <a:buNone/>
@@ -18038,7 +18512,7 @@
                 <a:ea typeface="Calibri" pitchFamily="34" charset="-122"/>
                 <a:cs typeface="Calibri" pitchFamily="34" charset="-120"/>
               </a:rPr>
-              <a:t> students became fully </a:t>
+              <a:t> grew after weeks of diligently </a:t>
             </a:r>
             <a:pPr algn="l" indent="0" marL="0">
               <a:buNone/>
@@ -18055,7 +18529,7 @@
                 <a:ea typeface="Calibri" pitchFamily="34" charset="-122"/>
                 <a:cs typeface="Calibri" pitchFamily="34" charset="-120"/>
               </a:rPr>
-              <a:t>prepared</a:t>
+              <a:t>preparing</a:t>
             </a:r>
             <a:pPr algn="l" indent="0" marL="0">
               <a:buNone/>
@@ -18069,7 +18543,7 @@
                 <a:ea typeface="Calibri" pitchFamily="34" charset="-122"/>
                 <a:cs typeface="Calibri" pitchFamily="34" charset="-120"/>
               </a:rPr>
-              <a:t> for their big science experiment.</a:t>
+              <a:t> for the exam.</a:t>
             </a:r>
             <a:endParaRPr lang="en-US" sz="1800" dirty="0"/>
           </a:p>
@@ -18224,7 +18698,7 @@
                 <a:ea typeface="Trebuchet MS" pitchFamily="34" charset="-122"/>
                 <a:cs typeface="Trebuchet MS" pitchFamily="34" charset="-120"/>
               </a:rPr>
-              <a:t>preparation</a:t>
+              <a:t>unprepared</a:t>
             </a:r>
             <a:endParaRPr lang="en-US" sz="1400" dirty="0"/>
           </a:p>
@@ -18352,7 +18826,7 @@
                 <a:ea typeface="Trebuchet MS" pitchFamily="34" charset="-122"/>
                 <a:cs typeface="Trebuchet MS" pitchFamily="34" charset="-120"/>
               </a:rPr>
-              <a:t>unprepared</a:t>
+              <a:t>preparedness</a:t>
             </a:r>
             <a:endParaRPr lang="en-US" sz="1400" dirty="0"/>
           </a:p>
@@ -18480,7 +18954,7 @@
                 <a:ea typeface="Trebuchet MS" pitchFamily="34" charset="-122"/>
                 <a:cs typeface="Trebuchet MS" pitchFamily="34" charset="-120"/>
               </a:rPr>
-              <a:t>prepared</a:t>
+              <a:t>preparing</a:t>
             </a:r>
             <a:endParaRPr lang="en-US" sz="1400" dirty="0"/>
           </a:p>
@@ -18950,7 +19424,7 @@
                 <a:ea typeface="Trebuchet MS" pitchFamily="34" charset="-122"/>
                 <a:cs typeface="Trebuchet MS" pitchFamily="34" charset="-120"/>
               </a:rPr>
-              <a:t>preparation</a:t>
+              <a:t>unprepared</a:t>
             </a:r>
             <a:endParaRPr lang="en-US" sz="2800" dirty="0"/>
           </a:p>
@@ -19777,7 +20251,7 @@
                 <a:ea typeface="Trebuchet MS" pitchFamily="34" charset="-122"/>
                 <a:cs typeface="Trebuchet MS" pitchFamily="34" charset="-120"/>
               </a:rPr>
-              <a:t>preparation</a:t>
+              <a:t>unprepared</a:t>
             </a:r>
             <a:endParaRPr lang="en-US" sz="2800" dirty="0"/>
           </a:p>
@@ -19916,7 +20390,7 @@
                 <a:ea typeface="Trebuchet MS" pitchFamily="34" charset="-122"/>
                 <a:cs typeface="Trebuchet MS" pitchFamily="34" charset="-120"/>
               </a:rPr>
-              <a:t>pre</a:t>
+              <a:t>un</a:t>
             </a:r>
             <a:endParaRPr lang="en-US" sz="1300" dirty="0"/>
           </a:p>
@@ -19955,7 +20429,7 @@
                 <a:ea typeface="Calibri" pitchFamily="34" charset="-122"/>
                 <a:cs typeface="Calibri" pitchFamily="34" charset="-120"/>
               </a:rPr>
-              <a:t>before</a:t>
+              <a:t>not</a:t>
             </a:r>
             <a:endParaRPr lang="en-US" sz="850" dirty="0"/>
           </a:p>
@@ -20028,7 +20502,7 @@
                 <a:ea typeface="Trebuchet MS" pitchFamily="34" charset="-122"/>
                 <a:cs typeface="Trebuchet MS" pitchFamily="34" charset="-120"/>
               </a:rPr>
-              <a:t>par</a:t>
+              <a:t>pre</a:t>
             </a:r>
             <a:endParaRPr lang="en-US" sz="1300" dirty="0"/>
           </a:p>
@@ -20067,7 +20541,7 @@
                 <a:ea typeface="Calibri" pitchFamily="34" charset="-122"/>
                 <a:cs typeface="Calibri" pitchFamily="34" charset="-120"/>
               </a:rPr>
-              <a:t>make ready</a:t>
+              <a:t>before</a:t>
             </a:r>
             <a:endParaRPr lang="en-US" sz="850" dirty="0"/>
           </a:p>
@@ -20075,46 +20549,7 @@
       </p:sp>
       <p:sp>
         <p:nvSpPr>
-          <p:cNvPr id="22" name="Text 20"/>
-          <p:cNvSpPr/>
-          <p:nvPr/>
-        </p:nvSpPr>
-        <p:spPr>
-          <a:xfrm>
-            <a:off x="3659429" y="2752344"/>
-            <a:ext cx="1581912" cy="182880"/>
-          </a:xfrm>
-          <a:prstGeom prst="rect">
-            <a:avLst/>
-          </a:prstGeom>
-          <a:noFill/>
-          <a:ln/>
-        </p:spPr>
-        <p:txBody>
-          <a:bodyPr wrap="square" lIns="0" tIns="0" rIns="0" bIns="0" rtlCol="0" anchor="t"/>
-          <a:lstStyle/>
-          <a:p>
-            <a:pPr algn="ctr" indent="0" marL="0">
-              <a:buNone/>
-            </a:pPr>
-            <a:r>
-              <a:rPr lang="en-US" sz="700" i="1" dirty="0">
-                <a:solidFill>
-                  <a:srgbClr val="94A3B8"/>
-                </a:solidFill>
-                <a:latin typeface="Calibri" pitchFamily="34" charset="0"/>
-                <a:ea typeface="Calibri" pitchFamily="34" charset="-122"/>
-                <a:cs typeface="Calibri" pitchFamily="34" charset="-120"/>
-              </a:rPr>
-              <a:t>'e' dropped before vowel suffix</a:t>
-            </a:r>
-            <a:endParaRPr lang="en-US" sz="700" dirty="0"/>
-          </a:p>
-        </p:txBody>
-      </p:sp>
-      <p:sp>
-        <p:nvSpPr>
-          <p:cNvPr id="23" name="Shape 21"/>
+          <p:cNvPr id="22" name="Shape 20"/>
           <p:cNvSpPr/>
           <p:nvPr/>
         </p:nvSpPr>
@@ -20148,7 +20583,7 @@
       </p:sp>
       <p:sp>
         <p:nvSpPr>
-          <p:cNvPr id="24" name="Text 22"/>
+          <p:cNvPr id="23" name="Text 21"/>
           <p:cNvSpPr/>
           <p:nvPr/>
         </p:nvSpPr>
@@ -20179,7 +20614,7 @@
                 <a:ea typeface="Trebuchet MS" pitchFamily="34" charset="-122"/>
                 <a:cs typeface="Trebuchet MS" pitchFamily="34" charset="-120"/>
               </a:rPr>
-              <a:t>a</a:t>
+              <a:t>pare</a:t>
             </a:r>
             <a:endParaRPr lang="en-US" sz="1300" dirty="0"/>
           </a:p>
@@ -20187,7 +20622,7 @@
       </p:sp>
       <p:sp>
         <p:nvSpPr>
-          <p:cNvPr id="25" name="Text 23"/>
+          <p:cNvPr id="24" name="Text 22"/>
           <p:cNvSpPr/>
           <p:nvPr/>
         </p:nvSpPr>
@@ -20218,7 +20653,7 @@
                 <a:ea typeface="Calibri" pitchFamily="34" charset="-122"/>
                 <a:cs typeface="Calibri" pitchFamily="34" charset="-120"/>
               </a:rPr>
-              <a:t>connecting vowel</a:t>
+              <a:t>make ready</a:t>
             </a:r>
             <a:endParaRPr lang="en-US" sz="850" dirty="0"/>
           </a:p>
@@ -20226,7 +20661,7 @@
       </p:sp>
       <p:sp>
         <p:nvSpPr>
-          <p:cNvPr id="26" name="Text 24"/>
+          <p:cNvPr id="25" name="Text 23"/>
           <p:cNvSpPr/>
           <p:nvPr/>
         </p:nvSpPr>
@@ -20257,7 +20692,7 @@
                 <a:ea typeface="Calibri" pitchFamily="34" charset="-122"/>
                 <a:cs typeface="Calibri" pitchFamily="34" charset="-120"/>
               </a:rPr>
-              <a:t>links base to suffix</a:t>
+              <a:t>'e' dropped before vowel suffix</a:t>
             </a:r>
             <a:endParaRPr lang="en-US" sz="700" dirty="0"/>
           </a:p>
@@ -20265,7 +20700,7 @@
       </p:sp>
       <p:sp>
         <p:nvSpPr>
-          <p:cNvPr id="27" name="Shape 25"/>
+          <p:cNvPr id="26" name="Shape 24"/>
           <p:cNvSpPr/>
           <p:nvPr/>
         </p:nvSpPr>
@@ -20299,7 +20734,7 @@
       </p:sp>
       <p:sp>
         <p:nvSpPr>
-          <p:cNvPr id="28" name="Text 26"/>
+          <p:cNvPr id="27" name="Text 25"/>
           <p:cNvSpPr/>
           <p:nvPr/>
         </p:nvSpPr>
@@ -20330,7 +20765,7 @@
                 <a:ea typeface="Trebuchet MS" pitchFamily="34" charset="-122"/>
                 <a:cs typeface="Trebuchet MS" pitchFamily="34" charset="-120"/>
               </a:rPr>
-              <a:t>tion</a:t>
+              <a:t>ed</a:t>
             </a:r>
             <a:endParaRPr lang="en-US" sz="1300" dirty="0"/>
           </a:p>
@@ -20338,7 +20773,7 @@
       </p:sp>
       <p:sp>
         <p:nvSpPr>
-          <p:cNvPr id="29" name="Text 27"/>
+          <p:cNvPr id="28" name="Text 26"/>
           <p:cNvSpPr/>
           <p:nvPr/>
         </p:nvSpPr>
@@ -20369,7 +20804,7 @@
                 <a:ea typeface="Calibri" pitchFamily="34" charset="-122"/>
                 <a:cs typeface="Calibri" pitchFamily="34" charset="-120"/>
               </a:rPr>
-              <a:t>act or process</a:t>
+              <a:t>past tense / state of being</a:t>
             </a:r>
             <a:endParaRPr lang="en-US" sz="850" dirty="0"/>
           </a:p>
@@ -20377,57 +20812,150 @@
       </p:sp>
       <p:sp>
         <p:nvSpPr>
+          <p:cNvPr id="29" name="Shape 27"/>
+          <p:cNvSpPr/>
+          <p:nvPr/>
+        </p:nvSpPr>
+        <p:spPr>
+          <a:xfrm>
+            <a:off x="365760" y="3273552"/>
+            <a:ext cx="1371600" cy="658368"/>
+          </a:xfrm>
+          <a:prstGeom prst="rect">
+            <a:avLst>
+              <a:gd name="adj" fmla="val 8333"/>
+            </a:avLst>
+          </a:prstGeom>
+          <a:solidFill>
+            <a:srgbClr val="E2E8F0"/>
+          </a:solidFill>
+          <a:ln w="12700">
+            <a:solidFill>
+              <a:srgbClr val="E2E8F0"/>
+            </a:solidFill>
+            <a:prstDash val="solid"/>
+          </a:ln>
+        </p:spPr>
+      </p:sp>
+      <p:sp>
+        <p:nvSpPr>
           <p:cNvPr id="30" name="Text 28"/>
           <p:cNvSpPr/>
           <p:nvPr/>
         </p:nvSpPr>
         <p:spPr>
           <a:xfrm>
-            <a:off x="6998818" y="2752344"/>
-            <a:ext cx="1581912" cy="182880"/>
-          </a:xfrm>
-          <a:prstGeom prst="rect">
-            <a:avLst/>
-          </a:prstGeom>
-          <a:noFill/>
-          <a:ln/>
-        </p:spPr>
-        <p:txBody>
-          <a:bodyPr wrap="square" lIns="0" tIns="0" rIns="0" bIns="0" rtlCol="0" anchor="t"/>
-          <a:lstStyle/>
-          <a:p>
-            <a:pPr algn="ctr" indent="0" marL="0">
-              <a:buNone/>
-            </a:pPr>
-            <a:r>
-              <a:rPr lang="en-US" sz="700" i="1" dirty="0">
-                <a:solidFill>
-                  <a:srgbClr val="94A3B8"/>
+            <a:off x="365760" y="3273552"/>
+            <a:ext cx="1371600" cy="658368"/>
+          </a:xfrm>
+          <a:prstGeom prst="rect">
+            <a:avLst/>
+          </a:prstGeom>
+          <a:noFill/>
+          <a:ln/>
+        </p:spPr>
+        <p:txBody>
+          <a:bodyPr wrap="square" lIns="0" tIns="0" rIns="0" bIns="0" rtlCol="0" anchor="ctr"/>
+          <a:lstStyle/>
+          <a:p>
+            <a:pPr algn="ctr" indent="0" marL="0">
+              <a:buNone/>
+            </a:pPr>
+            <a:r>
+              <a:rPr lang="en-US" sz="1100" b="1" dirty="0">
+                <a:solidFill>
+                  <a:srgbClr val="475569"/>
+                </a:solidFill>
+                <a:latin typeface="Trebuchet MS" pitchFamily="34" charset="0"/>
+                <a:ea typeface="Trebuchet MS" pitchFamily="34" charset="-122"/>
+                <a:cs typeface="Trebuchet MS" pitchFamily="34" charset="-120"/>
+              </a:rPr>
+              <a:t>Syllables</a:t>
+            </a:r>
+            <a:endParaRPr lang="en-US" sz="1100" dirty="0"/>
+          </a:p>
+        </p:txBody>
+      </p:sp>
+      <p:sp>
+        <p:nvSpPr>
+          <p:cNvPr id="31" name="Shape 29"/>
+          <p:cNvSpPr/>
+          <p:nvPr/>
+        </p:nvSpPr>
+        <p:spPr>
+          <a:xfrm>
+            <a:off x="1874520" y="3273552"/>
+            <a:ext cx="6903720" cy="658368"/>
+          </a:xfrm>
+          <a:prstGeom prst="rect">
+            <a:avLst>
+              <a:gd name="adj" fmla="val 8333"/>
+            </a:avLst>
+          </a:prstGeom>
+          <a:solidFill>
+            <a:srgbClr val="F8FAFC"/>
+          </a:solidFill>
+          <a:ln w="12700">
+            <a:solidFill>
+              <a:srgbClr val="E2E8F0"/>
+            </a:solidFill>
+            <a:prstDash val="dash"/>
+          </a:ln>
+        </p:spPr>
+      </p:sp>
+      <p:sp>
+        <p:nvSpPr>
+          <p:cNvPr id="32" name="Text 30"/>
+          <p:cNvSpPr/>
+          <p:nvPr/>
+        </p:nvSpPr>
+        <p:spPr>
+          <a:xfrm>
+            <a:off x="1874520" y="3273552"/>
+            <a:ext cx="6903720" cy="658368"/>
+          </a:xfrm>
+          <a:prstGeom prst="rect">
+            <a:avLst/>
+          </a:prstGeom>
+          <a:noFill/>
+          <a:ln/>
+        </p:spPr>
+        <p:txBody>
+          <a:bodyPr wrap="square" rtlCol="0" anchor="ctr"/>
+          <a:lstStyle/>
+          <a:p>
+            <a:pPr algn="ctr" indent="0" marL="0">
+              <a:buNone/>
+            </a:pPr>
+            <a:r>
+              <a:rPr lang="en-US" sz="1100" i="1" dirty="0">
+                <a:solidFill>
+                  <a:srgbClr val="CBD5E1"/>
                 </a:solidFill>
                 <a:latin typeface="Calibri" pitchFamily="34" charset="0"/>
                 <a:ea typeface="Calibri" pitchFamily="34" charset="-122"/>
                 <a:cs typeface="Calibri" pitchFamily="34" charset="-120"/>
               </a:rPr>
-              <a:t>ti makes /sh/ sound</a:t>
-            </a:r>
-            <a:endParaRPr lang="en-US" sz="700" dirty="0"/>
-          </a:p>
-        </p:txBody>
-      </p:sp>
-      <p:sp>
-        <p:nvSpPr>
-          <p:cNvPr id="31" name="Shape 29"/>
-          <p:cNvSpPr/>
-          <p:nvPr/>
-        </p:nvSpPr>
-        <p:spPr>
-          <a:xfrm>
-            <a:off x="365760" y="3273552"/>
-            <a:ext cx="1371600" cy="658368"/>
+              <a:t>Write here...</a:t>
+            </a:r>
+            <a:endParaRPr lang="en-US" sz="1100" dirty="0"/>
+          </a:p>
+        </p:txBody>
+      </p:sp>
+      <p:sp>
+        <p:nvSpPr>
+          <p:cNvPr id="33" name="Shape 31"/>
+          <p:cNvSpPr/>
+          <p:nvPr/>
+        </p:nvSpPr>
+        <p:spPr>
+          <a:xfrm>
+            <a:off x="365760" y="4096512"/>
+            <a:ext cx="1371600" cy="804672"/>
           </a:xfrm>
           <a:prstGeom prst="rect">
             <a:avLst>
-              <a:gd name="adj" fmla="val 8333"/>
+              <a:gd name="adj" fmla="val 6818"/>
             </a:avLst>
           </a:prstGeom>
           <a:solidFill>
@@ -20443,14 +20971,14 @@
       </p:sp>
       <p:sp>
         <p:nvSpPr>
-          <p:cNvPr id="32" name="Text 30"/>
-          <p:cNvSpPr/>
-          <p:nvPr/>
-        </p:nvSpPr>
-        <p:spPr>
-          <a:xfrm>
-            <a:off x="365760" y="3273552"/>
-            <a:ext cx="1371600" cy="658368"/>
+          <p:cNvPr id="34" name="Text 32"/>
+          <p:cNvSpPr/>
+          <p:nvPr/>
+        </p:nvSpPr>
+        <p:spPr>
+          <a:xfrm>
+            <a:off x="365760" y="4096512"/>
+            <a:ext cx="1371600" cy="804672"/>
           </a:xfrm>
           <a:prstGeom prst="rect">
             <a:avLst/>
@@ -20474,7 +21002,7 @@
                 <a:ea typeface="Trebuchet MS" pitchFamily="34" charset="-122"/>
                 <a:cs typeface="Trebuchet MS" pitchFamily="34" charset="-120"/>
               </a:rPr>
-              <a:t>Syllables</a:t>
+              <a:t>Phonemes</a:t>
             </a:r>
             <a:endParaRPr lang="en-US" sz="1100" dirty="0"/>
           </a:p>
@@ -20482,80 +21010,14 @@
       </p:sp>
       <p:sp>
         <p:nvSpPr>
-          <p:cNvPr id="33" name="Shape 31"/>
-          <p:cNvSpPr/>
-          <p:nvPr/>
-        </p:nvSpPr>
-        <p:spPr>
-          <a:xfrm>
-            <a:off x="1874520" y="3273552"/>
-            <a:ext cx="6903720" cy="658368"/>
-          </a:xfrm>
-          <a:prstGeom prst="rect">
-            <a:avLst>
-              <a:gd name="adj" fmla="val 8333"/>
-            </a:avLst>
-          </a:prstGeom>
-          <a:solidFill>
-            <a:srgbClr val="F8FAFC"/>
-          </a:solidFill>
-          <a:ln w="12700">
-            <a:solidFill>
-              <a:srgbClr val="E2E8F0"/>
-            </a:solidFill>
-            <a:prstDash val="dash"/>
-          </a:ln>
-        </p:spPr>
-      </p:sp>
-      <p:sp>
-        <p:nvSpPr>
-          <p:cNvPr id="34" name="Text 32"/>
-          <p:cNvSpPr/>
-          <p:nvPr/>
-        </p:nvSpPr>
-        <p:spPr>
-          <a:xfrm>
-            <a:off x="1874520" y="3273552"/>
-            <a:ext cx="6903720" cy="658368"/>
-          </a:xfrm>
-          <a:prstGeom prst="rect">
-            <a:avLst/>
-          </a:prstGeom>
-          <a:noFill/>
-          <a:ln/>
-        </p:spPr>
-        <p:txBody>
-          <a:bodyPr wrap="square" rtlCol="0" anchor="ctr"/>
-          <a:lstStyle/>
-          <a:p>
-            <a:pPr algn="ctr" indent="0" marL="0">
-              <a:buNone/>
-            </a:pPr>
-            <a:r>
-              <a:rPr lang="en-US" sz="1100" i="1" dirty="0">
-                <a:solidFill>
-                  <a:srgbClr val="CBD5E1"/>
-                </a:solidFill>
-                <a:latin typeface="Calibri" pitchFamily="34" charset="0"/>
-                <a:ea typeface="Calibri" pitchFamily="34" charset="-122"/>
-                <a:cs typeface="Calibri" pitchFamily="34" charset="-120"/>
-              </a:rPr>
-              <a:t>Write here...</a:t>
-            </a:r>
-            <a:endParaRPr lang="en-US" sz="1100" dirty="0"/>
-          </a:p>
-        </p:txBody>
-      </p:sp>
-      <p:sp>
-        <p:nvSpPr>
           <p:cNvPr id="35" name="Shape 33"/>
           <p:cNvSpPr/>
           <p:nvPr/>
         </p:nvSpPr>
         <p:spPr>
           <a:xfrm>
-            <a:off x="365760" y="4096512"/>
-            <a:ext cx="1371600" cy="804672"/>
+            <a:off x="1874520" y="4096512"/>
+            <a:ext cx="6903720" cy="804672"/>
           </a:xfrm>
           <a:prstGeom prst="rect">
             <a:avLst>
@@ -20563,85 +21025,19 @@
             </a:avLst>
           </a:prstGeom>
           <a:solidFill>
-            <a:srgbClr val="E2E8F0"/>
+            <a:srgbClr val="F8FAFC"/>
           </a:solidFill>
           <a:ln w="12700">
             <a:solidFill>
               <a:srgbClr val="E2E8F0"/>
             </a:solidFill>
-            <a:prstDash val="solid"/>
+            <a:prstDash val="dash"/>
           </a:ln>
         </p:spPr>
       </p:sp>
       <p:sp>
         <p:nvSpPr>
           <p:cNvPr id="36" name="Text 34"/>
-          <p:cNvSpPr/>
-          <p:nvPr/>
-        </p:nvSpPr>
-        <p:spPr>
-          <a:xfrm>
-            <a:off x="365760" y="4096512"/>
-            <a:ext cx="1371600" cy="804672"/>
-          </a:xfrm>
-          <a:prstGeom prst="rect">
-            <a:avLst/>
-          </a:prstGeom>
-          <a:noFill/>
-          <a:ln/>
-        </p:spPr>
-        <p:txBody>
-          <a:bodyPr wrap="square" lIns="0" tIns="0" rIns="0" bIns="0" rtlCol="0" anchor="ctr"/>
-          <a:lstStyle/>
-          <a:p>
-            <a:pPr algn="ctr" indent="0" marL="0">
-              <a:buNone/>
-            </a:pPr>
-            <a:r>
-              <a:rPr lang="en-US" sz="1100" b="1" dirty="0">
-                <a:solidFill>
-                  <a:srgbClr val="475569"/>
-                </a:solidFill>
-                <a:latin typeface="Trebuchet MS" pitchFamily="34" charset="0"/>
-                <a:ea typeface="Trebuchet MS" pitchFamily="34" charset="-122"/>
-                <a:cs typeface="Trebuchet MS" pitchFamily="34" charset="-120"/>
-              </a:rPr>
-              <a:t>Phonemes</a:t>
-            </a:r>
-            <a:endParaRPr lang="en-US" sz="1100" dirty="0"/>
-          </a:p>
-        </p:txBody>
-      </p:sp>
-      <p:sp>
-        <p:nvSpPr>
-          <p:cNvPr id="37" name="Shape 35"/>
-          <p:cNvSpPr/>
-          <p:nvPr/>
-        </p:nvSpPr>
-        <p:spPr>
-          <a:xfrm>
-            <a:off x="1874520" y="4096512"/>
-            <a:ext cx="6903720" cy="804672"/>
-          </a:xfrm>
-          <a:prstGeom prst="rect">
-            <a:avLst>
-              <a:gd name="adj" fmla="val 6818"/>
-            </a:avLst>
-          </a:prstGeom>
-          <a:solidFill>
-            <a:srgbClr val="F8FAFC"/>
-          </a:solidFill>
-          <a:ln w="12700">
-            <a:solidFill>
-              <a:srgbClr val="E2E8F0"/>
-            </a:solidFill>
-            <a:prstDash val="dash"/>
-          </a:ln>
-        </p:spPr>
-      </p:sp>
-      <p:sp>
-        <p:nvSpPr>
-          <p:cNvPr id="38" name="Text 36"/>
           <p:cNvSpPr/>
           <p:nvPr/>
         </p:nvSpPr>
@@ -21103,7 +21499,7 @@
                 <a:ea typeface="Trebuchet MS" pitchFamily="34" charset="-122"/>
                 <a:cs typeface="Trebuchet MS" pitchFamily="34" charset="-120"/>
               </a:rPr>
-              <a:t>preparation</a:t>
+              <a:t>unprepared</a:t>
             </a:r>
             <a:endParaRPr lang="en-US" sz="2800" dirty="0"/>
           </a:p>
@@ -21242,7 +21638,7 @@
                 <a:ea typeface="Trebuchet MS" pitchFamily="34" charset="-122"/>
                 <a:cs typeface="Trebuchet MS" pitchFamily="34" charset="-120"/>
               </a:rPr>
-              <a:t>pre</a:t>
+              <a:t>un</a:t>
             </a:r>
             <a:endParaRPr lang="en-US" sz="1300" dirty="0"/>
           </a:p>
@@ -21281,7 +21677,7 @@
                 <a:ea typeface="Calibri" pitchFamily="34" charset="-122"/>
                 <a:cs typeface="Calibri" pitchFamily="34" charset="-120"/>
               </a:rPr>
-              <a:t>before</a:t>
+              <a:t>not</a:t>
             </a:r>
             <a:endParaRPr lang="en-US" sz="850" dirty="0"/>
           </a:p>
@@ -21354,7 +21750,7 @@
                 <a:ea typeface="Trebuchet MS" pitchFamily="34" charset="-122"/>
                 <a:cs typeface="Trebuchet MS" pitchFamily="34" charset="-120"/>
               </a:rPr>
-              <a:t>par</a:t>
+              <a:t>pre</a:t>
             </a:r>
             <a:endParaRPr lang="en-US" sz="1300" dirty="0"/>
           </a:p>
@@ -21393,7 +21789,7 @@
                 <a:ea typeface="Calibri" pitchFamily="34" charset="-122"/>
                 <a:cs typeface="Calibri" pitchFamily="34" charset="-120"/>
               </a:rPr>
-              <a:t>make ready</a:t>
+              <a:t>before</a:t>
             </a:r>
             <a:endParaRPr lang="en-US" sz="850" dirty="0"/>
           </a:p>
@@ -21401,46 +21797,7 @@
       </p:sp>
       <p:sp>
         <p:nvSpPr>
-          <p:cNvPr id="22" name="Text 20"/>
-          <p:cNvSpPr/>
-          <p:nvPr/>
-        </p:nvSpPr>
-        <p:spPr>
-          <a:xfrm>
-            <a:off x="3659429" y="2752344"/>
-            <a:ext cx="1581912" cy="182880"/>
-          </a:xfrm>
-          <a:prstGeom prst="rect">
-            <a:avLst/>
-          </a:prstGeom>
-          <a:noFill/>
-          <a:ln/>
-        </p:spPr>
-        <p:txBody>
-          <a:bodyPr wrap="square" lIns="0" tIns="0" rIns="0" bIns="0" rtlCol="0" anchor="t"/>
-          <a:lstStyle/>
-          <a:p>
-            <a:pPr algn="ctr" indent="0" marL="0">
-              <a:buNone/>
-            </a:pPr>
-            <a:r>
-              <a:rPr lang="en-US" sz="700" i="1" dirty="0">
-                <a:solidFill>
-                  <a:srgbClr val="94A3B8"/>
-                </a:solidFill>
-                <a:latin typeface="Calibri" pitchFamily="34" charset="0"/>
-                <a:ea typeface="Calibri" pitchFamily="34" charset="-122"/>
-                <a:cs typeface="Calibri" pitchFamily="34" charset="-120"/>
-              </a:rPr>
-              <a:t>'e' dropped before vowel suffix</a:t>
-            </a:r>
-            <a:endParaRPr lang="en-US" sz="700" dirty="0"/>
-          </a:p>
-        </p:txBody>
-      </p:sp>
-      <p:sp>
-        <p:nvSpPr>
-          <p:cNvPr id="23" name="Shape 21"/>
+          <p:cNvPr id="22" name="Shape 20"/>
           <p:cNvSpPr/>
           <p:nvPr/>
         </p:nvSpPr>
@@ -21474,7 +21831,7 @@
       </p:sp>
       <p:sp>
         <p:nvSpPr>
-          <p:cNvPr id="24" name="Text 22"/>
+          <p:cNvPr id="23" name="Text 21"/>
           <p:cNvSpPr/>
           <p:nvPr/>
         </p:nvSpPr>
@@ -21505,7 +21862,7 @@
                 <a:ea typeface="Trebuchet MS" pitchFamily="34" charset="-122"/>
                 <a:cs typeface="Trebuchet MS" pitchFamily="34" charset="-120"/>
               </a:rPr>
-              <a:t>a</a:t>
+              <a:t>pare</a:t>
             </a:r>
             <a:endParaRPr lang="en-US" sz="1300" dirty="0"/>
           </a:p>
@@ -21513,7 +21870,7 @@
       </p:sp>
       <p:sp>
         <p:nvSpPr>
-          <p:cNvPr id="25" name="Text 23"/>
+          <p:cNvPr id="24" name="Text 22"/>
           <p:cNvSpPr/>
           <p:nvPr/>
         </p:nvSpPr>
@@ -21544,7 +21901,7 @@
                 <a:ea typeface="Calibri" pitchFamily="34" charset="-122"/>
                 <a:cs typeface="Calibri" pitchFamily="34" charset="-120"/>
               </a:rPr>
-              <a:t>connecting vowel</a:t>
+              <a:t>make ready</a:t>
             </a:r>
             <a:endParaRPr lang="en-US" sz="850" dirty="0"/>
           </a:p>
@@ -21552,7 +21909,7 @@
       </p:sp>
       <p:sp>
         <p:nvSpPr>
-          <p:cNvPr id="26" name="Text 24"/>
+          <p:cNvPr id="25" name="Text 23"/>
           <p:cNvSpPr/>
           <p:nvPr/>
         </p:nvSpPr>
@@ -21583,7 +21940,7 @@
                 <a:ea typeface="Calibri" pitchFamily="34" charset="-122"/>
                 <a:cs typeface="Calibri" pitchFamily="34" charset="-120"/>
               </a:rPr>
-              <a:t>links base to suffix</a:t>
+              <a:t>'e' dropped before vowel suffix</a:t>
             </a:r>
             <a:endParaRPr lang="en-US" sz="700" dirty="0"/>
           </a:p>
@@ -21591,7 +21948,7 @@
       </p:sp>
       <p:sp>
         <p:nvSpPr>
-          <p:cNvPr id="27" name="Shape 25"/>
+          <p:cNvPr id="26" name="Shape 24"/>
           <p:cNvSpPr/>
           <p:nvPr/>
         </p:nvSpPr>
@@ -21625,7 +21982,7 @@
       </p:sp>
       <p:sp>
         <p:nvSpPr>
-          <p:cNvPr id="28" name="Text 26"/>
+          <p:cNvPr id="27" name="Text 25"/>
           <p:cNvSpPr/>
           <p:nvPr/>
         </p:nvSpPr>
@@ -21656,7 +22013,7 @@
                 <a:ea typeface="Trebuchet MS" pitchFamily="34" charset="-122"/>
                 <a:cs typeface="Trebuchet MS" pitchFamily="34" charset="-120"/>
               </a:rPr>
-              <a:t>tion</a:t>
+              <a:t>ed</a:t>
             </a:r>
             <a:endParaRPr lang="en-US" sz="1300" dirty="0"/>
           </a:p>
@@ -21664,7 +22021,7 @@
       </p:sp>
       <p:sp>
         <p:nvSpPr>
-          <p:cNvPr id="29" name="Text 27"/>
+          <p:cNvPr id="28" name="Text 26"/>
           <p:cNvSpPr/>
           <p:nvPr/>
         </p:nvSpPr>
@@ -21695,7 +22052,7 @@
                 <a:ea typeface="Calibri" pitchFamily="34" charset="-122"/>
                 <a:cs typeface="Calibri" pitchFamily="34" charset="-120"/>
               </a:rPr>
-              <a:t>act or process</a:t>
+              <a:t>past tense / state of being</a:t>
             </a:r>
             <a:endParaRPr lang="en-US" sz="850" dirty="0"/>
           </a:p>
@@ -21703,46 +22060,7 @@
       </p:sp>
       <p:sp>
         <p:nvSpPr>
-          <p:cNvPr id="30" name="Text 28"/>
-          <p:cNvSpPr/>
-          <p:nvPr/>
-        </p:nvSpPr>
-        <p:spPr>
-          <a:xfrm>
-            <a:off x="6998818" y="2752344"/>
-            <a:ext cx="1581912" cy="182880"/>
-          </a:xfrm>
-          <a:prstGeom prst="rect">
-            <a:avLst/>
-          </a:prstGeom>
-          <a:noFill/>
-          <a:ln/>
-        </p:spPr>
-        <p:txBody>
-          <a:bodyPr wrap="square" lIns="0" tIns="0" rIns="0" bIns="0" rtlCol="0" anchor="t"/>
-          <a:lstStyle/>
-          <a:p>
-            <a:pPr algn="ctr" indent="0" marL="0">
-              <a:buNone/>
-            </a:pPr>
-            <a:r>
-              <a:rPr lang="en-US" sz="700" i="1" dirty="0">
-                <a:solidFill>
-                  <a:srgbClr val="94A3B8"/>
-                </a:solidFill>
-                <a:latin typeface="Calibri" pitchFamily="34" charset="0"/>
-                <a:ea typeface="Calibri" pitchFamily="34" charset="-122"/>
-                <a:cs typeface="Calibri" pitchFamily="34" charset="-120"/>
-              </a:rPr>
-              <a:t>ti makes /sh/ sound</a:t>
-            </a:r>
-            <a:endParaRPr lang="en-US" sz="700" dirty="0"/>
-          </a:p>
-        </p:txBody>
-      </p:sp>
-      <p:sp>
-        <p:nvSpPr>
-          <p:cNvPr id="31" name="Shape 29"/>
+          <p:cNvPr id="29" name="Shape 27"/>
           <p:cNvSpPr/>
           <p:nvPr/>
         </p:nvSpPr>
@@ -21769,7 +22087,7 @@
       </p:sp>
       <p:sp>
         <p:nvSpPr>
-          <p:cNvPr id="32" name="Text 30"/>
+          <p:cNvPr id="30" name="Text 28"/>
           <p:cNvSpPr/>
           <p:nvPr/>
         </p:nvSpPr>
@@ -21808,7 +22126,7 @@
       </p:sp>
       <p:sp>
         <p:nvSpPr>
-          <p:cNvPr id="33" name="Shape 31"/>
+          <p:cNvPr id="31" name="Shape 29"/>
           <p:cNvSpPr/>
           <p:nvPr/>
         </p:nvSpPr>
@@ -21835,14 +22153,14 @@
       </p:sp>
       <p:sp>
         <p:nvSpPr>
-          <p:cNvPr id="34" name="Shape 32"/>
-          <p:cNvSpPr/>
-          <p:nvPr/>
-        </p:nvSpPr>
-        <p:spPr>
-          <a:xfrm>
-            <a:off x="1975104" y="3364992"/>
-            <a:ext cx="1554480" cy="475488"/>
+          <p:cNvPr id="32" name="Shape 30"/>
+          <p:cNvSpPr/>
+          <p:nvPr/>
+        </p:nvSpPr>
+        <p:spPr>
+          <a:xfrm>
+            <a:off x="2313432" y="3364992"/>
+            <a:ext cx="1645920" cy="475488"/>
           </a:xfrm>
           <a:prstGeom prst="rect">
             <a:avLst>
@@ -21862,14 +22180,14 @@
       </p:sp>
       <p:sp>
         <p:nvSpPr>
-          <p:cNvPr id="35" name="Text 33"/>
-          <p:cNvSpPr/>
-          <p:nvPr/>
-        </p:nvSpPr>
-        <p:spPr>
-          <a:xfrm>
-            <a:off x="1975104" y="3364992"/>
-            <a:ext cx="1554480" cy="475488"/>
+          <p:cNvPr id="33" name="Text 31"/>
+          <p:cNvSpPr/>
+          <p:nvPr/>
+        </p:nvSpPr>
+        <p:spPr>
+          <a:xfrm>
+            <a:off x="2313432" y="3364992"/>
+            <a:ext cx="1645920" cy="475488"/>
           </a:xfrm>
           <a:prstGeom prst="rect">
             <a:avLst/>
@@ -21893,7 +22211,7 @@
                 <a:ea typeface="Trebuchet MS" pitchFamily="34" charset="-122"/>
                 <a:cs typeface="Trebuchet MS" pitchFamily="34" charset="-120"/>
               </a:rPr>
-              <a:t>prep</a:t>
+              <a:t>un</a:t>
             </a:r>
             <a:endParaRPr lang="en-US" sz="1400" dirty="0"/>
           </a:p>
@@ -21901,14 +22219,14 @@
       </p:sp>
       <p:sp>
         <p:nvSpPr>
-          <p:cNvPr id="36" name="Text 34"/>
-          <p:cNvSpPr/>
-          <p:nvPr/>
-        </p:nvSpPr>
-        <p:spPr>
-          <a:xfrm>
-            <a:off x="3529584" y="3364992"/>
-            <a:ext cx="73152" cy="475488"/>
+          <p:cNvPr id="34" name="Text 32"/>
+          <p:cNvSpPr/>
+          <p:nvPr/>
+        </p:nvSpPr>
+        <p:spPr>
+          <a:xfrm>
+            <a:off x="3959352" y="3364992"/>
+            <a:ext cx="411480" cy="475488"/>
           </a:xfrm>
           <a:prstGeom prst="rect">
             <a:avLst/>
@@ -21940,14 +22258,14 @@
       </p:sp>
       <p:sp>
         <p:nvSpPr>
-          <p:cNvPr id="37" name="Shape 35"/>
-          <p:cNvSpPr/>
-          <p:nvPr/>
-        </p:nvSpPr>
-        <p:spPr>
-          <a:xfrm>
-            <a:off x="3602736" y="3364992"/>
-            <a:ext cx="1554480" cy="475488"/>
+          <p:cNvPr id="35" name="Shape 33"/>
+          <p:cNvSpPr/>
+          <p:nvPr/>
+        </p:nvSpPr>
+        <p:spPr>
+          <a:xfrm>
+            <a:off x="4370832" y="3364992"/>
+            <a:ext cx="1645920" cy="475488"/>
           </a:xfrm>
           <a:prstGeom prst="rect">
             <a:avLst>
@@ -21967,14 +22285,14 @@
       </p:sp>
       <p:sp>
         <p:nvSpPr>
-          <p:cNvPr id="38" name="Text 36"/>
-          <p:cNvSpPr/>
-          <p:nvPr/>
-        </p:nvSpPr>
-        <p:spPr>
-          <a:xfrm>
-            <a:off x="3602736" y="3364992"/>
-            <a:ext cx="1554480" cy="475488"/>
+          <p:cNvPr id="36" name="Text 34"/>
+          <p:cNvSpPr/>
+          <p:nvPr/>
+        </p:nvSpPr>
+        <p:spPr>
+          <a:xfrm>
+            <a:off x="4370832" y="3364992"/>
+            <a:ext cx="1645920" cy="475488"/>
           </a:xfrm>
           <a:prstGeom prst="rect">
             <a:avLst/>
@@ -21998,7 +22316,7 @@
                 <a:ea typeface="Trebuchet MS" pitchFamily="34" charset="-122"/>
                 <a:cs typeface="Trebuchet MS" pitchFamily="34" charset="-120"/>
               </a:rPr>
-              <a:t>a</a:t>
+              <a:t>pre</a:t>
             </a:r>
             <a:endParaRPr lang="en-US" sz="1400" dirty="0"/>
           </a:p>
@@ -22006,14 +22324,14 @@
       </p:sp>
       <p:sp>
         <p:nvSpPr>
-          <p:cNvPr id="39" name="Text 37"/>
-          <p:cNvSpPr/>
-          <p:nvPr/>
-        </p:nvSpPr>
-        <p:spPr>
-          <a:xfrm>
-            <a:off x="5157216" y="3364992"/>
-            <a:ext cx="73152" cy="475488"/>
+          <p:cNvPr id="37" name="Text 35"/>
+          <p:cNvSpPr/>
+          <p:nvPr/>
+        </p:nvSpPr>
+        <p:spPr>
+          <a:xfrm>
+            <a:off x="6016752" y="3364992"/>
+            <a:ext cx="411480" cy="475488"/>
           </a:xfrm>
           <a:prstGeom prst="rect">
             <a:avLst/>
@@ -22045,14 +22363,14 @@
       </p:sp>
       <p:sp>
         <p:nvSpPr>
-          <p:cNvPr id="40" name="Shape 38"/>
-          <p:cNvSpPr/>
-          <p:nvPr/>
-        </p:nvSpPr>
-        <p:spPr>
-          <a:xfrm>
-            <a:off x="5230368" y="3364992"/>
-            <a:ext cx="1554480" cy="475488"/>
+          <p:cNvPr id="38" name="Shape 36"/>
+          <p:cNvSpPr/>
+          <p:nvPr/>
+        </p:nvSpPr>
+        <p:spPr>
+          <a:xfrm>
+            <a:off x="6428232" y="3364992"/>
+            <a:ext cx="1645920" cy="475488"/>
           </a:xfrm>
           <a:prstGeom prst="rect">
             <a:avLst>
@@ -22072,14 +22390,14 @@
       </p:sp>
       <p:sp>
         <p:nvSpPr>
-          <p:cNvPr id="41" name="Text 39"/>
-          <p:cNvSpPr/>
-          <p:nvPr/>
-        </p:nvSpPr>
-        <p:spPr>
-          <a:xfrm>
-            <a:off x="5230368" y="3364992"/>
-            <a:ext cx="1554480" cy="475488"/>
+          <p:cNvPr id="39" name="Text 37"/>
+          <p:cNvSpPr/>
+          <p:nvPr/>
+        </p:nvSpPr>
+        <p:spPr>
+          <a:xfrm>
+            <a:off x="6428232" y="3364992"/>
+            <a:ext cx="1645920" cy="475488"/>
           </a:xfrm>
           <a:prstGeom prst="rect">
             <a:avLst/>
@@ -22103,7 +22421,7 @@
                 <a:ea typeface="Trebuchet MS" pitchFamily="34" charset="-122"/>
                 <a:cs typeface="Trebuchet MS" pitchFamily="34" charset="-120"/>
               </a:rPr>
-              <a:t>ra</a:t>
+              <a:t>pared</a:t>
             </a:r>
             <a:endParaRPr lang="en-US" sz="1400" dirty="0"/>
           </a:p>
@@ -22111,119 +22429,80 @@
       </p:sp>
       <p:sp>
         <p:nvSpPr>
-          <p:cNvPr id="42" name="Text 40"/>
-          <p:cNvSpPr/>
-          <p:nvPr/>
-        </p:nvSpPr>
-        <p:spPr>
-          <a:xfrm>
-            <a:off x="6784848" y="3364992"/>
-            <a:ext cx="73152" cy="475488"/>
-          </a:xfrm>
-          <a:prstGeom prst="rect">
-            <a:avLst/>
-          </a:prstGeom>
-          <a:noFill/>
-          <a:ln/>
-        </p:spPr>
-        <p:txBody>
-          <a:bodyPr wrap="square" lIns="0" tIns="0" rIns="0" bIns="0" rtlCol="0" anchor="ctr"/>
-          <a:lstStyle/>
-          <a:p>
-            <a:pPr algn="ctr" indent="0" marL="0">
-              <a:buNone/>
-            </a:pPr>
-            <a:r>
-              <a:rPr lang="en-US" sz="1600" b="1" dirty="0">
-                <a:solidFill>
-                  <a:srgbClr val="0D9488"/>
+          <p:cNvPr id="40" name="Shape 38"/>
+          <p:cNvSpPr/>
+          <p:nvPr/>
+        </p:nvSpPr>
+        <p:spPr>
+          <a:xfrm>
+            <a:off x="365760" y="4096512"/>
+            <a:ext cx="1371600" cy="804672"/>
+          </a:xfrm>
+          <a:prstGeom prst="rect">
+            <a:avLst>
+              <a:gd name="adj" fmla="val 6818"/>
+            </a:avLst>
+          </a:prstGeom>
+          <a:solidFill>
+            <a:srgbClr val="E2E8F0"/>
+          </a:solidFill>
+          <a:ln w="12700">
+            <a:solidFill>
+              <a:srgbClr val="E2E8F0"/>
+            </a:solidFill>
+            <a:prstDash val="solid"/>
+          </a:ln>
+        </p:spPr>
+      </p:sp>
+      <p:sp>
+        <p:nvSpPr>
+          <p:cNvPr id="41" name="Text 39"/>
+          <p:cNvSpPr/>
+          <p:nvPr/>
+        </p:nvSpPr>
+        <p:spPr>
+          <a:xfrm>
+            <a:off x="365760" y="4096512"/>
+            <a:ext cx="1371600" cy="804672"/>
+          </a:xfrm>
+          <a:prstGeom prst="rect">
+            <a:avLst/>
+          </a:prstGeom>
+          <a:noFill/>
+          <a:ln/>
+        </p:spPr>
+        <p:txBody>
+          <a:bodyPr wrap="square" lIns="0" tIns="0" rIns="0" bIns="0" rtlCol="0" anchor="ctr"/>
+          <a:lstStyle/>
+          <a:p>
+            <a:pPr algn="ctr" indent="0" marL="0">
+              <a:buNone/>
+            </a:pPr>
+            <a:r>
+              <a:rPr lang="en-US" sz="1100" b="1" dirty="0">
+                <a:solidFill>
+                  <a:srgbClr val="475569"/>
                 </a:solidFill>
                 <a:latin typeface="Trebuchet MS" pitchFamily="34" charset="0"/>
                 <a:ea typeface="Trebuchet MS" pitchFamily="34" charset="-122"/>
                 <a:cs typeface="Trebuchet MS" pitchFamily="34" charset="-120"/>
               </a:rPr>
-              <a:t>·</a:t>
-            </a:r>
-            <a:endParaRPr lang="en-US" sz="1600" dirty="0"/>
-          </a:p>
-        </p:txBody>
-      </p:sp>
-      <p:sp>
-        <p:nvSpPr>
-          <p:cNvPr id="43" name="Shape 41"/>
-          <p:cNvSpPr/>
-          <p:nvPr/>
-        </p:nvSpPr>
-        <p:spPr>
-          <a:xfrm>
-            <a:off x="6858000" y="3364992"/>
-            <a:ext cx="1554480" cy="475488"/>
-          </a:xfrm>
-          <a:prstGeom prst="rect">
-            <a:avLst>
-              <a:gd name="adj" fmla="val 9615"/>
-            </a:avLst>
-          </a:prstGeom>
-          <a:solidFill>
-            <a:srgbClr val="FFFFFF"/>
-          </a:solidFill>
-          <a:ln w="12700">
-            <a:solidFill>
-              <a:srgbClr val="0D9488"/>
-            </a:solidFill>
-            <a:prstDash val="solid"/>
-          </a:ln>
-        </p:spPr>
-      </p:sp>
-      <p:sp>
-        <p:nvSpPr>
-          <p:cNvPr id="44" name="Text 42"/>
-          <p:cNvSpPr/>
-          <p:nvPr/>
-        </p:nvSpPr>
-        <p:spPr>
-          <a:xfrm>
-            <a:off x="6858000" y="3364992"/>
-            <a:ext cx="1554480" cy="475488"/>
-          </a:xfrm>
-          <a:prstGeom prst="rect">
-            <a:avLst/>
-          </a:prstGeom>
-          <a:noFill/>
-          <a:ln/>
-        </p:spPr>
-        <p:txBody>
-          <a:bodyPr wrap="square" lIns="0" tIns="0" rIns="0" bIns="0" rtlCol="0" anchor="ctr"/>
-          <a:lstStyle/>
-          <a:p>
-            <a:pPr algn="ctr" indent="0" marL="0">
-              <a:buNone/>
-            </a:pPr>
-            <a:r>
-              <a:rPr lang="en-US" sz="1400" b="1" dirty="0">
-                <a:solidFill>
-                  <a:srgbClr val="0D9488"/>
-                </a:solidFill>
-                <a:latin typeface="Trebuchet MS" pitchFamily="34" charset="0"/>
-                <a:ea typeface="Trebuchet MS" pitchFamily="34" charset="-122"/>
-                <a:cs typeface="Trebuchet MS" pitchFamily="34" charset="-120"/>
-              </a:rPr>
-              <a:t>tion</a:t>
-            </a:r>
-            <a:endParaRPr lang="en-US" sz="1400" dirty="0"/>
-          </a:p>
-        </p:txBody>
-      </p:sp>
-      <p:sp>
-        <p:nvSpPr>
-          <p:cNvPr id="45" name="Shape 43"/>
-          <p:cNvSpPr/>
-          <p:nvPr/>
-        </p:nvSpPr>
-        <p:spPr>
-          <a:xfrm>
-            <a:off x="365760" y="4096512"/>
-            <a:ext cx="1371600" cy="804672"/>
+              <a:t>Phonemes</a:t>
+            </a:r>
+            <a:endParaRPr lang="en-US" sz="1100" dirty="0"/>
+          </a:p>
+        </p:txBody>
+      </p:sp>
+      <p:sp>
+        <p:nvSpPr>
+          <p:cNvPr id="42" name="Shape 40"/>
+          <p:cNvSpPr/>
+          <p:nvPr/>
+        </p:nvSpPr>
+        <p:spPr>
+          <a:xfrm>
+            <a:off x="1874520" y="4096512"/>
+            <a:ext cx="6903720" cy="804672"/>
           </a:xfrm>
           <a:prstGeom prst="rect">
             <a:avLst>
@@ -22231,85 +22510,19 @@
             </a:avLst>
           </a:prstGeom>
           <a:solidFill>
-            <a:srgbClr val="E2E8F0"/>
+            <a:srgbClr val="F8FAFC"/>
           </a:solidFill>
           <a:ln w="12700">
             <a:solidFill>
               <a:srgbClr val="E2E8F0"/>
             </a:solidFill>
-            <a:prstDash val="solid"/>
-          </a:ln>
-        </p:spPr>
-      </p:sp>
-      <p:sp>
-        <p:nvSpPr>
-          <p:cNvPr id="46" name="Text 44"/>
-          <p:cNvSpPr/>
-          <p:nvPr/>
-        </p:nvSpPr>
-        <p:spPr>
-          <a:xfrm>
-            <a:off x="365760" y="4096512"/>
-            <a:ext cx="1371600" cy="804672"/>
-          </a:xfrm>
-          <a:prstGeom prst="rect">
-            <a:avLst/>
-          </a:prstGeom>
-          <a:noFill/>
-          <a:ln/>
-        </p:spPr>
-        <p:txBody>
-          <a:bodyPr wrap="square" lIns="0" tIns="0" rIns="0" bIns="0" rtlCol="0" anchor="ctr"/>
-          <a:lstStyle/>
-          <a:p>
-            <a:pPr algn="ctr" indent="0" marL="0">
-              <a:buNone/>
-            </a:pPr>
-            <a:r>
-              <a:rPr lang="en-US" sz="1100" b="1" dirty="0">
-                <a:solidFill>
-                  <a:srgbClr val="475569"/>
-                </a:solidFill>
-                <a:latin typeface="Trebuchet MS" pitchFamily="34" charset="0"/>
-                <a:ea typeface="Trebuchet MS" pitchFamily="34" charset="-122"/>
-                <a:cs typeface="Trebuchet MS" pitchFamily="34" charset="-120"/>
-              </a:rPr>
-              <a:t>Phonemes</a:t>
-            </a:r>
-            <a:endParaRPr lang="en-US" sz="1100" dirty="0"/>
-          </a:p>
-        </p:txBody>
-      </p:sp>
-      <p:sp>
-        <p:nvSpPr>
-          <p:cNvPr id="47" name="Shape 45"/>
-          <p:cNvSpPr/>
-          <p:nvPr/>
-        </p:nvSpPr>
-        <p:spPr>
-          <a:xfrm>
-            <a:off x="1874520" y="4096512"/>
-            <a:ext cx="6903720" cy="804672"/>
-          </a:xfrm>
-          <a:prstGeom prst="rect">
-            <a:avLst>
-              <a:gd name="adj" fmla="val 6818"/>
-            </a:avLst>
-          </a:prstGeom>
-          <a:solidFill>
-            <a:srgbClr val="F8FAFC"/>
-          </a:solidFill>
-          <a:ln w="12700">
-            <a:solidFill>
-              <a:srgbClr val="E2E8F0"/>
-            </a:solidFill>
             <a:prstDash val="dash"/>
           </a:ln>
         </p:spPr>
       </p:sp>
       <p:sp>
         <p:nvSpPr>
-          <p:cNvPr id="48" name="Text 46"/>
+          <p:cNvPr id="43" name="Text 41"/>
           <p:cNvSpPr/>
           <p:nvPr/>
         </p:nvSpPr>
@@ -22771,7 +22984,7 @@
                 <a:ea typeface="Trebuchet MS" pitchFamily="34" charset="-122"/>
                 <a:cs typeface="Trebuchet MS" pitchFamily="34" charset="-120"/>
               </a:rPr>
-              <a:t>preparation</a:t>
+              <a:t>unprepared</a:t>
             </a:r>
             <a:endParaRPr lang="en-US" sz="2800" dirty="0"/>
           </a:p>
@@ -22910,7 +23123,7 @@
                 <a:ea typeface="Trebuchet MS" pitchFamily="34" charset="-122"/>
                 <a:cs typeface="Trebuchet MS" pitchFamily="34" charset="-120"/>
               </a:rPr>
-              <a:t>pre</a:t>
+              <a:t>un</a:t>
             </a:r>
             <a:endParaRPr lang="en-US" sz="1300" dirty="0"/>
           </a:p>
@@ -22949,7 +23162,7 @@
                 <a:ea typeface="Calibri" pitchFamily="34" charset="-122"/>
                 <a:cs typeface="Calibri" pitchFamily="34" charset="-120"/>
               </a:rPr>
-              <a:t>before</a:t>
+              <a:t>not</a:t>
             </a:r>
             <a:endParaRPr lang="en-US" sz="850" dirty="0"/>
           </a:p>
@@ -23022,7 +23235,7 @@
                 <a:ea typeface="Trebuchet MS" pitchFamily="34" charset="-122"/>
                 <a:cs typeface="Trebuchet MS" pitchFamily="34" charset="-120"/>
               </a:rPr>
-              <a:t>par</a:t>
+              <a:t>pre</a:t>
             </a:r>
             <a:endParaRPr lang="en-US" sz="1300" dirty="0"/>
           </a:p>
@@ -23061,7 +23274,7 @@
                 <a:ea typeface="Calibri" pitchFamily="34" charset="-122"/>
                 <a:cs typeface="Calibri" pitchFamily="34" charset="-120"/>
               </a:rPr>
-              <a:t>make ready</a:t>
+              <a:t>before</a:t>
             </a:r>
             <a:endParaRPr lang="en-US" sz="850" dirty="0"/>
           </a:p>
@@ -23069,46 +23282,7 @@
       </p:sp>
       <p:sp>
         <p:nvSpPr>
-          <p:cNvPr id="22" name="Text 20"/>
-          <p:cNvSpPr/>
-          <p:nvPr/>
-        </p:nvSpPr>
-        <p:spPr>
-          <a:xfrm>
-            <a:off x="3659429" y="2752344"/>
-            <a:ext cx="1581912" cy="182880"/>
-          </a:xfrm>
-          <a:prstGeom prst="rect">
-            <a:avLst/>
-          </a:prstGeom>
-          <a:noFill/>
-          <a:ln/>
-        </p:spPr>
-        <p:txBody>
-          <a:bodyPr wrap="square" lIns="0" tIns="0" rIns="0" bIns="0" rtlCol="0" anchor="t"/>
-          <a:lstStyle/>
-          <a:p>
-            <a:pPr algn="ctr" indent="0" marL="0">
-              <a:buNone/>
-            </a:pPr>
-            <a:r>
-              <a:rPr lang="en-US" sz="700" i="1" dirty="0">
-                <a:solidFill>
-                  <a:srgbClr val="94A3B8"/>
-                </a:solidFill>
-                <a:latin typeface="Calibri" pitchFamily="34" charset="0"/>
-                <a:ea typeface="Calibri" pitchFamily="34" charset="-122"/>
-                <a:cs typeface="Calibri" pitchFamily="34" charset="-120"/>
-              </a:rPr>
-              <a:t>'e' dropped before vowel suffix</a:t>
-            </a:r>
-            <a:endParaRPr lang="en-US" sz="700" dirty="0"/>
-          </a:p>
-        </p:txBody>
-      </p:sp>
-      <p:sp>
-        <p:nvSpPr>
-          <p:cNvPr id="23" name="Shape 21"/>
+          <p:cNvPr id="22" name="Shape 20"/>
           <p:cNvSpPr/>
           <p:nvPr/>
         </p:nvSpPr>
@@ -23142,7 +23316,7 @@
       </p:sp>
       <p:sp>
         <p:nvSpPr>
-          <p:cNvPr id="24" name="Text 22"/>
+          <p:cNvPr id="23" name="Text 21"/>
           <p:cNvSpPr/>
           <p:nvPr/>
         </p:nvSpPr>
@@ -23173,7 +23347,7 @@
                 <a:ea typeface="Trebuchet MS" pitchFamily="34" charset="-122"/>
                 <a:cs typeface="Trebuchet MS" pitchFamily="34" charset="-120"/>
               </a:rPr>
-              <a:t>a</a:t>
+              <a:t>pare</a:t>
             </a:r>
             <a:endParaRPr lang="en-US" sz="1300" dirty="0"/>
           </a:p>
@@ -23181,7 +23355,7 @@
       </p:sp>
       <p:sp>
         <p:nvSpPr>
-          <p:cNvPr id="25" name="Text 23"/>
+          <p:cNvPr id="24" name="Text 22"/>
           <p:cNvSpPr/>
           <p:nvPr/>
         </p:nvSpPr>
@@ -23212,7 +23386,7 @@
                 <a:ea typeface="Calibri" pitchFamily="34" charset="-122"/>
                 <a:cs typeface="Calibri" pitchFamily="34" charset="-120"/>
               </a:rPr>
-              <a:t>connecting vowel</a:t>
+              <a:t>make ready</a:t>
             </a:r>
             <a:endParaRPr lang="en-US" sz="850" dirty="0"/>
           </a:p>
@@ -23220,7 +23394,7 @@
       </p:sp>
       <p:sp>
         <p:nvSpPr>
-          <p:cNvPr id="26" name="Text 24"/>
+          <p:cNvPr id="25" name="Text 23"/>
           <p:cNvSpPr/>
           <p:nvPr/>
         </p:nvSpPr>
@@ -23251,7 +23425,7 @@
                 <a:ea typeface="Calibri" pitchFamily="34" charset="-122"/>
                 <a:cs typeface="Calibri" pitchFamily="34" charset="-120"/>
               </a:rPr>
-              <a:t>links base to suffix</a:t>
+              <a:t>'e' dropped before vowel suffix</a:t>
             </a:r>
             <a:endParaRPr lang="en-US" sz="700" dirty="0"/>
           </a:p>
@@ -23259,7 +23433,7 @@
       </p:sp>
       <p:sp>
         <p:nvSpPr>
-          <p:cNvPr id="27" name="Shape 25"/>
+          <p:cNvPr id="26" name="Shape 24"/>
           <p:cNvSpPr/>
           <p:nvPr/>
         </p:nvSpPr>
@@ -23293,7 +23467,7 @@
       </p:sp>
       <p:sp>
         <p:nvSpPr>
-          <p:cNvPr id="28" name="Text 26"/>
+          <p:cNvPr id="27" name="Text 25"/>
           <p:cNvSpPr/>
           <p:nvPr/>
         </p:nvSpPr>
@@ -23324,7 +23498,7 @@
                 <a:ea typeface="Trebuchet MS" pitchFamily="34" charset="-122"/>
                 <a:cs typeface="Trebuchet MS" pitchFamily="34" charset="-120"/>
               </a:rPr>
-              <a:t>tion</a:t>
+              <a:t>ed</a:t>
             </a:r>
             <a:endParaRPr lang="en-US" sz="1300" dirty="0"/>
           </a:p>
@@ -23332,7 +23506,7 @@
       </p:sp>
       <p:sp>
         <p:nvSpPr>
-          <p:cNvPr id="29" name="Text 27"/>
+          <p:cNvPr id="28" name="Text 26"/>
           <p:cNvSpPr/>
           <p:nvPr/>
         </p:nvSpPr>
@@ -23363,7 +23537,7 @@
                 <a:ea typeface="Calibri" pitchFamily="34" charset="-122"/>
                 <a:cs typeface="Calibri" pitchFamily="34" charset="-120"/>
               </a:rPr>
-              <a:t>act or process</a:t>
+              <a:t>past tense / state of being</a:t>
             </a:r>
             <a:endParaRPr lang="en-US" sz="850" dirty="0"/>
           </a:p>
@@ -23371,46 +23545,7 @@
       </p:sp>
       <p:sp>
         <p:nvSpPr>
-          <p:cNvPr id="30" name="Text 28"/>
-          <p:cNvSpPr/>
-          <p:nvPr/>
-        </p:nvSpPr>
-        <p:spPr>
-          <a:xfrm>
-            <a:off x="6998818" y="2752344"/>
-            <a:ext cx="1581912" cy="182880"/>
-          </a:xfrm>
-          <a:prstGeom prst="rect">
-            <a:avLst/>
-          </a:prstGeom>
-          <a:noFill/>
-          <a:ln/>
-        </p:spPr>
-        <p:txBody>
-          <a:bodyPr wrap="square" lIns="0" tIns="0" rIns="0" bIns="0" rtlCol="0" anchor="t"/>
-          <a:lstStyle/>
-          <a:p>
-            <a:pPr algn="ctr" indent="0" marL="0">
-              <a:buNone/>
-            </a:pPr>
-            <a:r>
-              <a:rPr lang="en-US" sz="700" i="1" dirty="0">
-                <a:solidFill>
-                  <a:srgbClr val="94A3B8"/>
-                </a:solidFill>
-                <a:latin typeface="Calibri" pitchFamily="34" charset="0"/>
-                <a:ea typeface="Calibri" pitchFamily="34" charset="-122"/>
-                <a:cs typeface="Calibri" pitchFamily="34" charset="-120"/>
-              </a:rPr>
-              <a:t>ti makes /sh/ sound</a:t>
-            </a:r>
-            <a:endParaRPr lang="en-US" sz="700" dirty="0"/>
-          </a:p>
-        </p:txBody>
-      </p:sp>
-      <p:sp>
-        <p:nvSpPr>
-          <p:cNvPr id="31" name="Shape 29"/>
+          <p:cNvPr id="29" name="Shape 27"/>
           <p:cNvSpPr/>
           <p:nvPr/>
         </p:nvSpPr>
@@ -23437,7 +23572,7 @@
       </p:sp>
       <p:sp>
         <p:nvSpPr>
-          <p:cNvPr id="32" name="Text 30"/>
+          <p:cNvPr id="30" name="Text 28"/>
           <p:cNvSpPr/>
           <p:nvPr/>
         </p:nvSpPr>
@@ -23476,7 +23611,7 @@
       </p:sp>
       <p:sp>
         <p:nvSpPr>
-          <p:cNvPr id="33" name="Shape 31"/>
+          <p:cNvPr id="31" name="Shape 29"/>
           <p:cNvSpPr/>
           <p:nvPr/>
         </p:nvSpPr>
@@ -23503,14 +23638,14 @@
       </p:sp>
       <p:sp>
         <p:nvSpPr>
-          <p:cNvPr id="34" name="Shape 32"/>
-          <p:cNvSpPr/>
-          <p:nvPr/>
-        </p:nvSpPr>
-        <p:spPr>
-          <a:xfrm>
-            <a:off x="1975104" y="3364992"/>
-            <a:ext cx="1554480" cy="475488"/>
+          <p:cNvPr id="32" name="Shape 30"/>
+          <p:cNvSpPr/>
+          <p:nvPr/>
+        </p:nvSpPr>
+        <p:spPr>
+          <a:xfrm>
+            <a:off x="2313432" y="3364992"/>
+            <a:ext cx="1645920" cy="475488"/>
           </a:xfrm>
           <a:prstGeom prst="rect">
             <a:avLst>
@@ -23530,14 +23665,14 @@
       </p:sp>
       <p:sp>
         <p:nvSpPr>
-          <p:cNvPr id="35" name="Text 33"/>
-          <p:cNvSpPr/>
-          <p:nvPr/>
-        </p:nvSpPr>
-        <p:spPr>
-          <a:xfrm>
-            <a:off x="1975104" y="3364992"/>
-            <a:ext cx="1554480" cy="475488"/>
+          <p:cNvPr id="33" name="Text 31"/>
+          <p:cNvSpPr/>
+          <p:nvPr/>
+        </p:nvSpPr>
+        <p:spPr>
+          <a:xfrm>
+            <a:off x="2313432" y="3364992"/>
+            <a:ext cx="1645920" cy="475488"/>
           </a:xfrm>
           <a:prstGeom prst="rect">
             <a:avLst/>
@@ -23561,7 +23696,7 @@
                 <a:ea typeface="Trebuchet MS" pitchFamily="34" charset="-122"/>
                 <a:cs typeface="Trebuchet MS" pitchFamily="34" charset="-120"/>
               </a:rPr>
-              <a:t>prep</a:t>
+              <a:t>un</a:t>
             </a:r>
             <a:endParaRPr lang="en-US" sz="1400" dirty="0"/>
           </a:p>
@@ -23569,14 +23704,14 @@
       </p:sp>
       <p:sp>
         <p:nvSpPr>
-          <p:cNvPr id="36" name="Text 34"/>
-          <p:cNvSpPr/>
-          <p:nvPr/>
-        </p:nvSpPr>
-        <p:spPr>
-          <a:xfrm>
-            <a:off x="3529584" y="3364992"/>
-            <a:ext cx="73152" cy="475488"/>
+          <p:cNvPr id="34" name="Text 32"/>
+          <p:cNvSpPr/>
+          <p:nvPr/>
+        </p:nvSpPr>
+        <p:spPr>
+          <a:xfrm>
+            <a:off x="3959352" y="3364992"/>
+            <a:ext cx="411480" cy="475488"/>
           </a:xfrm>
           <a:prstGeom prst="rect">
             <a:avLst/>
@@ -23608,14 +23743,14 @@
       </p:sp>
       <p:sp>
         <p:nvSpPr>
-          <p:cNvPr id="37" name="Shape 35"/>
-          <p:cNvSpPr/>
-          <p:nvPr/>
-        </p:nvSpPr>
-        <p:spPr>
-          <a:xfrm>
-            <a:off x="3602736" y="3364992"/>
-            <a:ext cx="1554480" cy="475488"/>
+          <p:cNvPr id="35" name="Shape 33"/>
+          <p:cNvSpPr/>
+          <p:nvPr/>
+        </p:nvSpPr>
+        <p:spPr>
+          <a:xfrm>
+            <a:off x="4370832" y="3364992"/>
+            <a:ext cx="1645920" cy="475488"/>
           </a:xfrm>
           <a:prstGeom prst="rect">
             <a:avLst>
@@ -23635,14 +23770,14 @@
       </p:sp>
       <p:sp>
         <p:nvSpPr>
-          <p:cNvPr id="38" name="Text 36"/>
-          <p:cNvSpPr/>
-          <p:nvPr/>
-        </p:nvSpPr>
-        <p:spPr>
-          <a:xfrm>
-            <a:off x="3602736" y="3364992"/>
-            <a:ext cx="1554480" cy="475488"/>
+          <p:cNvPr id="36" name="Text 34"/>
+          <p:cNvSpPr/>
+          <p:nvPr/>
+        </p:nvSpPr>
+        <p:spPr>
+          <a:xfrm>
+            <a:off x="4370832" y="3364992"/>
+            <a:ext cx="1645920" cy="475488"/>
           </a:xfrm>
           <a:prstGeom prst="rect">
             <a:avLst/>
@@ -23666,7 +23801,7 @@
                 <a:ea typeface="Trebuchet MS" pitchFamily="34" charset="-122"/>
                 <a:cs typeface="Trebuchet MS" pitchFamily="34" charset="-120"/>
               </a:rPr>
-              <a:t>a</a:t>
+              <a:t>pre</a:t>
             </a:r>
             <a:endParaRPr lang="en-US" sz="1400" dirty="0"/>
           </a:p>
@@ -23674,14 +23809,14 @@
       </p:sp>
       <p:sp>
         <p:nvSpPr>
-          <p:cNvPr id="39" name="Text 37"/>
-          <p:cNvSpPr/>
-          <p:nvPr/>
-        </p:nvSpPr>
-        <p:spPr>
-          <a:xfrm>
-            <a:off x="5157216" y="3364992"/>
-            <a:ext cx="73152" cy="475488"/>
+          <p:cNvPr id="37" name="Text 35"/>
+          <p:cNvSpPr/>
+          <p:nvPr/>
+        </p:nvSpPr>
+        <p:spPr>
+          <a:xfrm>
+            <a:off x="6016752" y="3364992"/>
+            <a:ext cx="411480" cy="475488"/>
           </a:xfrm>
           <a:prstGeom prst="rect">
             <a:avLst/>
@@ -23713,14 +23848,14 @@
       </p:sp>
       <p:sp>
         <p:nvSpPr>
-          <p:cNvPr id="40" name="Shape 38"/>
-          <p:cNvSpPr/>
-          <p:nvPr/>
-        </p:nvSpPr>
-        <p:spPr>
-          <a:xfrm>
-            <a:off x="5230368" y="3364992"/>
-            <a:ext cx="1554480" cy="475488"/>
+          <p:cNvPr id="38" name="Shape 36"/>
+          <p:cNvSpPr/>
+          <p:nvPr/>
+        </p:nvSpPr>
+        <p:spPr>
+          <a:xfrm>
+            <a:off x="6428232" y="3364992"/>
+            <a:ext cx="1645920" cy="475488"/>
           </a:xfrm>
           <a:prstGeom prst="rect">
             <a:avLst>
@@ -23740,14 +23875,14 @@
       </p:sp>
       <p:sp>
         <p:nvSpPr>
-          <p:cNvPr id="41" name="Text 39"/>
-          <p:cNvSpPr/>
-          <p:nvPr/>
-        </p:nvSpPr>
-        <p:spPr>
-          <a:xfrm>
-            <a:off x="5230368" y="3364992"/>
-            <a:ext cx="1554480" cy="475488"/>
+          <p:cNvPr id="39" name="Text 37"/>
+          <p:cNvSpPr/>
+          <p:nvPr/>
+        </p:nvSpPr>
+        <p:spPr>
+          <a:xfrm>
+            <a:off x="6428232" y="3364992"/>
+            <a:ext cx="1645920" cy="475488"/>
           </a:xfrm>
           <a:prstGeom prst="rect">
             <a:avLst/>
@@ -23771,7 +23906,7 @@
                 <a:ea typeface="Trebuchet MS" pitchFamily="34" charset="-122"/>
                 <a:cs typeface="Trebuchet MS" pitchFamily="34" charset="-120"/>
               </a:rPr>
-              <a:t>ra</a:t>
+              <a:t>pared</a:t>
             </a:r>
             <a:endParaRPr lang="en-US" sz="1400" dirty="0"/>
           </a:p>
@@ -23779,42 +23914,96 @@
       </p:sp>
       <p:sp>
         <p:nvSpPr>
-          <p:cNvPr id="42" name="Text 40"/>
-          <p:cNvSpPr/>
-          <p:nvPr/>
-        </p:nvSpPr>
-        <p:spPr>
-          <a:xfrm>
-            <a:off x="6784848" y="3364992"/>
-            <a:ext cx="73152" cy="475488"/>
-          </a:xfrm>
-          <a:prstGeom prst="rect">
-            <a:avLst/>
-          </a:prstGeom>
-          <a:noFill/>
-          <a:ln/>
-        </p:spPr>
-        <p:txBody>
-          <a:bodyPr wrap="square" lIns="0" tIns="0" rIns="0" bIns="0" rtlCol="0" anchor="ctr"/>
-          <a:lstStyle/>
-          <a:p>
-            <a:pPr algn="ctr" indent="0" marL="0">
-              <a:buNone/>
-            </a:pPr>
-            <a:r>
-              <a:rPr lang="en-US" sz="1600" b="1" dirty="0">
-                <a:solidFill>
-                  <a:srgbClr val="0D9488"/>
+          <p:cNvPr id="40" name="Shape 38"/>
+          <p:cNvSpPr/>
+          <p:nvPr/>
+        </p:nvSpPr>
+        <p:spPr>
+          <a:xfrm>
+            <a:off x="365760" y="4096512"/>
+            <a:ext cx="1371600" cy="804672"/>
+          </a:xfrm>
+          <a:prstGeom prst="rect">
+            <a:avLst>
+              <a:gd name="adj" fmla="val 6818"/>
+            </a:avLst>
+          </a:prstGeom>
+          <a:solidFill>
+            <a:srgbClr val="E2E8F0"/>
+          </a:solidFill>
+          <a:ln w="12700">
+            <a:solidFill>
+              <a:srgbClr val="E2E8F0"/>
+            </a:solidFill>
+            <a:prstDash val="solid"/>
+          </a:ln>
+        </p:spPr>
+      </p:sp>
+      <p:sp>
+        <p:nvSpPr>
+          <p:cNvPr id="41" name="Text 39"/>
+          <p:cNvSpPr/>
+          <p:nvPr/>
+        </p:nvSpPr>
+        <p:spPr>
+          <a:xfrm>
+            <a:off x="365760" y="4096512"/>
+            <a:ext cx="1371600" cy="804672"/>
+          </a:xfrm>
+          <a:prstGeom prst="rect">
+            <a:avLst/>
+          </a:prstGeom>
+          <a:noFill/>
+          <a:ln/>
+        </p:spPr>
+        <p:txBody>
+          <a:bodyPr wrap="square" lIns="0" tIns="0" rIns="0" bIns="0" rtlCol="0" anchor="ctr"/>
+          <a:lstStyle/>
+          <a:p>
+            <a:pPr algn="ctr" indent="0" marL="0">
+              <a:buNone/>
+            </a:pPr>
+            <a:r>
+              <a:rPr lang="en-US" sz="1100" b="1" dirty="0">
+                <a:solidFill>
+                  <a:srgbClr val="475569"/>
                 </a:solidFill>
                 <a:latin typeface="Trebuchet MS" pitchFamily="34" charset="0"/>
                 <a:ea typeface="Trebuchet MS" pitchFamily="34" charset="-122"/>
                 <a:cs typeface="Trebuchet MS" pitchFamily="34" charset="-120"/>
               </a:rPr>
-              <a:t>·</a:t>
-            </a:r>
-            <a:endParaRPr lang="en-US" sz="1600" dirty="0"/>
-          </a:p>
-        </p:txBody>
+              <a:t>Phonemes</a:t>
+            </a:r>
+            <a:endParaRPr lang="en-US" sz="1100" dirty="0"/>
+          </a:p>
+        </p:txBody>
+      </p:sp>
+      <p:sp>
+        <p:nvSpPr>
+          <p:cNvPr id="42" name="Shape 40"/>
+          <p:cNvSpPr/>
+          <p:nvPr/>
+        </p:nvSpPr>
+        <p:spPr>
+          <a:xfrm>
+            <a:off x="1874520" y="4096512"/>
+            <a:ext cx="6903720" cy="658368"/>
+          </a:xfrm>
+          <a:prstGeom prst="rect">
+            <a:avLst>
+              <a:gd name="adj" fmla="val 8333"/>
+            </a:avLst>
+          </a:prstGeom>
+          <a:solidFill>
+            <a:srgbClr val="FCE7F3"/>
+          </a:solidFill>
+          <a:ln w="12700">
+            <a:solidFill>
+              <a:srgbClr val="DB2777"/>
+            </a:solidFill>
+            <a:prstDash val="solid"/>
+          </a:ln>
+        </p:spPr>
       </p:sp>
       <p:sp>
         <p:nvSpPr>
@@ -23824,12 +24013,12 @@
         </p:nvSpPr>
         <p:spPr>
           <a:xfrm>
-            <a:off x="6858000" y="3364992"/>
-            <a:ext cx="1554480" cy="475488"/>
+            <a:off x="2023872" y="4169664"/>
+            <a:ext cx="685800" cy="475488"/>
           </a:xfrm>
           <a:prstGeom prst="rect">
             <a:avLst>
-              <a:gd name="adj" fmla="val 9615"/>
+              <a:gd name="adj" fmla="val 7692"/>
             </a:avLst>
           </a:prstGeom>
           <a:solidFill>
@@ -23837,7 +24026,7 @@
           </a:solidFill>
           <a:ln w="12700">
             <a:solidFill>
-              <a:srgbClr val="0D9488"/>
+              <a:srgbClr val="DB2777"/>
             </a:solidFill>
             <a:prstDash val="solid"/>
           </a:ln>
@@ -23851,34 +24040,34 @@
         </p:nvSpPr>
         <p:spPr>
           <a:xfrm>
-            <a:off x="6858000" y="3364992"/>
-            <a:ext cx="1554480" cy="475488"/>
-          </a:xfrm>
-          <a:prstGeom prst="rect">
-            <a:avLst/>
-          </a:prstGeom>
-          <a:noFill/>
-          <a:ln/>
-        </p:spPr>
-        <p:txBody>
-          <a:bodyPr wrap="square" lIns="0" tIns="0" rIns="0" bIns="0" rtlCol="0" anchor="ctr"/>
-          <a:lstStyle/>
-          <a:p>
-            <a:pPr algn="ctr" indent="0" marL="0">
-              <a:buNone/>
-            </a:pPr>
-            <a:r>
-              <a:rPr lang="en-US" sz="1400" b="1" dirty="0">
-                <a:solidFill>
-                  <a:srgbClr val="0D9488"/>
+            <a:off x="2023872" y="4169664"/>
+            <a:ext cx="685800" cy="475488"/>
+          </a:xfrm>
+          <a:prstGeom prst="rect">
+            <a:avLst/>
+          </a:prstGeom>
+          <a:noFill/>
+          <a:ln/>
+        </p:spPr>
+        <p:txBody>
+          <a:bodyPr wrap="square" lIns="0" tIns="0" rIns="0" bIns="0" rtlCol="0" anchor="ctr"/>
+          <a:lstStyle/>
+          <a:p>
+            <a:pPr algn="ctr" indent="0" marL="0">
+              <a:buNone/>
+            </a:pPr>
+            <a:r>
+              <a:rPr lang="en-US" sz="900" b="1" dirty="0">
+                <a:solidFill>
+                  <a:srgbClr val="9D174D"/>
                 </a:solidFill>
                 <a:latin typeface="Trebuchet MS" pitchFamily="34" charset="0"/>
                 <a:ea typeface="Trebuchet MS" pitchFamily="34" charset="-122"/>
                 <a:cs typeface="Trebuchet MS" pitchFamily="34" charset="-120"/>
               </a:rPr>
-              <a:t>tion</a:t>
-            </a:r>
-            <a:endParaRPr lang="en-US" sz="1400" dirty="0"/>
+              <a:t>u</a:t>
+            </a:r>
+            <a:endParaRPr lang="en-US" sz="900" dirty="0"/>
           </a:p>
         </p:txBody>
       </p:sp>
@@ -23890,20 +24079,20 @@
         </p:nvSpPr>
         <p:spPr>
           <a:xfrm>
-            <a:off x="365760" y="4096512"/>
-            <a:ext cx="1371600" cy="804672"/>
+            <a:off x="2831592" y="4169664"/>
+            <a:ext cx="685800" cy="475488"/>
           </a:xfrm>
           <a:prstGeom prst="rect">
             <a:avLst>
-              <a:gd name="adj" fmla="val 6818"/>
+              <a:gd name="adj" fmla="val 7692"/>
             </a:avLst>
           </a:prstGeom>
           <a:solidFill>
-            <a:srgbClr val="E2E8F0"/>
-          </a:solidFill>
-          <a:ln w="12700">
-            <a:solidFill>
-              <a:srgbClr val="E2E8F0"/>
+            <a:srgbClr val="FFFFFF"/>
+          </a:solidFill>
+          <a:ln w="12700">
+            <a:solidFill>
+              <a:srgbClr val="DB2777"/>
             </a:solidFill>
             <a:prstDash val="solid"/>
           </a:ln>
@@ -23917,34 +24106,34 @@
         </p:nvSpPr>
         <p:spPr>
           <a:xfrm>
-            <a:off x="365760" y="4096512"/>
-            <a:ext cx="1371600" cy="804672"/>
-          </a:xfrm>
-          <a:prstGeom prst="rect">
-            <a:avLst/>
-          </a:prstGeom>
-          <a:noFill/>
-          <a:ln/>
-        </p:spPr>
-        <p:txBody>
-          <a:bodyPr wrap="square" lIns="0" tIns="0" rIns="0" bIns="0" rtlCol="0" anchor="ctr"/>
-          <a:lstStyle/>
-          <a:p>
-            <a:pPr algn="ctr" indent="0" marL="0">
-              <a:buNone/>
-            </a:pPr>
-            <a:r>
-              <a:rPr lang="en-US" sz="1100" b="1" dirty="0">
-                <a:solidFill>
-                  <a:srgbClr val="475569"/>
+            <a:off x="2831592" y="4169664"/>
+            <a:ext cx="685800" cy="475488"/>
+          </a:xfrm>
+          <a:prstGeom prst="rect">
+            <a:avLst/>
+          </a:prstGeom>
+          <a:noFill/>
+          <a:ln/>
+        </p:spPr>
+        <p:txBody>
+          <a:bodyPr wrap="square" lIns="0" tIns="0" rIns="0" bIns="0" rtlCol="0" anchor="ctr"/>
+          <a:lstStyle/>
+          <a:p>
+            <a:pPr algn="ctr" indent="0" marL="0">
+              <a:buNone/>
+            </a:pPr>
+            <a:r>
+              <a:rPr lang="en-US" sz="900" b="1" dirty="0">
+                <a:solidFill>
+                  <a:srgbClr val="9D174D"/>
                 </a:solidFill>
                 <a:latin typeface="Trebuchet MS" pitchFamily="34" charset="0"/>
                 <a:ea typeface="Trebuchet MS" pitchFamily="34" charset="-122"/>
                 <a:cs typeface="Trebuchet MS" pitchFamily="34" charset="-120"/>
               </a:rPr>
-              <a:t>Phonemes</a:t>
-            </a:r>
-            <a:endParaRPr lang="en-US" sz="1100" dirty="0"/>
+              <a:t>n</a:t>
+            </a:r>
+            <a:endParaRPr lang="en-US" sz="900" dirty="0"/>
           </a:p>
         </p:txBody>
       </p:sp>
@@ -23956,16 +24145,16 @@
         </p:nvSpPr>
         <p:spPr>
           <a:xfrm>
-            <a:off x="1874520" y="4096512"/>
-            <a:ext cx="6903720" cy="804672"/>
+            <a:off x="3639312" y="4169664"/>
+            <a:ext cx="685800" cy="475488"/>
           </a:xfrm>
           <a:prstGeom prst="rect">
             <a:avLst>
-              <a:gd name="adj" fmla="val 6818"/>
+              <a:gd name="adj" fmla="val 7692"/>
             </a:avLst>
           </a:prstGeom>
           <a:solidFill>
-            <a:srgbClr val="FCE7F3"/>
+            <a:srgbClr val="FFFFFF"/>
           </a:solidFill>
           <a:ln w="12700">
             <a:solidFill>
@@ -23977,41 +24166,14 @@
       </p:sp>
       <p:sp>
         <p:nvSpPr>
-          <p:cNvPr id="48" name="Shape 46"/>
-          <p:cNvSpPr/>
-          <p:nvPr/>
-        </p:nvSpPr>
-        <p:spPr>
-          <a:xfrm>
-            <a:off x="1951828" y="4169664"/>
-            <a:ext cx="603504" cy="384048"/>
-          </a:xfrm>
-          <a:prstGeom prst="rect">
-            <a:avLst>
-              <a:gd name="adj" fmla="val 9524"/>
-            </a:avLst>
-          </a:prstGeom>
-          <a:solidFill>
-            <a:srgbClr val="FFFFFF"/>
-          </a:solidFill>
-          <a:ln w="12700">
-            <a:solidFill>
-              <a:srgbClr val="DB2777"/>
-            </a:solidFill>
-            <a:prstDash val="solid"/>
-          </a:ln>
-        </p:spPr>
-      </p:sp>
-      <p:sp>
-        <p:nvSpPr>
-          <p:cNvPr id="49" name="Text 47"/>
-          <p:cNvSpPr/>
-          <p:nvPr/>
-        </p:nvSpPr>
-        <p:spPr>
-          <a:xfrm>
-            <a:off x="1951828" y="4169664"/>
-            <a:ext cx="603504" cy="384048"/>
+          <p:cNvPr id="48" name="Text 46"/>
+          <p:cNvSpPr/>
+          <p:nvPr/>
+        </p:nvSpPr>
+        <p:spPr>
+          <a:xfrm>
+            <a:off x="3639312" y="4169664"/>
+            <a:ext cx="685800" cy="475488"/>
           </a:xfrm>
           <a:prstGeom prst="rect">
             <a:avLst/>
@@ -24043,18 +24205,18 @@
       </p:sp>
       <p:sp>
         <p:nvSpPr>
-          <p:cNvPr id="50" name="Shape 48"/>
-          <p:cNvSpPr/>
-          <p:nvPr/>
-        </p:nvSpPr>
-        <p:spPr>
-          <a:xfrm>
-            <a:off x="2605209" y="4169664"/>
-            <a:ext cx="603504" cy="384048"/>
+          <p:cNvPr id="49" name="Shape 47"/>
+          <p:cNvSpPr/>
+          <p:nvPr/>
+        </p:nvSpPr>
+        <p:spPr>
+          <a:xfrm>
+            <a:off x="4447032" y="4169664"/>
+            <a:ext cx="685800" cy="475488"/>
           </a:xfrm>
           <a:prstGeom prst="rect">
             <a:avLst>
-              <a:gd name="adj" fmla="val 9524"/>
+              <a:gd name="adj" fmla="val 7692"/>
             </a:avLst>
           </a:prstGeom>
           <a:solidFill>
@@ -24070,14 +24232,14 @@
       </p:sp>
       <p:sp>
         <p:nvSpPr>
-          <p:cNvPr id="51" name="Text 49"/>
-          <p:cNvSpPr/>
-          <p:nvPr/>
-        </p:nvSpPr>
-        <p:spPr>
-          <a:xfrm>
-            <a:off x="2605209" y="4169664"/>
-            <a:ext cx="603504" cy="384048"/>
+          <p:cNvPr id="50" name="Text 48"/>
+          <p:cNvSpPr/>
+          <p:nvPr/>
+        </p:nvSpPr>
+        <p:spPr>
+          <a:xfrm>
+            <a:off x="4447032" y="4169664"/>
+            <a:ext cx="685800" cy="475488"/>
           </a:xfrm>
           <a:prstGeom prst="rect">
             <a:avLst/>
@@ -24109,18 +24271,18 @@
       </p:sp>
       <p:sp>
         <p:nvSpPr>
-          <p:cNvPr id="52" name="Shape 50"/>
-          <p:cNvSpPr/>
-          <p:nvPr/>
-        </p:nvSpPr>
-        <p:spPr>
-          <a:xfrm>
-            <a:off x="3258589" y="4169664"/>
-            <a:ext cx="603504" cy="384048"/>
+          <p:cNvPr id="51" name="Shape 49"/>
+          <p:cNvSpPr/>
+          <p:nvPr/>
+        </p:nvSpPr>
+        <p:spPr>
+          <a:xfrm>
+            <a:off x="5254752" y="4169664"/>
+            <a:ext cx="685800" cy="475488"/>
           </a:xfrm>
           <a:prstGeom prst="rect">
             <a:avLst>
-              <a:gd name="adj" fmla="val 9524"/>
+              <a:gd name="adj" fmla="val 7692"/>
             </a:avLst>
           </a:prstGeom>
           <a:solidFill>
@@ -24136,14 +24298,14 @@
       </p:sp>
       <p:sp>
         <p:nvSpPr>
-          <p:cNvPr id="53" name="Text 51"/>
-          <p:cNvSpPr/>
-          <p:nvPr/>
-        </p:nvSpPr>
-        <p:spPr>
-          <a:xfrm>
-            <a:off x="3258589" y="4169664"/>
-            <a:ext cx="603504" cy="384048"/>
+          <p:cNvPr id="52" name="Text 50"/>
+          <p:cNvSpPr/>
+          <p:nvPr/>
+        </p:nvSpPr>
+        <p:spPr>
+          <a:xfrm>
+            <a:off x="5254752" y="4169664"/>
+            <a:ext cx="685800" cy="475488"/>
           </a:xfrm>
           <a:prstGeom prst="rect">
             <a:avLst/>
@@ -24175,18 +24337,18 @@
       </p:sp>
       <p:sp>
         <p:nvSpPr>
-          <p:cNvPr id="54" name="Shape 52"/>
-          <p:cNvSpPr/>
-          <p:nvPr/>
-        </p:nvSpPr>
-        <p:spPr>
-          <a:xfrm>
-            <a:off x="3911969" y="4169664"/>
-            <a:ext cx="603504" cy="384048"/>
+          <p:cNvPr id="53" name="Shape 51"/>
+          <p:cNvSpPr/>
+          <p:nvPr/>
+        </p:nvSpPr>
+        <p:spPr>
+          <a:xfrm>
+            <a:off x="6062472" y="4169664"/>
+            <a:ext cx="685800" cy="475488"/>
           </a:xfrm>
           <a:prstGeom prst="rect">
             <a:avLst>
-              <a:gd name="adj" fmla="val 9524"/>
+              <a:gd name="adj" fmla="val 7692"/>
             </a:avLst>
           </a:prstGeom>
           <a:solidFill>
@@ -24202,14 +24364,14 @@
       </p:sp>
       <p:sp>
         <p:nvSpPr>
-          <p:cNvPr id="55" name="Text 53"/>
-          <p:cNvSpPr/>
-          <p:nvPr/>
-        </p:nvSpPr>
-        <p:spPr>
-          <a:xfrm>
-            <a:off x="3911969" y="4169664"/>
-            <a:ext cx="603504" cy="384048"/>
+          <p:cNvPr id="54" name="Text 52"/>
+          <p:cNvSpPr/>
+          <p:nvPr/>
+        </p:nvSpPr>
+        <p:spPr>
+          <a:xfrm>
+            <a:off x="6062472" y="4169664"/>
+            <a:ext cx="685800" cy="475488"/>
           </a:xfrm>
           <a:prstGeom prst="rect">
             <a:avLst/>
@@ -24241,18 +24403,18 @@
       </p:sp>
       <p:sp>
         <p:nvSpPr>
-          <p:cNvPr id="56" name="Shape 54"/>
-          <p:cNvSpPr/>
-          <p:nvPr/>
-        </p:nvSpPr>
-        <p:spPr>
-          <a:xfrm>
-            <a:off x="4565350" y="4169664"/>
-            <a:ext cx="603504" cy="384048"/>
+          <p:cNvPr id="55" name="Shape 53"/>
+          <p:cNvSpPr/>
+          <p:nvPr/>
+        </p:nvSpPr>
+        <p:spPr>
+          <a:xfrm>
+            <a:off x="6870192" y="4169664"/>
+            <a:ext cx="685800" cy="475488"/>
           </a:xfrm>
           <a:prstGeom prst="rect">
             <a:avLst>
-              <a:gd name="adj" fmla="val 9524"/>
+              <a:gd name="adj" fmla="val 7692"/>
             </a:avLst>
           </a:prstGeom>
           <a:solidFill>
@@ -24268,14 +24430,14 @@
       </p:sp>
       <p:sp>
         <p:nvSpPr>
-          <p:cNvPr id="57" name="Text 55"/>
-          <p:cNvSpPr/>
-          <p:nvPr/>
-        </p:nvSpPr>
-        <p:spPr>
-          <a:xfrm>
-            <a:off x="4565350" y="4169664"/>
-            <a:ext cx="603504" cy="384048"/>
+          <p:cNvPr id="56" name="Text 54"/>
+          <p:cNvSpPr/>
+          <p:nvPr/>
+        </p:nvSpPr>
+        <p:spPr>
+          <a:xfrm>
+            <a:off x="6870192" y="4169664"/>
+            <a:ext cx="685800" cy="475488"/>
           </a:xfrm>
           <a:prstGeom prst="rect">
             <a:avLst/>
@@ -24299,7 +24461,7 @@
                 <a:ea typeface="Trebuchet MS" pitchFamily="34" charset="-122"/>
                 <a:cs typeface="Trebuchet MS" pitchFamily="34" charset="-120"/>
               </a:rPr>
-              <a:t>a</a:t>
+              <a:t>ar</a:t>
             </a:r>
             <a:endParaRPr lang="en-US" sz="900" dirty="0"/>
           </a:p>
@@ -24307,18 +24469,18 @@
       </p:sp>
       <p:sp>
         <p:nvSpPr>
-          <p:cNvPr id="58" name="Shape 56"/>
-          <p:cNvSpPr/>
-          <p:nvPr/>
-        </p:nvSpPr>
-        <p:spPr>
-          <a:xfrm>
-            <a:off x="5218730" y="4169664"/>
-            <a:ext cx="603504" cy="384048"/>
+          <p:cNvPr id="57" name="Shape 55"/>
+          <p:cNvSpPr/>
+          <p:nvPr/>
+        </p:nvSpPr>
+        <p:spPr>
+          <a:xfrm>
+            <a:off x="7677912" y="4169664"/>
+            <a:ext cx="685800" cy="475488"/>
           </a:xfrm>
           <a:prstGeom prst="rect">
             <a:avLst>
-              <a:gd name="adj" fmla="val 9524"/>
+              <a:gd name="adj" fmla="val 7692"/>
             </a:avLst>
           </a:prstGeom>
           <a:solidFill>
@@ -24334,14 +24496,14 @@
       </p:sp>
       <p:sp>
         <p:nvSpPr>
-          <p:cNvPr id="59" name="Text 57"/>
-          <p:cNvSpPr/>
-          <p:nvPr/>
-        </p:nvSpPr>
-        <p:spPr>
-          <a:xfrm>
-            <a:off x="5218730" y="4169664"/>
-            <a:ext cx="603504" cy="384048"/>
+          <p:cNvPr id="58" name="Text 56"/>
+          <p:cNvSpPr/>
+          <p:nvPr/>
+        </p:nvSpPr>
+        <p:spPr>
+          <a:xfrm>
+            <a:off x="7677912" y="4169664"/>
+            <a:ext cx="685800" cy="475488"/>
           </a:xfrm>
           <a:prstGeom prst="rect">
             <a:avLst/>
@@ -24365,310 +24527,7 @@
                 <a:ea typeface="Trebuchet MS" pitchFamily="34" charset="-122"/>
                 <a:cs typeface="Trebuchet MS" pitchFamily="34" charset="-120"/>
               </a:rPr>
-              <a:t>r</a:t>
-            </a:r>
-            <a:endParaRPr lang="en-US" sz="900" dirty="0"/>
-          </a:p>
-        </p:txBody>
-      </p:sp>
-      <p:sp>
-        <p:nvSpPr>
-          <p:cNvPr id="60" name="Shape 58"/>
-          <p:cNvSpPr/>
-          <p:nvPr/>
-        </p:nvSpPr>
-        <p:spPr>
-          <a:xfrm>
-            <a:off x="5872111" y="4169664"/>
-            <a:ext cx="603504" cy="384048"/>
-          </a:xfrm>
-          <a:prstGeom prst="rect">
-            <a:avLst>
-              <a:gd name="adj" fmla="val 9524"/>
-            </a:avLst>
-          </a:prstGeom>
-          <a:solidFill>
-            <a:srgbClr val="FFFFFF"/>
-          </a:solidFill>
-          <a:ln w="12700">
-            <a:solidFill>
-              <a:srgbClr val="DB2777"/>
-            </a:solidFill>
-            <a:prstDash val="solid"/>
-          </a:ln>
-        </p:spPr>
-      </p:sp>
-      <p:sp>
-        <p:nvSpPr>
-          <p:cNvPr id="61" name="Text 59"/>
-          <p:cNvSpPr/>
-          <p:nvPr/>
-        </p:nvSpPr>
-        <p:spPr>
-          <a:xfrm>
-            <a:off x="5872111" y="4169664"/>
-            <a:ext cx="603504" cy="384048"/>
-          </a:xfrm>
-          <a:prstGeom prst="rect">
-            <a:avLst/>
-          </a:prstGeom>
-          <a:noFill/>
-          <a:ln/>
-        </p:spPr>
-        <p:txBody>
-          <a:bodyPr wrap="square" lIns="0" tIns="0" rIns="0" bIns="0" rtlCol="0" anchor="ctr"/>
-          <a:lstStyle/>
-          <a:p>
-            <a:pPr algn="ctr" indent="0" marL="0">
-              <a:buNone/>
-            </a:pPr>
-            <a:r>
-              <a:rPr lang="en-US" sz="900" b="1" dirty="0">
-                <a:solidFill>
-                  <a:srgbClr val="9D174D"/>
-                </a:solidFill>
-                <a:latin typeface="Trebuchet MS" pitchFamily="34" charset="0"/>
-                <a:ea typeface="Trebuchet MS" pitchFamily="34" charset="-122"/>
-                <a:cs typeface="Trebuchet MS" pitchFamily="34" charset="-120"/>
-              </a:rPr>
-              <a:t>a</a:t>
-            </a:r>
-            <a:endParaRPr lang="en-US" sz="900" dirty="0"/>
-          </a:p>
-        </p:txBody>
-      </p:sp>
-      <p:sp>
-        <p:nvSpPr>
-          <p:cNvPr id="62" name="Shape 60"/>
-          <p:cNvSpPr/>
-          <p:nvPr/>
-        </p:nvSpPr>
-        <p:spPr>
-          <a:xfrm>
-            <a:off x="6525491" y="4169664"/>
-            <a:ext cx="603504" cy="384048"/>
-          </a:xfrm>
-          <a:prstGeom prst="rect">
-            <a:avLst>
-              <a:gd name="adj" fmla="val 9524"/>
-            </a:avLst>
-          </a:prstGeom>
-          <a:solidFill>
-            <a:srgbClr val="FFFFFF"/>
-          </a:solidFill>
-          <a:ln w="12700">
-            <a:solidFill>
-              <a:srgbClr val="DB2777"/>
-            </a:solidFill>
-            <a:prstDash val="solid"/>
-          </a:ln>
-        </p:spPr>
-      </p:sp>
-      <p:sp>
-        <p:nvSpPr>
-          <p:cNvPr id="63" name="Text 61"/>
-          <p:cNvSpPr/>
-          <p:nvPr/>
-        </p:nvSpPr>
-        <p:spPr>
-          <a:xfrm>
-            <a:off x="6525491" y="4169664"/>
-            <a:ext cx="603504" cy="384048"/>
-          </a:xfrm>
-          <a:prstGeom prst="rect">
-            <a:avLst/>
-          </a:prstGeom>
-          <a:noFill/>
-          <a:ln/>
-        </p:spPr>
-        <p:txBody>
-          <a:bodyPr wrap="square" lIns="0" tIns="0" rIns="0" bIns="0" rtlCol="0" anchor="ctr"/>
-          <a:lstStyle/>
-          <a:p>
-            <a:pPr algn="ctr" indent="0" marL="0">
-              <a:buNone/>
-            </a:pPr>
-            <a:r>
-              <a:rPr lang="en-US" sz="900" b="1" dirty="0">
-                <a:solidFill>
-                  <a:srgbClr val="9D174D"/>
-                </a:solidFill>
-                <a:latin typeface="Trebuchet MS" pitchFamily="34" charset="0"/>
-                <a:ea typeface="Trebuchet MS" pitchFamily="34" charset="-122"/>
-                <a:cs typeface="Trebuchet MS" pitchFamily="34" charset="-120"/>
-              </a:rPr>
-              <a:t>ti</a:t>
-            </a:r>
-            <a:endParaRPr lang="en-US" sz="900" dirty="0"/>
-          </a:p>
-        </p:txBody>
-      </p:sp>
-      <p:sp>
-        <p:nvSpPr>
-          <p:cNvPr id="64" name="Text 62"/>
-          <p:cNvSpPr/>
-          <p:nvPr/>
-        </p:nvSpPr>
-        <p:spPr>
-          <a:xfrm>
-            <a:off x="6525491" y="4572000"/>
-            <a:ext cx="603504" cy="219456"/>
-          </a:xfrm>
-          <a:prstGeom prst="rect">
-            <a:avLst/>
-          </a:prstGeom>
-          <a:noFill/>
-          <a:ln/>
-        </p:spPr>
-        <p:txBody>
-          <a:bodyPr wrap="square" lIns="0" tIns="0" rIns="0" bIns="0" rtlCol="0" anchor="t"/>
-          <a:lstStyle/>
-          <a:p>
-            <a:pPr algn="ctr" indent="0" marL="0">
-              <a:buNone/>
-            </a:pPr>
-            <a:r>
-              <a:rPr lang="en-US" sz="750" i="1" dirty="0">
-                <a:solidFill>
-                  <a:srgbClr val="94A3B8"/>
-                </a:solidFill>
-                <a:latin typeface="Calibri" pitchFamily="34" charset="0"/>
-                <a:ea typeface="Calibri" pitchFamily="34" charset="-122"/>
-                <a:cs typeface="Calibri" pitchFamily="34" charset="-120"/>
-              </a:rPr>
-              <a:t>/sh/</a:t>
-            </a:r>
-            <a:endParaRPr lang="en-US" sz="750" dirty="0"/>
-          </a:p>
-        </p:txBody>
-      </p:sp>
-      <p:sp>
-        <p:nvSpPr>
-          <p:cNvPr id="65" name="Shape 63"/>
-          <p:cNvSpPr/>
-          <p:nvPr/>
-        </p:nvSpPr>
-        <p:spPr>
-          <a:xfrm>
-            <a:off x="7178871" y="4169664"/>
-            <a:ext cx="603504" cy="384048"/>
-          </a:xfrm>
-          <a:prstGeom prst="rect">
-            <a:avLst>
-              <a:gd name="adj" fmla="val 9524"/>
-            </a:avLst>
-          </a:prstGeom>
-          <a:solidFill>
-            <a:srgbClr val="FFFFFF"/>
-          </a:solidFill>
-          <a:ln w="12700">
-            <a:solidFill>
-              <a:srgbClr val="DB2777"/>
-            </a:solidFill>
-            <a:prstDash val="solid"/>
-          </a:ln>
-        </p:spPr>
-      </p:sp>
-      <p:sp>
-        <p:nvSpPr>
-          <p:cNvPr id="66" name="Text 64"/>
-          <p:cNvSpPr/>
-          <p:nvPr/>
-        </p:nvSpPr>
-        <p:spPr>
-          <a:xfrm>
-            <a:off x="7178871" y="4169664"/>
-            <a:ext cx="603504" cy="384048"/>
-          </a:xfrm>
-          <a:prstGeom prst="rect">
-            <a:avLst/>
-          </a:prstGeom>
-          <a:noFill/>
-          <a:ln/>
-        </p:spPr>
-        <p:txBody>
-          <a:bodyPr wrap="square" lIns="0" tIns="0" rIns="0" bIns="0" rtlCol="0" anchor="ctr"/>
-          <a:lstStyle/>
-          <a:p>
-            <a:pPr algn="ctr" indent="0" marL="0">
-              <a:buNone/>
-            </a:pPr>
-            <a:r>
-              <a:rPr lang="en-US" sz="900" b="1" dirty="0">
-                <a:solidFill>
-                  <a:srgbClr val="9D174D"/>
-                </a:solidFill>
-                <a:latin typeface="Trebuchet MS" pitchFamily="34" charset="0"/>
-                <a:ea typeface="Trebuchet MS" pitchFamily="34" charset="-122"/>
-                <a:cs typeface="Trebuchet MS" pitchFamily="34" charset="-120"/>
-              </a:rPr>
-              <a:t>o</a:t>
-            </a:r>
-            <a:endParaRPr lang="en-US" sz="900" dirty="0"/>
-          </a:p>
-        </p:txBody>
-      </p:sp>
-      <p:sp>
-        <p:nvSpPr>
-          <p:cNvPr id="67" name="Shape 65"/>
-          <p:cNvSpPr/>
-          <p:nvPr/>
-        </p:nvSpPr>
-        <p:spPr>
-          <a:xfrm>
-            <a:off x="7832252" y="4169664"/>
-            <a:ext cx="603504" cy="384048"/>
-          </a:xfrm>
-          <a:prstGeom prst="rect">
-            <a:avLst>
-              <a:gd name="adj" fmla="val 9524"/>
-            </a:avLst>
-          </a:prstGeom>
-          <a:solidFill>
-            <a:srgbClr val="FFFFFF"/>
-          </a:solidFill>
-          <a:ln w="12700">
-            <a:solidFill>
-              <a:srgbClr val="DB2777"/>
-            </a:solidFill>
-            <a:prstDash val="solid"/>
-          </a:ln>
-        </p:spPr>
-      </p:sp>
-      <p:sp>
-        <p:nvSpPr>
-          <p:cNvPr id="68" name="Text 66"/>
-          <p:cNvSpPr/>
-          <p:nvPr/>
-        </p:nvSpPr>
-        <p:spPr>
-          <a:xfrm>
-            <a:off x="7832252" y="4169664"/>
-            <a:ext cx="603504" cy="384048"/>
-          </a:xfrm>
-          <a:prstGeom prst="rect">
-            <a:avLst/>
-          </a:prstGeom>
-          <a:noFill/>
-          <a:ln/>
-        </p:spPr>
-        <p:txBody>
-          <a:bodyPr wrap="square" lIns="0" tIns="0" rIns="0" bIns="0" rtlCol="0" anchor="ctr"/>
-          <a:lstStyle/>
-          <a:p>
-            <a:pPr algn="ctr" indent="0" marL="0">
-              <a:buNone/>
-            </a:pPr>
-            <a:r>
-              <a:rPr lang="en-US" sz="900" b="1" dirty="0">
-                <a:solidFill>
-                  <a:srgbClr val="9D174D"/>
-                </a:solidFill>
-                <a:latin typeface="Trebuchet MS" pitchFamily="34" charset="0"/>
-                <a:ea typeface="Trebuchet MS" pitchFamily="34" charset="-122"/>
-                <a:cs typeface="Trebuchet MS" pitchFamily="34" charset="-120"/>
-              </a:rPr>
-              <a:t>n</a:t>
+              <a:t>ed</a:t>
             </a:r>
             <a:endParaRPr lang="en-US" sz="900" dirty="0"/>
           </a:p>
@@ -25099,7 +24958,7 @@
                 <a:ea typeface="Trebuchet MS" pitchFamily="34" charset="-122"/>
                 <a:cs typeface="Trebuchet MS" pitchFamily="34" charset="-120"/>
               </a:rPr>
-              <a:t>unprepared</a:t>
+              <a:t>preparedness</a:t>
             </a:r>
             <a:endParaRPr lang="en-US" sz="2800" dirty="0"/>
           </a:p>
@@ -25926,7 +25785,7 @@
                 <a:ea typeface="Trebuchet MS" pitchFamily="34" charset="-122"/>
                 <a:cs typeface="Trebuchet MS" pitchFamily="34" charset="-120"/>
               </a:rPr>
-              <a:t>unprepared</a:t>
+              <a:t>preparedness</a:t>
             </a:r>
             <a:endParaRPr lang="en-US" sz="2800" dirty="0"/>
           </a:p>
@@ -26065,7 +25924,7 @@
                 <a:ea typeface="Trebuchet MS" pitchFamily="34" charset="-122"/>
                 <a:cs typeface="Trebuchet MS" pitchFamily="34" charset="-120"/>
               </a:rPr>
-              <a:t>un</a:t>
+              <a:t>pre</a:t>
             </a:r>
             <a:endParaRPr lang="en-US" sz="1300" dirty="0"/>
           </a:p>
@@ -26104,7 +25963,7 @@
                 <a:ea typeface="Calibri" pitchFamily="34" charset="-122"/>
                 <a:cs typeface="Calibri" pitchFamily="34" charset="-120"/>
               </a:rPr>
-              <a:t>not</a:t>
+              <a:t>before</a:t>
             </a:r>
             <a:endParaRPr lang="en-US" sz="850" dirty="0"/>
           </a:p>
@@ -26177,7 +26036,7 @@
                 <a:ea typeface="Trebuchet MS" pitchFamily="34" charset="-122"/>
                 <a:cs typeface="Trebuchet MS" pitchFamily="34" charset="-120"/>
               </a:rPr>
-              <a:t>pre</a:t>
+              <a:t>pare</a:t>
             </a:r>
             <a:endParaRPr lang="en-US" sz="1300" dirty="0"/>
           </a:p>
@@ -26216,7 +26075,7 @@
                 <a:ea typeface="Calibri" pitchFamily="34" charset="-122"/>
                 <a:cs typeface="Calibri" pitchFamily="34" charset="-120"/>
               </a:rPr>
-              <a:t>before</a:t>
+              <a:t>make ready</a:t>
             </a:r>
             <a:endParaRPr lang="en-US" sz="850" dirty="0"/>
           </a:p>
@@ -26224,7 +26083,46 @@
       </p:sp>
       <p:sp>
         <p:nvSpPr>
-          <p:cNvPr id="22" name="Shape 20"/>
+          <p:cNvPr id="22" name="Text 20"/>
+          <p:cNvSpPr/>
+          <p:nvPr/>
+        </p:nvSpPr>
+        <p:spPr>
+          <a:xfrm>
+            <a:off x="3659429" y="2752344"/>
+            <a:ext cx="1581912" cy="182880"/>
+          </a:xfrm>
+          <a:prstGeom prst="rect">
+            <a:avLst/>
+          </a:prstGeom>
+          <a:noFill/>
+          <a:ln/>
+        </p:spPr>
+        <p:txBody>
+          <a:bodyPr wrap="square" lIns="0" tIns="0" rIns="0" bIns="0" rtlCol="0" anchor="t"/>
+          <a:lstStyle/>
+          <a:p>
+            <a:pPr algn="ctr" indent="0" marL="0">
+              <a:buNone/>
+            </a:pPr>
+            <a:r>
+              <a:rPr lang="en-US" sz="700" i="1" dirty="0">
+                <a:solidFill>
+                  <a:srgbClr val="94A3B8"/>
+                </a:solidFill>
+                <a:latin typeface="Calibri" pitchFamily="34" charset="0"/>
+                <a:ea typeface="Calibri" pitchFamily="34" charset="-122"/>
+                <a:cs typeface="Calibri" pitchFamily="34" charset="-120"/>
+              </a:rPr>
+              <a:t>'e' dropped before vowel suffix</a:t>
+            </a:r>
+            <a:endParaRPr lang="en-US" sz="700" dirty="0"/>
+          </a:p>
+        </p:txBody>
+      </p:sp>
+      <p:sp>
+        <p:nvSpPr>
+          <p:cNvPr id="23" name="Shape 21"/>
           <p:cNvSpPr/>
           <p:nvPr/>
         </p:nvSpPr>
@@ -26258,7 +26156,7 @@
       </p:sp>
       <p:sp>
         <p:nvSpPr>
-          <p:cNvPr id="23" name="Text 21"/>
+          <p:cNvPr id="24" name="Text 22"/>
           <p:cNvSpPr/>
           <p:nvPr/>
         </p:nvSpPr>
@@ -26289,7 +26187,7 @@
                 <a:ea typeface="Trebuchet MS" pitchFamily="34" charset="-122"/>
                 <a:cs typeface="Trebuchet MS" pitchFamily="34" charset="-120"/>
               </a:rPr>
-              <a:t>pare</a:t>
+              <a:t>ed</a:t>
             </a:r>
             <a:endParaRPr lang="en-US" sz="1300" dirty="0"/>
           </a:p>
@@ -26297,7 +26195,7 @@
       </p:sp>
       <p:sp>
         <p:nvSpPr>
-          <p:cNvPr id="24" name="Text 22"/>
+          <p:cNvPr id="25" name="Text 23"/>
           <p:cNvSpPr/>
           <p:nvPr/>
         </p:nvSpPr>
@@ -26328,48 +26226,9 @@
                 <a:ea typeface="Calibri" pitchFamily="34" charset="-122"/>
                 <a:cs typeface="Calibri" pitchFamily="34" charset="-120"/>
               </a:rPr>
-              <a:t>make ready</a:t>
+              <a:t>state of being</a:t>
             </a:r>
             <a:endParaRPr lang="en-US" sz="850" dirty="0"/>
-          </a:p>
-        </p:txBody>
-      </p:sp>
-      <p:sp>
-        <p:nvSpPr>
-          <p:cNvPr id="25" name="Text 23"/>
-          <p:cNvSpPr/>
-          <p:nvPr/>
-        </p:nvSpPr>
-        <p:spPr>
-          <a:xfrm>
-            <a:off x="5329123" y="2752344"/>
-            <a:ext cx="1581912" cy="182880"/>
-          </a:xfrm>
-          <a:prstGeom prst="rect">
-            <a:avLst/>
-          </a:prstGeom>
-          <a:noFill/>
-          <a:ln/>
-        </p:spPr>
-        <p:txBody>
-          <a:bodyPr wrap="square" lIns="0" tIns="0" rIns="0" bIns="0" rtlCol="0" anchor="t"/>
-          <a:lstStyle/>
-          <a:p>
-            <a:pPr algn="ctr" indent="0" marL="0">
-              <a:buNone/>
-            </a:pPr>
-            <a:r>
-              <a:rPr lang="en-US" sz="700" i="1" dirty="0">
-                <a:solidFill>
-                  <a:srgbClr val="94A3B8"/>
-                </a:solidFill>
-                <a:latin typeface="Calibri" pitchFamily="34" charset="0"/>
-                <a:ea typeface="Calibri" pitchFamily="34" charset="-122"/>
-                <a:cs typeface="Calibri" pitchFamily="34" charset="-120"/>
-              </a:rPr>
-              <a:t>'e' dropped before vowel suffix</a:t>
-            </a:r>
-            <a:endParaRPr lang="en-US" sz="700" dirty="0"/>
           </a:p>
         </p:txBody>
       </p:sp>
@@ -26440,7 +26299,7 @@
                 <a:ea typeface="Trebuchet MS" pitchFamily="34" charset="-122"/>
                 <a:cs typeface="Trebuchet MS" pitchFamily="34" charset="-120"/>
               </a:rPr>
-              <a:t>d</a:t>
+              <a:t>ness</a:t>
             </a:r>
             <a:endParaRPr lang="en-US" sz="1300" dirty="0"/>
           </a:p>
@@ -26479,7 +26338,7 @@
                 <a:ea typeface="Calibri" pitchFamily="34" charset="-122"/>
                 <a:cs typeface="Calibri" pitchFamily="34" charset="-120"/>
               </a:rPr>
-              <a:t>past tense</a:t>
+              <a:t>quality or condition</a:t>
             </a:r>
             <a:endParaRPr lang="en-US" sz="850" dirty="0"/>
           </a:p>
@@ -27893,7 +27752,7 @@
                 <a:ea typeface="Trebuchet MS" pitchFamily="34" charset="-122"/>
                 <a:cs typeface="Trebuchet MS" pitchFamily="34" charset="-120"/>
               </a:rPr>
-              <a:t>unprepared</a:t>
+              <a:t>preparedness</a:t>
             </a:r>
             <a:endParaRPr lang="en-US" sz="2800" dirty="0"/>
           </a:p>
@@ -28032,7 +27891,7 @@
                 <a:ea typeface="Trebuchet MS" pitchFamily="34" charset="-122"/>
                 <a:cs typeface="Trebuchet MS" pitchFamily="34" charset="-120"/>
               </a:rPr>
-              <a:t>un</a:t>
+              <a:t>pre</a:t>
             </a:r>
             <a:endParaRPr lang="en-US" sz="1300" dirty="0"/>
           </a:p>
@@ -28071,7 +27930,7 @@
                 <a:ea typeface="Calibri" pitchFamily="34" charset="-122"/>
                 <a:cs typeface="Calibri" pitchFamily="34" charset="-120"/>
               </a:rPr>
-              <a:t>not</a:t>
+              <a:t>before</a:t>
             </a:r>
             <a:endParaRPr lang="en-US" sz="850" dirty="0"/>
           </a:p>
@@ -28144,7 +28003,7 @@
                 <a:ea typeface="Trebuchet MS" pitchFamily="34" charset="-122"/>
                 <a:cs typeface="Trebuchet MS" pitchFamily="34" charset="-120"/>
               </a:rPr>
-              <a:t>pre</a:t>
+              <a:t>pare</a:t>
             </a:r>
             <a:endParaRPr lang="en-US" sz="1300" dirty="0"/>
           </a:p>
@@ -28183,7 +28042,7 @@
                 <a:ea typeface="Calibri" pitchFamily="34" charset="-122"/>
                 <a:cs typeface="Calibri" pitchFamily="34" charset="-120"/>
               </a:rPr>
-              <a:t>before</a:t>
+              <a:t>make ready</a:t>
             </a:r>
             <a:endParaRPr lang="en-US" sz="850" dirty="0"/>
           </a:p>
@@ -28191,7 +28050,46 @@
       </p:sp>
       <p:sp>
         <p:nvSpPr>
-          <p:cNvPr id="22" name="Shape 20"/>
+          <p:cNvPr id="22" name="Text 20"/>
+          <p:cNvSpPr/>
+          <p:nvPr/>
+        </p:nvSpPr>
+        <p:spPr>
+          <a:xfrm>
+            <a:off x="3659429" y="2752344"/>
+            <a:ext cx="1581912" cy="182880"/>
+          </a:xfrm>
+          <a:prstGeom prst="rect">
+            <a:avLst/>
+          </a:prstGeom>
+          <a:noFill/>
+          <a:ln/>
+        </p:spPr>
+        <p:txBody>
+          <a:bodyPr wrap="square" lIns="0" tIns="0" rIns="0" bIns="0" rtlCol="0" anchor="t"/>
+          <a:lstStyle/>
+          <a:p>
+            <a:pPr algn="ctr" indent="0" marL="0">
+              <a:buNone/>
+            </a:pPr>
+            <a:r>
+              <a:rPr lang="en-US" sz="700" i="1" dirty="0">
+                <a:solidFill>
+                  <a:srgbClr val="94A3B8"/>
+                </a:solidFill>
+                <a:latin typeface="Calibri" pitchFamily="34" charset="0"/>
+                <a:ea typeface="Calibri" pitchFamily="34" charset="-122"/>
+                <a:cs typeface="Calibri" pitchFamily="34" charset="-120"/>
+              </a:rPr>
+              <a:t>'e' dropped before vowel suffix</a:t>
+            </a:r>
+            <a:endParaRPr lang="en-US" sz="700" dirty="0"/>
+          </a:p>
+        </p:txBody>
+      </p:sp>
+      <p:sp>
+        <p:nvSpPr>
+          <p:cNvPr id="23" name="Shape 21"/>
           <p:cNvSpPr/>
           <p:nvPr/>
         </p:nvSpPr>
@@ -28225,7 +28123,7 @@
       </p:sp>
       <p:sp>
         <p:nvSpPr>
-          <p:cNvPr id="23" name="Text 21"/>
+          <p:cNvPr id="24" name="Text 22"/>
           <p:cNvSpPr/>
           <p:nvPr/>
         </p:nvSpPr>
@@ -28256,7 +28154,7 @@
                 <a:ea typeface="Trebuchet MS" pitchFamily="34" charset="-122"/>
                 <a:cs typeface="Trebuchet MS" pitchFamily="34" charset="-120"/>
               </a:rPr>
-              <a:t>pare</a:t>
+              <a:t>ed</a:t>
             </a:r>
             <a:endParaRPr lang="en-US" sz="1300" dirty="0"/>
           </a:p>
@@ -28264,7 +28162,7 @@
       </p:sp>
       <p:sp>
         <p:nvSpPr>
-          <p:cNvPr id="24" name="Text 22"/>
+          <p:cNvPr id="25" name="Text 23"/>
           <p:cNvSpPr/>
           <p:nvPr/>
         </p:nvSpPr>
@@ -28295,48 +28193,9 @@
                 <a:ea typeface="Calibri" pitchFamily="34" charset="-122"/>
                 <a:cs typeface="Calibri" pitchFamily="34" charset="-120"/>
               </a:rPr>
-              <a:t>make ready</a:t>
+              <a:t>state of being</a:t>
             </a:r>
             <a:endParaRPr lang="en-US" sz="850" dirty="0"/>
-          </a:p>
-        </p:txBody>
-      </p:sp>
-      <p:sp>
-        <p:nvSpPr>
-          <p:cNvPr id="25" name="Text 23"/>
-          <p:cNvSpPr/>
-          <p:nvPr/>
-        </p:nvSpPr>
-        <p:spPr>
-          <a:xfrm>
-            <a:off x="5329123" y="2752344"/>
-            <a:ext cx="1581912" cy="182880"/>
-          </a:xfrm>
-          <a:prstGeom prst="rect">
-            <a:avLst/>
-          </a:prstGeom>
-          <a:noFill/>
-          <a:ln/>
-        </p:spPr>
-        <p:txBody>
-          <a:bodyPr wrap="square" lIns="0" tIns="0" rIns="0" bIns="0" rtlCol="0" anchor="t"/>
-          <a:lstStyle/>
-          <a:p>
-            <a:pPr algn="ctr" indent="0" marL="0">
-              <a:buNone/>
-            </a:pPr>
-            <a:r>
-              <a:rPr lang="en-US" sz="700" i="1" dirty="0">
-                <a:solidFill>
-                  <a:srgbClr val="94A3B8"/>
-                </a:solidFill>
-                <a:latin typeface="Calibri" pitchFamily="34" charset="0"/>
-                <a:ea typeface="Calibri" pitchFamily="34" charset="-122"/>
-                <a:cs typeface="Calibri" pitchFamily="34" charset="-120"/>
-              </a:rPr>
-              <a:t>'e' dropped before vowel suffix</a:t>
-            </a:r>
-            <a:endParaRPr lang="en-US" sz="700" dirty="0"/>
           </a:p>
         </p:txBody>
       </p:sp>
@@ -28407,7 +28266,7 @@
                 <a:ea typeface="Trebuchet MS" pitchFamily="34" charset="-122"/>
                 <a:cs typeface="Trebuchet MS" pitchFamily="34" charset="-120"/>
               </a:rPr>
-              <a:t>d</a:t>
+              <a:t>ness</a:t>
             </a:r>
             <a:endParaRPr lang="en-US" sz="1300" dirty="0"/>
           </a:p>
@@ -28446,7 +28305,7 @@
                 <a:ea typeface="Calibri" pitchFamily="34" charset="-122"/>
                 <a:cs typeface="Calibri" pitchFamily="34" charset="-120"/>
               </a:rPr>
-              <a:t>past tense</a:t>
+              <a:t>quality or condition</a:t>
             </a:r>
             <a:endParaRPr lang="en-US" sz="850" dirty="0"/>
           </a:p>
@@ -28605,7 +28464,7 @@
                 <a:ea typeface="Trebuchet MS" pitchFamily="34" charset="-122"/>
                 <a:cs typeface="Trebuchet MS" pitchFamily="34" charset="-120"/>
               </a:rPr>
-              <a:t>un</a:t>
+              <a:t>pre</a:t>
             </a:r>
             <a:endParaRPr lang="en-US" sz="1400" dirty="0"/>
           </a:p>
@@ -28710,7 +28569,7 @@
                 <a:ea typeface="Trebuchet MS" pitchFamily="34" charset="-122"/>
                 <a:cs typeface="Trebuchet MS" pitchFamily="34" charset="-120"/>
               </a:rPr>
-              <a:t>pre</a:t>
+              <a:t>pared</a:t>
             </a:r>
             <a:endParaRPr lang="en-US" sz="1400" dirty="0"/>
           </a:p>
@@ -28815,7 +28674,7 @@
                 <a:ea typeface="Trebuchet MS" pitchFamily="34" charset="-122"/>
                 <a:cs typeface="Trebuchet MS" pitchFamily="34" charset="-120"/>
               </a:rPr>
-              <a:t>pared</a:t>
+              <a:t>ness</a:t>
             </a:r>
             <a:endParaRPr lang="en-US" sz="1400" dirty="0"/>
           </a:p>
@@ -29378,7 +29237,7 @@
                 <a:ea typeface="Trebuchet MS" pitchFamily="34" charset="-122"/>
                 <a:cs typeface="Trebuchet MS" pitchFamily="34" charset="-120"/>
               </a:rPr>
-              <a:t>unprepared</a:t>
+              <a:t>preparedness</a:t>
             </a:r>
             <a:endParaRPr lang="en-US" sz="2800" dirty="0"/>
           </a:p>
@@ -29517,7 +29376,7 @@
                 <a:ea typeface="Trebuchet MS" pitchFamily="34" charset="-122"/>
                 <a:cs typeface="Trebuchet MS" pitchFamily="34" charset="-120"/>
               </a:rPr>
-              <a:t>un</a:t>
+              <a:t>pre</a:t>
             </a:r>
             <a:endParaRPr lang="en-US" sz="1300" dirty="0"/>
           </a:p>
@@ -29556,7 +29415,7 @@
                 <a:ea typeface="Calibri" pitchFamily="34" charset="-122"/>
                 <a:cs typeface="Calibri" pitchFamily="34" charset="-120"/>
               </a:rPr>
-              <a:t>not</a:t>
+              <a:t>before</a:t>
             </a:r>
             <a:endParaRPr lang="en-US" sz="850" dirty="0"/>
           </a:p>
@@ -29629,7 +29488,7 @@
                 <a:ea typeface="Trebuchet MS" pitchFamily="34" charset="-122"/>
                 <a:cs typeface="Trebuchet MS" pitchFamily="34" charset="-120"/>
               </a:rPr>
-              <a:t>pre</a:t>
+              <a:t>pare</a:t>
             </a:r>
             <a:endParaRPr lang="en-US" sz="1300" dirty="0"/>
           </a:p>
@@ -29668,7 +29527,7 @@
                 <a:ea typeface="Calibri" pitchFamily="34" charset="-122"/>
                 <a:cs typeface="Calibri" pitchFamily="34" charset="-120"/>
               </a:rPr>
-              <a:t>before</a:t>
+              <a:t>make ready</a:t>
             </a:r>
             <a:endParaRPr lang="en-US" sz="850" dirty="0"/>
           </a:p>
@@ -29676,7 +29535,46 @@
       </p:sp>
       <p:sp>
         <p:nvSpPr>
-          <p:cNvPr id="22" name="Shape 20"/>
+          <p:cNvPr id="22" name="Text 20"/>
+          <p:cNvSpPr/>
+          <p:nvPr/>
+        </p:nvSpPr>
+        <p:spPr>
+          <a:xfrm>
+            <a:off x="3659429" y="2752344"/>
+            <a:ext cx="1581912" cy="182880"/>
+          </a:xfrm>
+          <a:prstGeom prst="rect">
+            <a:avLst/>
+          </a:prstGeom>
+          <a:noFill/>
+          <a:ln/>
+        </p:spPr>
+        <p:txBody>
+          <a:bodyPr wrap="square" lIns="0" tIns="0" rIns="0" bIns="0" rtlCol="0" anchor="t"/>
+          <a:lstStyle/>
+          <a:p>
+            <a:pPr algn="ctr" indent="0" marL="0">
+              <a:buNone/>
+            </a:pPr>
+            <a:r>
+              <a:rPr lang="en-US" sz="700" i="1" dirty="0">
+                <a:solidFill>
+                  <a:srgbClr val="94A3B8"/>
+                </a:solidFill>
+                <a:latin typeface="Calibri" pitchFamily="34" charset="0"/>
+                <a:ea typeface="Calibri" pitchFamily="34" charset="-122"/>
+                <a:cs typeface="Calibri" pitchFamily="34" charset="-120"/>
+              </a:rPr>
+              <a:t>'e' dropped before vowel suffix</a:t>
+            </a:r>
+            <a:endParaRPr lang="en-US" sz="700" dirty="0"/>
+          </a:p>
+        </p:txBody>
+      </p:sp>
+      <p:sp>
+        <p:nvSpPr>
+          <p:cNvPr id="23" name="Shape 21"/>
           <p:cNvSpPr/>
           <p:nvPr/>
         </p:nvSpPr>
@@ -29710,7 +29608,7 @@
       </p:sp>
       <p:sp>
         <p:nvSpPr>
-          <p:cNvPr id="23" name="Text 21"/>
+          <p:cNvPr id="24" name="Text 22"/>
           <p:cNvSpPr/>
           <p:nvPr/>
         </p:nvSpPr>
@@ -29741,7 +29639,7 @@
                 <a:ea typeface="Trebuchet MS" pitchFamily="34" charset="-122"/>
                 <a:cs typeface="Trebuchet MS" pitchFamily="34" charset="-120"/>
               </a:rPr>
-              <a:t>pare</a:t>
+              <a:t>ed</a:t>
             </a:r>
             <a:endParaRPr lang="en-US" sz="1300" dirty="0"/>
           </a:p>
@@ -29749,7 +29647,7 @@
       </p:sp>
       <p:sp>
         <p:nvSpPr>
-          <p:cNvPr id="24" name="Text 22"/>
+          <p:cNvPr id="25" name="Text 23"/>
           <p:cNvSpPr/>
           <p:nvPr/>
         </p:nvSpPr>
@@ -29780,48 +29678,9 @@
                 <a:ea typeface="Calibri" pitchFamily="34" charset="-122"/>
                 <a:cs typeface="Calibri" pitchFamily="34" charset="-120"/>
               </a:rPr>
-              <a:t>make ready</a:t>
+              <a:t>state of being</a:t>
             </a:r>
             <a:endParaRPr lang="en-US" sz="850" dirty="0"/>
-          </a:p>
-        </p:txBody>
-      </p:sp>
-      <p:sp>
-        <p:nvSpPr>
-          <p:cNvPr id="25" name="Text 23"/>
-          <p:cNvSpPr/>
-          <p:nvPr/>
-        </p:nvSpPr>
-        <p:spPr>
-          <a:xfrm>
-            <a:off x="5329123" y="2752344"/>
-            <a:ext cx="1581912" cy="182880"/>
-          </a:xfrm>
-          <a:prstGeom prst="rect">
-            <a:avLst/>
-          </a:prstGeom>
-          <a:noFill/>
-          <a:ln/>
-        </p:spPr>
-        <p:txBody>
-          <a:bodyPr wrap="square" lIns="0" tIns="0" rIns="0" bIns="0" rtlCol="0" anchor="t"/>
-          <a:lstStyle/>
-          <a:p>
-            <a:pPr algn="ctr" indent="0" marL="0">
-              <a:buNone/>
-            </a:pPr>
-            <a:r>
-              <a:rPr lang="en-US" sz="700" i="1" dirty="0">
-                <a:solidFill>
-                  <a:srgbClr val="94A3B8"/>
-                </a:solidFill>
-                <a:latin typeface="Calibri" pitchFamily="34" charset="0"/>
-                <a:ea typeface="Calibri" pitchFamily="34" charset="-122"/>
-                <a:cs typeface="Calibri" pitchFamily="34" charset="-120"/>
-              </a:rPr>
-              <a:t>'e' dropped before vowel suffix</a:t>
-            </a:r>
-            <a:endParaRPr lang="en-US" sz="700" dirty="0"/>
           </a:p>
         </p:txBody>
       </p:sp>
@@ -29892,7 +29751,7 @@
                 <a:ea typeface="Trebuchet MS" pitchFamily="34" charset="-122"/>
                 <a:cs typeface="Trebuchet MS" pitchFamily="34" charset="-120"/>
               </a:rPr>
-              <a:t>d</a:t>
+              <a:t>ness</a:t>
             </a:r>
             <a:endParaRPr lang="en-US" sz="1300" dirty="0"/>
           </a:p>
@@ -29931,7 +29790,7 @@
                 <a:ea typeface="Calibri" pitchFamily="34" charset="-122"/>
                 <a:cs typeface="Calibri" pitchFamily="34" charset="-120"/>
               </a:rPr>
-              <a:t>past tense</a:t>
+              <a:t>quality or condition</a:t>
             </a:r>
             <a:endParaRPr lang="en-US" sz="850" dirty="0"/>
           </a:p>
@@ -30090,7 +29949,7 @@
                 <a:ea typeface="Trebuchet MS" pitchFamily="34" charset="-122"/>
                 <a:cs typeface="Trebuchet MS" pitchFamily="34" charset="-120"/>
               </a:rPr>
-              <a:t>un</a:t>
+              <a:t>pre</a:t>
             </a:r>
             <a:endParaRPr lang="en-US" sz="1400" dirty="0"/>
           </a:p>
@@ -30195,7 +30054,7 @@
                 <a:ea typeface="Trebuchet MS" pitchFamily="34" charset="-122"/>
                 <a:cs typeface="Trebuchet MS" pitchFamily="34" charset="-120"/>
               </a:rPr>
-              <a:t>pre</a:t>
+              <a:t>pared</a:t>
             </a:r>
             <a:endParaRPr lang="en-US" sz="1400" dirty="0"/>
           </a:p>
@@ -30300,7 +30159,7 @@
                 <a:ea typeface="Trebuchet MS" pitchFamily="34" charset="-122"/>
                 <a:cs typeface="Trebuchet MS" pitchFamily="34" charset="-120"/>
               </a:rPr>
-              <a:t>pared</a:t>
+              <a:t>ness</a:t>
             </a:r>
             <a:endParaRPr lang="en-US" sz="1400" dirty="0"/>
           </a:p>
@@ -30381,11 +30240,11 @@
         <p:spPr>
           <a:xfrm>
             <a:off x="1874520" y="4096512"/>
-            <a:ext cx="6903720" cy="804672"/>
+            <a:ext cx="6903720" cy="658368"/>
           </a:xfrm>
           <a:prstGeom prst="rect">
             <a:avLst>
-              <a:gd name="adj" fmla="val 6818"/>
+              <a:gd name="adj" fmla="val 8333"/>
             </a:avLst>
           </a:prstGeom>
           <a:solidFill>
@@ -30407,12 +30266,12 @@
         </p:nvSpPr>
         <p:spPr>
           <a:xfrm>
-            <a:off x="2023872" y="4169664"/>
-            <a:ext cx="685800" cy="384048"/>
+            <a:off x="1951330" y="4169664"/>
+            <a:ext cx="676656" cy="475488"/>
           </a:xfrm>
           <a:prstGeom prst="rect">
             <a:avLst>
-              <a:gd name="adj" fmla="val 9524"/>
+              <a:gd name="adj" fmla="val 7692"/>
             </a:avLst>
           </a:prstGeom>
           <a:solidFill>
@@ -30434,8 +30293,8 @@
         </p:nvSpPr>
         <p:spPr>
           <a:xfrm>
-            <a:off x="2023872" y="4169664"/>
-            <a:ext cx="685800" cy="384048"/>
+            <a:off x="1951330" y="4169664"/>
+            <a:ext cx="676656" cy="475488"/>
           </a:xfrm>
           <a:prstGeom prst="rect">
             <a:avLst/>
@@ -30459,7 +30318,7 @@
                 <a:ea typeface="Trebuchet MS" pitchFamily="34" charset="-122"/>
                 <a:cs typeface="Trebuchet MS" pitchFamily="34" charset="-120"/>
               </a:rPr>
-              <a:t>u</a:t>
+              <a:t>p</a:t>
             </a:r>
             <a:endParaRPr lang="en-US" sz="900" dirty="0"/>
           </a:p>
@@ -30473,12 +30332,12 @@
         </p:nvSpPr>
         <p:spPr>
           <a:xfrm>
-            <a:off x="2831592" y="4169664"/>
-            <a:ext cx="685800" cy="384048"/>
+            <a:off x="2677363" y="4169664"/>
+            <a:ext cx="676656" cy="475488"/>
           </a:xfrm>
           <a:prstGeom prst="rect">
             <a:avLst>
-              <a:gd name="adj" fmla="val 9524"/>
+              <a:gd name="adj" fmla="val 7692"/>
             </a:avLst>
           </a:prstGeom>
           <a:solidFill>
@@ -30500,8 +30359,8 @@
         </p:nvSpPr>
         <p:spPr>
           <a:xfrm>
-            <a:off x="2831592" y="4169664"/>
-            <a:ext cx="685800" cy="384048"/>
+            <a:off x="2677363" y="4169664"/>
+            <a:ext cx="676656" cy="475488"/>
           </a:xfrm>
           <a:prstGeom prst="rect">
             <a:avLst/>
@@ -30525,7 +30384,7 @@
                 <a:ea typeface="Trebuchet MS" pitchFamily="34" charset="-122"/>
                 <a:cs typeface="Trebuchet MS" pitchFamily="34" charset="-120"/>
               </a:rPr>
-              <a:t>n</a:t>
+              <a:t>r</a:t>
             </a:r>
             <a:endParaRPr lang="en-US" sz="900" dirty="0"/>
           </a:p>
@@ -30539,12 +30398,12 @@
         </p:nvSpPr>
         <p:spPr>
           <a:xfrm>
-            <a:off x="3639312" y="4169664"/>
-            <a:ext cx="685800" cy="384048"/>
+            <a:off x="3403397" y="4169664"/>
+            <a:ext cx="676656" cy="475488"/>
           </a:xfrm>
           <a:prstGeom prst="rect">
             <a:avLst>
-              <a:gd name="adj" fmla="val 9524"/>
+              <a:gd name="adj" fmla="val 7692"/>
             </a:avLst>
           </a:prstGeom>
           <a:solidFill>
@@ -30566,8 +30425,8 @@
         </p:nvSpPr>
         <p:spPr>
           <a:xfrm>
-            <a:off x="3639312" y="4169664"/>
-            <a:ext cx="685800" cy="384048"/>
+            <a:off x="3403397" y="4169664"/>
+            <a:ext cx="676656" cy="475488"/>
           </a:xfrm>
           <a:prstGeom prst="rect">
             <a:avLst/>
@@ -30591,7 +30450,7 @@
                 <a:ea typeface="Trebuchet MS" pitchFamily="34" charset="-122"/>
                 <a:cs typeface="Trebuchet MS" pitchFamily="34" charset="-120"/>
               </a:rPr>
-              <a:t>p</a:t>
+              <a:t>e</a:t>
             </a:r>
             <a:endParaRPr lang="en-US" sz="900" dirty="0"/>
           </a:p>
@@ -30605,12 +30464,12 @@
         </p:nvSpPr>
         <p:spPr>
           <a:xfrm>
-            <a:off x="4447032" y="4169664"/>
-            <a:ext cx="685800" cy="384048"/>
+            <a:off x="4129430" y="4169664"/>
+            <a:ext cx="676656" cy="475488"/>
           </a:xfrm>
           <a:prstGeom prst="rect">
             <a:avLst>
-              <a:gd name="adj" fmla="val 9524"/>
+              <a:gd name="adj" fmla="val 7692"/>
             </a:avLst>
           </a:prstGeom>
           <a:solidFill>
@@ -30632,8 +30491,8 @@
         </p:nvSpPr>
         <p:spPr>
           <a:xfrm>
-            <a:off x="4447032" y="4169664"/>
-            <a:ext cx="685800" cy="384048"/>
+            <a:off x="4129430" y="4169664"/>
+            <a:ext cx="676656" cy="475488"/>
           </a:xfrm>
           <a:prstGeom prst="rect">
             <a:avLst/>
@@ -30657,7 +30516,7 @@
                 <a:ea typeface="Trebuchet MS" pitchFamily="34" charset="-122"/>
                 <a:cs typeface="Trebuchet MS" pitchFamily="34" charset="-120"/>
               </a:rPr>
-              <a:t>r</a:t>
+              <a:t>p</a:t>
             </a:r>
             <a:endParaRPr lang="en-US" sz="900" dirty="0"/>
           </a:p>
@@ -30671,12 +30530,12 @@
         </p:nvSpPr>
         <p:spPr>
           <a:xfrm>
-            <a:off x="5254752" y="4169664"/>
-            <a:ext cx="685800" cy="384048"/>
+            <a:off x="4855464" y="4169664"/>
+            <a:ext cx="676656" cy="475488"/>
           </a:xfrm>
           <a:prstGeom prst="rect">
             <a:avLst>
-              <a:gd name="adj" fmla="val 9524"/>
+              <a:gd name="adj" fmla="val 7692"/>
             </a:avLst>
           </a:prstGeom>
           <a:solidFill>
@@ -30698,8 +30557,8 @@
         </p:nvSpPr>
         <p:spPr>
           <a:xfrm>
-            <a:off x="5254752" y="4169664"/>
-            <a:ext cx="685800" cy="384048"/>
+            <a:off x="4855464" y="4169664"/>
+            <a:ext cx="676656" cy="475488"/>
           </a:xfrm>
           <a:prstGeom prst="rect">
             <a:avLst/>
@@ -30723,7 +30582,7 @@
                 <a:ea typeface="Trebuchet MS" pitchFamily="34" charset="-122"/>
                 <a:cs typeface="Trebuchet MS" pitchFamily="34" charset="-120"/>
               </a:rPr>
-              <a:t>e</a:t>
+              <a:t>ar</a:t>
             </a:r>
             <a:endParaRPr lang="en-US" sz="900" dirty="0"/>
           </a:p>
@@ -30737,12 +30596,12 @@
         </p:nvSpPr>
         <p:spPr>
           <a:xfrm>
-            <a:off x="6062472" y="4169664"/>
-            <a:ext cx="685800" cy="384048"/>
+            <a:off x="5581498" y="4169664"/>
+            <a:ext cx="676656" cy="475488"/>
           </a:xfrm>
           <a:prstGeom prst="rect">
             <a:avLst>
-              <a:gd name="adj" fmla="val 9524"/>
+              <a:gd name="adj" fmla="val 7692"/>
             </a:avLst>
           </a:prstGeom>
           <a:solidFill>
@@ -30764,8 +30623,8 @@
         </p:nvSpPr>
         <p:spPr>
           <a:xfrm>
-            <a:off x="6062472" y="4169664"/>
-            <a:ext cx="685800" cy="384048"/>
+            <a:off x="5581498" y="4169664"/>
+            <a:ext cx="676656" cy="475488"/>
           </a:xfrm>
           <a:prstGeom prst="rect">
             <a:avLst/>
@@ -30789,7 +30648,7 @@
                 <a:ea typeface="Trebuchet MS" pitchFamily="34" charset="-122"/>
                 <a:cs typeface="Trebuchet MS" pitchFamily="34" charset="-120"/>
               </a:rPr>
-              <a:t>p</a:t>
+              <a:t>ed</a:t>
             </a:r>
             <a:endParaRPr lang="en-US" sz="900" dirty="0"/>
           </a:p>
@@ -30803,12 +30662,12 @@
         </p:nvSpPr>
         <p:spPr>
           <a:xfrm>
-            <a:off x="6870192" y="4169664"/>
-            <a:ext cx="685800" cy="384048"/>
+            <a:off x="6307531" y="4169664"/>
+            <a:ext cx="676656" cy="475488"/>
           </a:xfrm>
           <a:prstGeom prst="rect">
             <a:avLst>
-              <a:gd name="adj" fmla="val 9524"/>
+              <a:gd name="adj" fmla="val 7692"/>
             </a:avLst>
           </a:prstGeom>
           <a:solidFill>
@@ -30830,8 +30689,8 @@
         </p:nvSpPr>
         <p:spPr>
           <a:xfrm>
-            <a:off x="6870192" y="4169664"/>
-            <a:ext cx="685800" cy="384048"/>
+            <a:off x="6307531" y="4169664"/>
+            <a:ext cx="676656" cy="475488"/>
           </a:xfrm>
           <a:prstGeom prst="rect">
             <a:avLst/>
@@ -30855,7 +30714,7 @@
                 <a:ea typeface="Trebuchet MS" pitchFamily="34" charset="-122"/>
                 <a:cs typeface="Trebuchet MS" pitchFamily="34" charset="-120"/>
               </a:rPr>
-              <a:t>ar</a:t>
+              <a:t>n</a:t>
             </a:r>
             <a:endParaRPr lang="en-US" sz="900" dirty="0"/>
           </a:p>
@@ -30869,12 +30728,12 @@
         </p:nvSpPr>
         <p:spPr>
           <a:xfrm>
-            <a:off x="7677912" y="4169664"/>
-            <a:ext cx="685800" cy="384048"/>
+            <a:off x="7033565" y="4169664"/>
+            <a:ext cx="676656" cy="475488"/>
           </a:xfrm>
           <a:prstGeom prst="rect">
             <a:avLst>
-              <a:gd name="adj" fmla="val 9524"/>
+              <a:gd name="adj" fmla="val 7692"/>
             </a:avLst>
           </a:prstGeom>
           <a:solidFill>
@@ -30896,8 +30755,8 @@
         </p:nvSpPr>
         <p:spPr>
           <a:xfrm>
-            <a:off x="7677912" y="4169664"/>
-            <a:ext cx="685800" cy="384048"/>
+            <a:off x="7033565" y="4169664"/>
+            <a:ext cx="676656" cy="475488"/>
           </a:xfrm>
           <a:prstGeom prst="rect">
             <a:avLst/>
@@ -30921,7 +30780,7 @@
                 <a:ea typeface="Trebuchet MS" pitchFamily="34" charset="-122"/>
                 <a:cs typeface="Trebuchet MS" pitchFamily="34" charset="-120"/>
               </a:rPr>
-              <a:t>ed</a:t>
+              <a:t>e</a:t>
             </a:r>
             <a:endParaRPr lang="en-US" sz="900" dirty="0"/>
           </a:p>
@@ -30929,40 +30788,67 @@
       </p:sp>
       <p:sp>
         <p:nvSpPr>
-          <p:cNvPr id="59" name="Text 57"/>
-          <p:cNvSpPr/>
-          <p:nvPr/>
-        </p:nvSpPr>
-        <p:spPr>
-          <a:xfrm>
-            <a:off x="7677912" y="4572000"/>
-            <a:ext cx="685800" cy="219456"/>
-          </a:xfrm>
-          <a:prstGeom prst="rect">
-            <a:avLst/>
-          </a:prstGeom>
-          <a:noFill/>
-          <a:ln/>
-        </p:spPr>
-        <p:txBody>
-          <a:bodyPr wrap="square" lIns="0" tIns="0" rIns="0" bIns="0" rtlCol="0" anchor="t"/>
-          <a:lstStyle/>
-          <a:p>
-            <a:pPr algn="ctr" indent="0" marL="0">
-              <a:buNone/>
-            </a:pPr>
-            <a:r>
-              <a:rPr lang="en-US" sz="750" i="1" dirty="0">
-                <a:solidFill>
-                  <a:srgbClr val="94A3B8"/>
-                </a:solidFill>
-                <a:latin typeface="Calibri" pitchFamily="34" charset="0"/>
-                <a:ea typeface="Calibri" pitchFamily="34" charset="-122"/>
-                <a:cs typeface="Calibri" pitchFamily="34" charset="-120"/>
-              </a:rPr>
-              <a:t>/d/</a:t>
-            </a:r>
-            <a:endParaRPr lang="en-US" sz="750" dirty="0"/>
+          <p:cNvPr id="59" name="Shape 57"/>
+          <p:cNvSpPr/>
+          <p:nvPr/>
+        </p:nvSpPr>
+        <p:spPr>
+          <a:xfrm>
+            <a:off x="7759598" y="4169664"/>
+            <a:ext cx="676656" cy="475488"/>
+          </a:xfrm>
+          <a:prstGeom prst="rect">
+            <a:avLst>
+              <a:gd name="adj" fmla="val 7692"/>
+            </a:avLst>
+          </a:prstGeom>
+          <a:solidFill>
+            <a:srgbClr val="FFFFFF"/>
+          </a:solidFill>
+          <a:ln w="12700">
+            <a:solidFill>
+              <a:srgbClr val="DB2777"/>
+            </a:solidFill>
+            <a:prstDash val="solid"/>
+          </a:ln>
+        </p:spPr>
+      </p:sp>
+      <p:sp>
+        <p:nvSpPr>
+          <p:cNvPr id="60" name="Text 58"/>
+          <p:cNvSpPr/>
+          <p:nvPr/>
+        </p:nvSpPr>
+        <p:spPr>
+          <a:xfrm>
+            <a:off x="7759598" y="4169664"/>
+            <a:ext cx="676656" cy="475488"/>
+          </a:xfrm>
+          <a:prstGeom prst="rect">
+            <a:avLst/>
+          </a:prstGeom>
+          <a:noFill/>
+          <a:ln/>
+        </p:spPr>
+        <p:txBody>
+          <a:bodyPr wrap="square" lIns="0" tIns="0" rIns="0" bIns="0" rtlCol="0" anchor="ctr"/>
+          <a:lstStyle/>
+          <a:p>
+            <a:pPr algn="ctr" indent="0" marL="0">
+              <a:buNone/>
+            </a:pPr>
+            <a:r>
+              <a:rPr lang="en-US" sz="900" b="1" dirty="0">
+                <a:solidFill>
+                  <a:srgbClr val="9D174D"/>
+                </a:solidFill>
+                <a:latin typeface="Trebuchet MS" pitchFamily="34" charset="0"/>
+                <a:ea typeface="Trebuchet MS" pitchFamily="34" charset="-122"/>
+                <a:cs typeface="Trebuchet MS" pitchFamily="34" charset="-120"/>
+              </a:rPr>
+              <a:t>ss</a:t>
+            </a:r>
+            <a:endParaRPr lang="en-US" sz="900" dirty="0"/>
           </a:p>
         </p:txBody>
       </p:sp>
@@ -31391,7 +31277,7 @@
                 <a:ea typeface="Trebuchet MS" pitchFamily="34" charset="-122"/>
                 <a:cs typeface="Trebuchet MS" pitchFamily="34" charset="-120"/>
               </a:rPr>
-              <a:t>prepared</a:t>
+              <a:t>preparing</a:t>
             </a:r>
             <a:endParaRPr lang="en-US" sz="2800" dirty="0"/>
           </a:p>
@@ -32218,7 +32104,7 @@
                 <a:ea typeface="Trebuchet MS" pitchFamily="34" charset="-122"/>
                 <a:cs typeface="Trebuchet MS" pitchFamily="34" charset="-120"/>
               </a:rPr>
-              <a:t>prepared</a:t>
+              <a:t>preparing</a:t>
             </a:r>
             <a:endParaRPr lang="en-US" sz="2800" dirty="0"/>
           </a:p>
@@ -32620,7 +32506,7 @@
                 <a:ea typeface="Trebuchet MS" pitchFamily="34" charset="-122"/>
                 <a:cs typeface="Trebuchet MS" pitchFamily="34" charset="-120"/>
               </a:rPr>
-              <a:t>d</a:t>
+              <a:t>ing</a:t>
             </a:r>
             <a:endParaRPr lang="en-US" sz="1300" dirty="0"/>
           </a:p>
@@ -32659,7 +32545,7 @@
                 <a:ea typeface="Calibri" pitchFamily="34" charset="-122"/>
                 <a:cs typeface="Calibri" pitchFamily="34" charset="-120"/>
               </a:rPr>
-              <a:t>past tense</a:t>
+              <a:t>ongoing action</a:t>
             </a:r>
             <a:endParaRPr lang="en-US" sz="850" dirty="0"/>
           </a:p>
@@ -33354,7 +33240,7 @@
                 <a:ea typeface="Trebuchet MS" pitchFamily="34" charset="-122"/>
                 <a:cs typeface="Trebuchet MS" pitchFamily="34" charset="-120"/>
               </a:rPr>
-              <a:t>prepared</a:t>
+              <a:t>preparing</a:t>
             </a:r>
             <a:endParaRPr lang="en-US" sz="2800" dirty="0"/>
           </a:p>
@@ -33756,7 +33642,7 @@
                 <a:ea typeface="Trebuchet MS" pitchFamily="34" charset="-122"/>
                 <a:cs typeface="Trebuchet MS" pitchFamily="34" charset="-120"/>
               </a:rPr>
-              <a:t>d</a:t>
+              <a:t>ing</a:t>
             </a:r>
             <a:endParaRPr lang="en-US" sz="1300" dirty="0"/>
           </a:p>
@@ -33795,7 +33681,7 @@
                 <a:ea typeface="Calibri" pitchFamily="34" charset="-122"/>
                 <a:cs typeface="Calibri" pitchFamily="34" charset="-120"/>
               </a:rPr>
-              <a:t>past tense</a:t>
+              <a:t>ongoing action</a:t>
             </a:r>
             <a:endParaRPr lang="en-US" sz="850" dirty="0"/>
           </a:p>
@@ -33902,7 +33788,7 @@
         </p:nvSpPr>
         <p:spPr>
           <a:xfrm>
-            <a:off x="2999232" y="3364992"/>
+            <a:off x="2313432" y="3364992"/>
             <a:ext cx="1645920" cy="475488"/>
           </a:xfrm>
           <a:prstGeom prst="rect">
@@ -33929,7 +33815,7 @@
         </p:nvSpPr>
         <p:spPr>
           <a:xfrm>
-            <a:off x="2999232" y="3364992"/>
+            <a:off x="2313432" y="3364992"/>
             <a:ext cx="1645920" cy="475488"/>
           </a:xfrm>
           <a:prstGeom prst="rect">
@@ -33968,8 +33854,8 @@
         </p:nvSpPr>
         <p:spPr>
           <a:xfrm>
-            <a:off x="4645152" y="3364992"/>
-            <a:ext cx="1097280" cy="475488"/>
+            <a:off x="3959352" y="3364992"/>
+            <a:ext cx="411480" cy="475488"/>
           </a:xfrm>
           <a:prstGeom prst="rect">
             <a:avLst/>
@@ -34007,7 +33893,7 @@
         </p:nvSpPr>
         <p:spPr>
           <a:xfrm>
-            <a:off x="5742432" y="3364992"/>
+            <a:off x="4370832" y="3364992"/>
             <a:ext cx="1645920" cy="475488"/>
           </a:xfrm>
           <a:prstGeom prst="rect">
@@ -34034,7 +33920,7 @@
         </p:nvSpPr>
         <p:spPr>
           <a:xfrm>
-            <a:off x="5742432" y="3364992"/>
+            <a:off x="4370832" y="3364992"/>
             <a:ext cx="1645920" cy="475488"/>
           </a:xfrm>
           <a:prstGeom prst="rect">
@@ -34059,7 +33945,7 @@
                 <a:ea typeface="Trebuchet MS" pitchFamily="34" charset="-122"/>
                 <a:cs typeface="Trebuchet MS" pitchFamily="34" charset="-120"/>
               </a:rPr>
-              <a:t>pared</a:t>
+              <a:t>par</a:t>
             </a:r>
             <a:endParaRPr lang="en-US" sz="1400" dirty="0"/>
           </a:p>
@@ -34067,7 +33953,112 @@
       </p:sp>
       <p:sp>
         <p:nvSpPr>
-          <p:cNvPr id="34" name="Shape 32"/>
+          <p:cNvPr id="34" name="Text 32"/>
+          <p:cNvSpPr/>
+          <p:nvPr/>
+        </p:nvSpPr>
+        <p:spPr>
+          <a:xfrm>
+            <a:off x="6016752" y="3364992"/>
+            <a:ext cx="411480" cy="475488"/>
+          </a:xfrm>
+          <a:prstGeom prst="rect">
+            <a:avLst/>
+          </a:prstGeom>
+          <a:noFill/>
+          <a:ln/>
+        </p:spPr>
+        <p:txBody>
+          <a:bodyPr wrap="square" lIns="0" tIns="0" rIns="0" bIns="0" rtlCol="0" anchor="ctr"/>
+          <a:lstStyle/>
+          <a:p>
+            <a:pPr algn="ctr" indent="0" marL="0">
+              <a:buNone/>
+            </a:pPr>
+            <a:r>
+              <a:rPr lang="en-US" sz="1600" b="1" dirty="0">
+                <a:solidFill>
+                  <a:srgbClr val="0D9488"/>
+                </a:solidFill>
+                <a:latin typeface="Trebuchet MS" pitchFamily="34" charset="0"/>
+                <a:ea typeface="Trebuchet MS" pitchFamily="34" charset="-122"/>
+                <a:cs typeface="Trebuchet MS" pitchFamily="34" charset="-120"/>
+              </a:rPr>
+              <a:t>·</a:t>
+            </a:r>
+            <a:endParaRPr lang="en-US" sz="1600" dirty="0"/>
+          </a:p>
+        </p:txBody>
+      </p:sp>
+      <p:sp>
+        <p:nvSpPr>
+          <p:cNvPr id="35" name="Shape 33"/>
+          <p:cNvSpPr/>
+          <p:nvPr/>
+        </p:nvSpPr>
+        <p:spPr>
+          <a:xfrm>
+            <a:off x="6428232" y="3364992"/>
+            <a:ext cx="1645920" cy="475488"/>
+          </a:xfrm>
+          <a:prstGeom prst="rect">
+            <a:avLst>
+              <a:gd name="adj" fmla="val 9615"/>
+            </a:avLst>
+          </a:prstGeom>
+          <a:solidFill>
+            <a:srgbClr val="FFFFFF"/>
+          </a:solidFill>
+          <a:ln w="12700">
+            <a:solidFill>
+              <a:srgbClr val="0D9488"/>
+            </a:solidFill>
+            <a:prstDash val="solid"/>
+          </a:ln>
+        </p:spPr>
+      </p:sp>
+      <p:sp>
+        <p:nvSpPr>
+          <p:cNvPr id="36" name="Text 34"/>
+          <p:cNvSpPr/>
+          <p:nvPr/>
+        </p:nvSpPr>
+        <p:spPr>
+          <a:xfrm>
+            <a:off x="6428232" y="3364992"/>
+            <a:ext cx="1645920" cy="475488"/>
+          </a:xfrm>
+          <a:prstGeom prst="rect">
+            <a:avLst/>
+          </a:prstGeom>
+          <a:noFill/>
+          <a:ln/>
+        </p:spPr>
+        <p:txBody>
+          <a:bodyPr wrap="square" lIns="0" tIns="0" rIns="0" bIns="0" rtlCol="0" anchor="ctr"/>
+          <a:lstStyle/>
+          <a:p>
+            <a:pPr algn="ctr" indent="0" marL="0">
+              <a:buNone/>
+            </a:pPr>
+            <a:r>
+              <a:rPr lang="en-US" sz="1400" b="1" dirty="0">
+                <a:solidFill>
+                  <a:srgbClr val="0D9488"/>
+                </a:solidFill>
+                <a:latin typeface="Trebuchet MS" pitchFamily="34" charset="0"/>
+                <a:ea typeface="Trebuchet MS" pitchFamily="34" charset="-122"/>
+                <a:cs typeface="Trebuchet MS" pitchFamily="34" charset="-120"/>
+              </a:rPr>
+              <a:t>ing</a:t>
+            </a:r>
+            <a:endParaRPr lang="en-US" sz="1400" dirty="0"/>
+          </a:p>
+        </p:txBody>
+      </p:sp>
+      <p:sp>
+        <p:nvSpPr>
+          <p:cNvPr id="37" name="Shape 35"/>
           <p:cNvSpPr/>
           <p:nvPr/>
         </p:nvSpPr>
@@ -34094,7 +34085,7 @@
       </p:sp>
       <p:sp>
         <p:nvSpPr>
-          <p:cNvPr id="35" name="Text 33"/>
+          <p:cNvPr id="38" name="Text 36"/>
           <p:cNvSpPr/>
           <p:nvPr/>
         </p:nvSpPr>
@@ -34133,7 +34124,7 @@
       </p:sp>
       <p:sp>
         <p:nvSpPr>
-          <p:cNvPr id="36" name="Shape 34"/>
+          <p:cNvPr id="39" name="Shape 37"/>
           <p:cNvSpPr/>
           <p:nvPr/>
         </p:nvSpPr>
@@ -34160,7 +34151,7 @@
       </p:sp>
       <p:sp>
         <p:nvSpPr>
-          <p:cNvPr id="37" name="Text 35"/>
+          <p:cNvPr id="40" name="Text 38"/>
           <p:cNvSpPr/>
           <p:nvPr/>
         </p:nvSpPr>
@@ -34622,7 +34613,7 @@
                 <a:ea typeface="Trebuchet MS" pitchFamily="34" charset="-122"/>
                 <a:cs typeface="Trebuchet MS" pitchFamily="34" charset="-120"/>
               </a:rPr>
-              <a:t>prepared</a:t>
+              <a:t>preparing</a:t>
             </a:r>
             <a:endParaRPr lang="en-US" sz="2800" dirty="0"/>
           </a:p>
@@ -35024,7 +35015,7 @@
                 <a:ea typeface="Trebuchet MS" pitchFamily="34" charset="-122"/>
                 <a:cs typeface="Trebuchet MS" pitchFamily="34" charset="-120"/>
               </a:rPr>
-              <a:t>d</a:t>
+              <a:t>ing</a:t>
             </a:r>
             <a:endParaRPr lang="en-US" sz="1300" dirty="0"/>
           </a:p>
@@ -35063,7 +35054,7 @@
                 <a:ea typeface="Calibri" pitchFamily="34" charset="-122"/>
                 <a:cs typeface="Calibri" pitchFamily="34" charset="-120"/>
               </a:rPr>
-              <a:t>past tense</a:t>
+              <a:t>ongoing action</a:t>
             </a:r>
             <a:endParaRPr lang="en-US" sz="850" dirty="0"/>
           </a:p>
@@ -35170,7 +35161,7 @@
         </p:nvSpPr>
         <p:spPr>
           <a:xfrm>
-            <a:off x="2999232" y="3364992"/>
+            <a:off x="2313432" y="3364992"/>
             <a:ext cx="1645920" cy="475488"/>
           </a:xfrm>
           <a:prstGeom prst="rect">
@@ -35197,7 +35188,7 @@
         </p:nvSpPr>
         <p:spPr>
           <a:xfrm>
-            <a:off x="2999232" y="3364992"/>
+            <a:off x="2313432" y="3364992"/>
             <a:ext cx="1645920" cy="475488"/>
           </a:xfrm>
           <a:prstGeom prst="rect">
@@ -35236,8 +35227,8 @@
         </p:nvSpPr>
         <p:spPr>
           <a:xfrm>
-            <a:off x="4645152" y="3364992"/>
-            <a:ext cx="1097280" cy="475488"/>
+            <a:off x="3959352" y="3364992"/>
+            <a:ext cx="411480" cy="475488"/>
           </a:xfrm>
           <a:prstGeom prst="rect">
             <a:avLst/>
@@ -35275,7 +35266,7 @@
         </p:nvSpPr>
         <p:spPr>
           <a:xfrm>
-            <a:off x="5742432" y="3364992"/>
+            <a:off x="4370832" y="3364992"/>
             <a:ext cx="1645920" cy="475488"/>
           </a:xfrm>
           <a:prstGeom prst="rect">
@@ -35302,7 +35293,7 @@
         </p:nvSpPr>
         <p:spPr>
           <a:xfrm>
-            <a:off x="5742432" y="3364992"/>
+            <a:off x="4370832" y="3364992"/>
             <a:ext cx="1645920" cy="475488"/>
           </a:xfrm>
           <a:prstGeom prst="rect">
@@ -35327,7 +35318,7 @@
                 <a:ea typeface="Trebuchet MS" pitchFamily="34" charset="-122"/>
                 <a:cs typeface="Trebuchet MS" pitchFamily="34" charset="-120"/>
               </a:rPr>
-              <a:t>pared</a:t>
+              <a:t>par</a:t>
             </a:r>
             <a:endParaRPr lang="en-US" sz="1400" dirty="0"/>
           </a:p>
@@ -35335,7 +35326,112 @@
       </p:sp>
       <p:sp>
         <p:nvSpPr>
-          <p:cNvPr id="34" name="Shape 32"/>
+          <p:cNvPr id="34" name="Text 32"/>
+          <p:cNvSpPr/>
+          <p:nvPr/>
+        </p:nvSpPr>
+        <p:spPr>
+          <a:xfrm>
+            <a:off x="6016752" y="3364992"/>
+            <a:ext cx="411480" cy="475488"/>
+          </a:xfrm>
+          <a:prstGeom prst="rect">
+            <a:avLst/>
+          </a:prstGeom>
+          <a:noFill/>
+          <a:ln/>
+        </p:spPr>
+        <p:txBody>
+          <a:bodyPr wrap="square" lIns="0" tIns="0" rIns="0" bIns="0" rtlCol="0" anchor="ctr"/>
+          <a:lstStyle/>
+          <a:p>
+            <a:pPr algn="ctr" indent="0" marL="0">
+              <a:buNone/>
+            </a:pPr>
+            <a:r>
+              <a:rPr lang="en-US" sz="1600" b="1" dirty="0">
+                <a:solidFill>
+                  <a:srgbClr val="0D9488"/>
+                </a:solidFill>
+                <a:latin typeface="Trebuchet MS" pitchFamily="34" charset="0"/>
+                <a:ea typeface="Trebuchet MS" pitchFamily="34" charset="-122"/>
+                <a:cs typeface="Trebuchet MS" pitchFamily="34" charset="-120"/>
+              </a:rPr>
+              <a:t>·</a:t>
+            </a:r>
+            <a:endParaRPr lang="en-US" sz="1600" dirty="0"/>
+          </a:p>
+        </p:txBody>
+      </p:sp>
+      <p:sp>
+        <p:nvSpPr>
+          <p:cNvPr id="35" name="Shape 33"/>
+          <p:cNvSpPr/>
+          <p:nvPr/>
+        </p:nvSpPr>
+        <p:spPr>
+          <a:xfrm>
+            <a:off x="6428232" y="3364992"/>
+            <a:ext cx="1645920" cy="475488"/>
+          </a:xfrm>
+          <a:prstGeom prst="rect">
+            <a:avLst>
+              <a:gd name="adj" fmla="val 9615"/>
+            </a:avLst>
+          </a:prstGeom>
+          <a:solidFill>
+            <a:srgbClr val="FFFFFF"/>
+          </a:solidFill>
+          <a:ln w="12700">
+            <a:solidFill>
+              <a:srgbClr val="0D9488"/>
+            </a:solidFill>
+            <a:prstDash val="solid"/>
+          </a:ln>
+        </p:spPr>
+      </p:sp>
+      <p:sp>
+        <p:nvSpPr>
+          <p:cNvPr id="36" name="Text 34"/>
+          <p:cNvSpPr/>
+          <p:nvPr/>
+        </p:nvSpPr>
+        <p:spPr>
+          <a:xfrm>
+            <a:off x="6428232" y="3364992"/>
+            <a:ext cx="1645920" cy="475488"/>
+          </a:xfrm>
+          <a:prstGeom prst="rect">
+            <a:avLst/>
+          </a:prstGeom>
+          <a:noFill/>
+          <a:ln/>
+        </p:spPr>
+        <p:txBody>
+          <a:bodyPr wrap="square" lIns="0" tIns="0" rIns="0" bIns="0" rtlCol="0" anchor="ctr"/>
+          <a:lstStyle/>
+          <a:p>
+            <a:pPr algn="ctr" indent="0" marL="0">
+              <a:buNone/>
+            </a:pPr>
+            <a:r>
+              <a:rPr lang="en-US" sz="1400" b="1" dirty="0">
+                <a:solidFill>
+                  <a:srgbClr val="0D9488"/>
+                </a:solidFill>
+                <a:latin typeface="Trebuchet MS" pitchFamily="34" charset="0"/>
+                <a:ea typeface="Trebuchet MS" pitchFamily="34" charset="-122"/>
+                <a:cs typeface="Trebuchet MS" pitchFamily="34" charset="-120"/>
+              </a:rPr>
+              <a:t>ing</a:t>
+            </a:r>
+            <a:endParaRPr lang="en-US" sz="1400" dirty="0"/>
+          </a:p>
+        </p:txBody>
+      </p:sp>
+      <p:sp>
+        <p:nvSpPr>
+          <p:cNvPr id="37" name="Shape 35"/>
           <p:cNvSpPr/>
           <p:nvPr/>
         </p:nvSpPr>
@@ -35362,7 +35458,7 @@
       </p:sp>
       <p:sp>
         <p:nvSpPr>
-          <p:cNvPr id="35" name="Text 33"/>
+          <p:cNvPr id="38" name="Text 36"/>
           <p:cNvSpPr/>
           <p:nvPr/>
         </p:nvSpPr>
@@ -35401,18 +35497,18 @@
       </p:sp>
       <p:sp>
         <p:nvSpPr>
-          <p:cNvPr id="36" name="Shape 34"/>
+          <p:cNvPr id="39" name="Shape 37"/>
           <p:cNvSpPr/>
           <p:nvPr/>
         </p:nvSpPr>
         <p:spPr>
           <a:xfrm>
             <a:off x="1874520" y="4096512"/>
-            <a:ext cx="6903720" cy="804672"/>
+            <a:ext cx="6903720" cy="658368"/>
           </a:xfrm>
           <a:prstGeom prst="rect">
             <a:avLst>
-              <a:gd name="adj" fmla="val 6818"/>
+              <a:gd name="adj" fmla="val 8333"/>
             </a:avLst>
           </a:prstGeom>
           <a:solidFill>
@@ -35428,18 +35524,18 @@
       </p:sp>
       <p:sp>
         <p:nvSpPr>
-          <p:cNvPr id="37" name="Shape 35"/>
+          <p:cNvPr id="40" name="Shape 38"/>
           <p:cNvSpPr/>
           <p:nvPr/>
         </p:nvSpPr>
         <p:spPr>
           <a:xfrm>
             <a:off x="2254649" y="4169664"/>
-            <a:ext cx="685800" cy="384048"/>
+            <a:ext cx="685800" cy="475488"/>
           </a:xfrm>
           <a:prstGeom prst="rect">
             <a:avLst>
-              <a:gd name="adj" fmla="val 9524"/>
+              <a:gd name="adj" fmla="val 7692"/>
             </a:avLst>
           </a:prstGeom>
           <a:solidFill>
@@ -35455,14 +35551,14 @@
       </p:sp>
       <p:sp>
         <p:nvSpPr>
-          <p:cNvPr id="38" name="Text 36"/>
+          <p:cNvPr id="41" name="Text 39"/>
           <p:cNvSpPr/>
           <p:nvPr/>
         </p:nvSpPr>
         <p:spPr>
           <a:xfrm>
             <a:off x="2254649" y="4169664"/>
-            <a:ext cx="685800" cy="384048"/>
+            <a:ext cx="685800" cy="475488"/>
           </a:xfrm>
           <a:prstGeom prst="rect">
             <a:avLst/>
@@ -35494,18 +35590,18 @@
       </p:sp>
       <p:sp>
         <p:nvSpPr>
-          <p:cNvPr id="39" name="Shape 37"/>
+          <p:cNvPr id="42" name="Shape 40"/>
           <p:cNvSpPr/>
           <p:nvPr/>
         </p:nvSpPr>
         <p:spPr>
           <a:xfrm>
             <a:off x="3293146" y="4169664"/>
-            <a:ext cx="685800" cy="384048"/>
+            <a:ext cx="685800" cy="475488"/>
           </a:xfrm>
           <a:prstGeom prst="rect">
             <a:avLst>
-              <a:gd name="adj" fmla="val 9524"/>
+              <a:gd name="adj" fmla="val 7692"/>
             </a:avLst>
           </a:prstGeom>
           <a:solidFill>
@@ -35521,14 +35617,14 @@
       </p:sp>
       <p:sp>
         <p:nvSpPr>
-          <p:cNvPr id="40" name="Text 38"/>
+          <p:cNvPr id="43" name="Text 41"/>
           <p:cNvSpPr/>
           <p:nvPr/>
         </p:nvSpPr>
         <p:spPr>
           <a:xfrm>
             <a:off x="3293146" y="4169664"/>
-            <a:ext cx="685800" cy="384048"/>
+            <a:ext cx="685800" cy="475488"/>
           </a:xfrm>
           <a:prstGeom prst="rect">
             <a:avLst/>
@@ -35560,18 +35656,18 @@
       </p:sp>
       <p:sp>
         <p:nvSpPr>
-          <p:cNvPr id="41" name="Shape 39"/>
+          <p:cNvPr id="44" name="Shape 42"/>
           <p:cNvSpPr/>
           <p:nvPr/>
         </p:nvSpPr>
         <p:spPr>
           <a:xfrm>
             <a:off x="4331643" y="4169664"/>
-            <a:ext cx="685800" cy="384048"/>
+            <a:ext cx="685800" cy="475488"/>
           </a:xfrm>
           <a:prstGeom prst="rect">
             <a:avLst>
-              <a:gd name="adj" fmla="val 9524"/>
+              <a:gd name="adj" fmla="val 7692"/>
             </a:avLst>
           </a:prstGeom>
           <a:solidFill>
@@ -35587,14 +35683,14 @@
       </p:sp>
       <p:sp>
         <p:nvSpPr>
-          <p:cNvPr id="42" name="Text 40"/>
+          <p:cNvPr id="45" name="Text 43"/>
           <p:cNvSpPr/>
           <p:nvPr/>
         </p:nvSpPr>
         <p:spPr>
           <a:xfrm>
             <a:off x="4331643" y="4169664"/>
-            <a:ext cx="685800" cy="384048"/>
+            <a:ext cx="685800" cy="475488"/>
           </a:xfrm>
           <a:prstGeom prst="rect">
             <a:avLst/>
@@ -35626,18 +35722,18 @@
       </p:sp>
       <p:sp>
         <p:nvSpPr>
-          <p:cNvPr id="43" name="Shape 41"/>
+          <p:cNvPr id="46" name="Shape 44"/>
           <p:cNvSpPr/>
           <p:nvPr/>
         </p:nvSpPr>
         <p:spPr>
           <a:xfrm>
             <a:off x="5370141" y="4169664"/>
-            <a:ext cx="685800" cy="384048"/>
+            <a:ext cx="685800" cy="475488"/>
           </a:xfrm>
           <a:prstGeom prst="rect">
             <a:avLst>
-              <a:gd name="adj" fmla="val 9524"/>
+              <a:gd name="adj" fmla="val 7692"/>
             </a:avLst>
           </a:prstGeom>
           <a:solidFill>
@@ -35653,14 +35749,14 @@
       </p:sp>
       <p:sp>
         <p:nvSpPr>
-          <p:cNvPr id="44" name="Text 42"/>
+          <p:cNvPr id="47" name="Text 45"/>
           <p:cNvSpPr/>
           <p:nvPr/>
         </p:nvSpPr>
         <p:spPr>
           <a:xfrm>
             <a:off x="5370141" y="4169664"/>
-            <a:ext cx="685800" cy="384048"/>
+            <a:ext cx="685800" cy="475488"/>
           </a:xfrm>
           <a:prstGeom prst="rect">
             <a:avLst/>
@@ -35692,18 +35788,18 @@
       </p:sp>
       <p:sp>
         <p:nvSpPr>
-          <p:cNvPr id="45" name="Shape 43"/>
+          <p:cNvPr id="48" name="Shape 46"/>
           <p:cNvSpPr/>
           <p:nvPr/>
         </p:nvSpPr>
         <p:spPr>
           <a:xfrm>
             <a:off x="6408638" y="4169664"/>
-            <a:ext cx="685800" cy="384048"/>
+            <a:ext cx="685800" cy="475488"/>
           </a:xfrm>
           <a:prstGeom prst="rect">
             <a:avLst>
-              <a:gd name="adj" fmla="val 9524"/>
+              <a:gd name="adj" fmla="val 7692"/>
             </a:avLst>
           </a:prstGeom>
           <a:solidFill>
@@ -35719,14 +35815,14 @@
       </p:sp>
       <p:sp>
         <p:nvSpPr>
-          <p:cNvPr id="46" name="Text 44"/>
+          <p:cNvPr id="49" name="Text 47"/>
           <p:cNvSpPr/>
           <p:nvPr/>
         </p:nvSpPr>
         <p:spPr>
           <a:xfrm>
             <a:off x="6408638" y="4169664"/>
-            <a:ext cx="685800" cy="384048"/>
+            <a:ext cx="685800" cy="475488"/>
           </a:xfrm>
           <a:prstGeom prst="rect">
             <a:avLst/>
@@ -35758,18 +35854,18 @@
       </p:sp>
       <p:sp>
         <p:nvSpPr>
-          <p:cNvPr id="47" name="Shape 45"/>
+          <p:cNvPr id="50" name="Shape 48"/>
           <p:cNvSpPr/>
           <p:nvPr/>
         </p:nvSpPr>
         <p:spPr>
           <a:xfrm>
             <a:off x="7447135" y="4169664"/>
-            <a:ext cx="685800" cy="384048"/>
+            <a:ext cx="685800" cy="475488"/>
           </a:xfrm>
           <a:prstGeom prst="rect">
             <a:avLst>
-              <a:gd name="adj" fmla="val 9524"/>
+              <a:gd name="adj" fmla="val 7692"/>
             </a:avLst>
           </a:prstGeom>
           <a:solidFill>
@@ -35785,14 +35881,14 @@
       </p:sp>
       <p:sp>
         <p:nvSpPr>
-          <p:cNvPr id="48" name="Text 46"/>
+          <p:cNvPr id="51" name="Text 49"/>
           <p:cNvSpPr/>
           <p:nvPr/>
         </p:nvSpPr>
         <p:spPr>
           <a:xfrm>
             <a:off x="7447135" y="4169664"/>
-            <a:ext cx="685800" cy="384048"/>
+            <a:ext cx="685800" cy="475488"/>
           </a:xfrm>
           <a:prstGeom prst="rect">
             <a:avLst/>
@@ -35816,48 +35912,9 @@
                 <a:ea typeface="Trebuchet MS" pitchFamily="34" charset="-122"/>
                 <a:cs typeface="Trebuchet MS" pitchFamily="34" charset="-120"/>
               </a:rPr>
-              <a:t>ed</a:t>
+              <a:t>ing</a:t>
             </a:r>
             <a:endParaRPr lang="en-US" sz="900" dirty="0"/>
-          </a:p>
-        </p:txBody>
-      </p:sp>
-      <p:sp>
-        <p:nvSpPr>
-          <p:cNvPr id="49" name="Text 47"/>
-          <p:cNvSpPr/>
-          <p:nvPr/>
-        </p:nvSpPr>
-        <p:spPr>
-          <a:xfrm>
-            <a:off x="7447135" y="4572000"/>
-            <a:ext cx="685800" cy="219456"/>
-          </a:xfrm>
-          <a:prstGeom prst="rect">
-            <a:avLst/>
-          </a:prstGeom>
-          <a:noFill/>
-          <a:ln/>
-        </p:spPr>
-        <p:txBody>
-          <a:bodyPr wrap="square" lIns="0" tIns="0" rIns="0" bIns="0" rtlCol="0" anchor="t"/>
-          <a:lstStyle/>
-          <a:p>
-            <a:pPr algn="ctr" indent="0" marL="0">
-              <a:buNone/>
-            </a:pPr>
-            <a:r>
-              <a:rPr lang="en-US" sz="750" i="1" dirty="0">
-                <a:solidFill>
-                  <a:srgbClr val="94A3B8"/>
-                </a:solidFill>
-                <a:latin typeface="Calibri" pitchFamily="34" charset="0"/>
-                <a:ea typeface="Calibri" pitchFamily="34" charset="-122"/>
-                <a:cs typeface="Calibri" pitchFamily="34" charset="-120"/>
-              </a:rPr>
-              <a:t>/d/</a:t>
-            </a:r>
-            <a:endParaRPr lang="en-US" sz="750" dirty="0"/>
           </a:p>
         </p:txBody>
       </p:sp>
@@ -37617,7 +37674,7 @@
                 <a:ea typeface="Trebuchet MS" pitchFamily="34" charset="-122"/>
                 <a:cs typeface="Trebuchet MS" pitchFamily="34" charset="-120"/>
               </a:rPr>
-              <a:t>un-</a:t>
+              <a:t>re-</a:t>
             </a:r>
             <a:endParaRPr lang="en-US" sz="1300" dirty="0"/>
           </a:p>
@@ -37809,7 +37866,7 @@
                 <a:ea typeface="Trebuchet MS" pitchFamily="34" charset="-122"/>
                 <a:cs typeface="Trebuchet MS" pitchFamily="34" charset="-120"/>
               </a:rPr>
-              <a:t>re-</a:t>
+              <a:t>un-</a:t>
             </a:r>
             <a:endParaRPr lang="en-US" sz="1300" dirty="0"/>
           </a:p>
@@ -38357,7 +38414,7 @@
                 <a:ea typeface="Trebuchet MS" pitchFamily="34" charset="-122"/>
                 <a:cs typeface="Trebuchet MS" pitchFamily="34" charset="-120"/>
               </a:rPr>
-              <a:t>-atory</a:t>
+              <a:t>-edness</a:t>
             </a:r>
             <a:endParaRPr lang="en-US" sz="1300" dirty="0"/>
           </a:p>
@@ -38726,7 +38783,7 @@
                 <a:ea typeface="Trebuchet MS" pitchFamily="34" charset="-122"/>
                 <a:cs typeface="Trebuchet MS" pitchFamily="34" charset="-120"/>
               </a:rPr>
-              <a:t>preparatory</a:t>
+              <a:t>preparedness</a:t>
             </a:r>
             <a:endParaRPr lang="en-US" sz="1200" dirty="0"/>
           </a:p>
@@ -38858,7 +38915,7 @@
                 <a:ea typeface="Trebuchet MS" pitchFamily="34" charset="-122"/>
                 <a:cs typeface="Trebuchet MS" pitchFamily="34" charset="-120"/>
               </a:rPr>
-              <a:t>prepares</a:t>
+              <a:t>reprepare</a:t>
             </a:r>
             <a:endParaRPr lang="en-US" sz="1200" dirty="0"/>
           </a:p>
@@ -38924,7 +38981,7 @@
                 <a:ea typeface="Trebuchet MS" pitchFamily="34" charset="-122"/>
                 <a:cs typeface="Trebuchet MS" pitchFamily="34" charset="-120"/>
               </a:rPr>
-              <a:t>preparedness</a:t>
+              <a:t>preparatory</a:t>
             </a:r>
             <a:endParaRPr lang="en-US" sz="1200" dirty="0"/>
           </a:p>
@@ -40112,7 +40169,7 @@
                 <a:ea typeface="Calibri" pitchFamily="34" charset="-122"/>
                 <a:cs typeface="Calibri" pitchFamily="34" charset="-120"/>
               </a:rPr>
-              <a:t>1.  The root 'prepare' comes from Latin and means to make ready beforehand.</a:t>
+              <a:t>1.  The word 'unprepared' contains the root 'prepare'.</a:t>
             </a:r>
             <a:endParaRPr lang="en-US" sz="1300" dirty="0"/>
           </a:p>
@@ -40251,7 +40308,7 @@
                 <a:ea typeface="Calibri" pitchFamily="34" charset="-122"/>
                 <a:cs typeface="Calibri" pitchFamily="34" charset="-120"/>
               </a:rPr>
-              <a:t>2.  The word 'unprepared' means you are very well ready for something.</a:t>
+              <a:t>2.  The prefix 're-' in 'reprepare' means 'not'.</a:t>
             </a:r>
             <a:endParaRPr lang="en-US" sz="1300" dirty="0"/>
           </a:p>
@@ -40390,7 +40447,7 @@
                 <a:ea typeface="Calibri" pitchFamily="34" charset="-122"/>
                 <a:cs typeface="Calibri" pitchFamily="34" charset="-120"/>
               </a:rPr>
-              <a:t>3.  Adding '-tion' to 'prepare' makes the noun 'preparation'.</a:t>
+              <a:t>3.  Adding '-tion' to 'prepare' makes the word 'preparation'.</a:t>
             </a:r>
             <a:endParaRPr lang="en-US" sz="1300" dirty="0"/>
           </a:p>
@@ -40529,7 +40586,7 @@
                 <a:ea typeface="Calibri" pitchFamily="34" charset="-122"/>
                 <a:cs typeface="Calibri" pitchFamily="34" charset="-120"/>
               </a:rPr>
-              <a:t>4.  The prefix 'pre-' in 'prepare' means before.</a:t>
+              <a:t>4.  The root 'prepare' comes from the Greek language.</a:t>
             </a:r>
             <a:endParaRPr lang="en-US" sz="1300" dirty="0"/>
           </a:p>
@@ -40552,11 +40609,11 @@
             </a:avLst>
           </a:prstGeom>
           <a:solidFill>
-            <a:srgbClr val="DCFCE7"/>
-          </a:solidFill>
-          <a:ln w="12700">
-            <a:solidFill>
-              <a:srgbClr val="16A34A"/>
+            <a:srgbClr val="FEE2E2"/>
+          </a:solidFill>
+          <a:ln w="12700">
+            <a:solidFill>
+              <a:srgbClr val="DC2626"/>
             </a:solidFill>
             <a:prstDash val="solid"/>
           </a:ln>
@@ -40589,13 +40646,13 @@
             <a:r>
               <a:rPr lang="en-US" sz="1100" b="1" dirty="0">
                 <a:solidFill>
-                  <a:srgbClr val="16A34A"/>
+                  <a:srgbClr val="DC2626"/>
                 </a:solidFill>
                 <a:latin typeface="Trebuchet MS" pitchFamily="34" charset="0"/>
                 <a:ea typeface="Trebuchet MS" pitchFamily="34" charset="-122"/>
                 <a:cs typeface="Trebuchet MS" pitchFamily="34" charset="-120"/>
               </a:rPr>
-              <a:t>TRUE</a:t>
+              <a:t>FALSE</a:t>
             </a:r>
             <a:endParaRPr lang="en-US" sz="1100" dirty="0"/>
           </a:p>
@@ -40668,7 +40725,7 @@
                 <a:ea typeface="Calibri" pitchFamily="34" charset="-122"/>
                 <a:cs typeface="Calibri" pitchFamily="34" charset="-120"/>
               </a:rPr>
-              <a:t>5.  The word 'preparatory' is a verb describing an action.</a:t>
+              <a:t>5.  'Preparedness' means the state of being fully ready.</a:t>
             </a:r>
             <a:endParaRPr lang="en-US" sz="1300" dirty="0"/>
           </a:p>
@@ -40691,11 +40748,11 @@
             </a:avLst>
           </a:prstGeom>
           <a:solidFill>
-            <a:srgbClr val="FEE2E2"/>
-          </a:solidFill>
-          <a:ln w="12700">
-            <a:solidFill>
-              <a:srgbClr val="DC2626"/>
+            <a:srgbClr val="DCFCE7"/>
+          </a:solidFill>
+          <a:ln w="12700">
+            <a:solidFill>
+              <a:srgbClr val="16A34A"/>
             </a:solidFill>
             <a:prstDash val="solid"/>
           </a:ln>
@@ -40728,13 +40785,13 @@
             <a:r>
               <a:rPr lang="en-US" sz="1100" b="1" dirty="0">
                 <a:solidFill>
-                  <a:srgbClr val="DC2626"/>
+                  <a:srgbClr val="16A34A"/>
                 </a:solidFill>
                 <a:latin typeface="Trebuchet MS" pitchFamily="34" charset="0"/>
                 <a:ea typeface="Trebuchet MS" pitchFamily="34" charset="-122"/>
                 <a:cs typeface="Trebuchet MS" pitchFamily="34" charset="-120"/>
               </a:rPr>
-              <a:t>FALSE</a:t>
+              <a:t>TRUE</a:t>
             </a:r>
             <a:endParaRPr lang="en-US" sz="1100" dirty="0"/>
           </a:p>
@@ -41571,7 +41628,7 @@
                 <a:ea typeface="Trebuchet MS" pitchFamily="34" charset="-122"/>
                 <a:cs typeface="Trebuchet MS" pitchFamily="34" charset="-120"/>
               </a:rPr>
-              <a:t>preparatory</a:t>
+              <a:t>preparedness</a:t>
             </a:r>
             <a:endParaRPr lang="en-US" sz="1300" dirty="0"/>
           </a:p>
@@ -41703,7 +41760,7 @@
                 <a:ea typeface="Trebuchet MS" pitchFamily="34" charset="-122"/>
                 <a:cs typeface="Trebuchet MS" pitchFamily="34" charset="-120"/>
               </a:rPr>
-              <a:t>prepares</a:t>
+              <a:t>reprepare</a:t>
             </a:r>
             <a:endParaRPr lang="en-US" sz="1300" dirty="0"/>
           </a:p>
@@ -42296,7 +42353,7 @@
                 <a:ea typeface="Trebuchet MS" pitchFamily="34" charset="-122"/>
                 <a:cs typeface="Trebuchet MS" pitchFamily="34" charset="-120"/>
               </a:rPr>
-              <a:t>un-</a:t>
+              <a:t>re-</a:t>
             </a:r>
             <a:endParaRPr lang="en-US" sz="1300" dirty="0"/>
           </a:p>
@@ -42488,7 +42545,7 @@
                 <a:ea typeface="Trebuchet MS" pitchFamily="34" charset="-122"/>
                 <a:cs typeface="Trebuchet MS" pitchFamily="34" charset="-120"/>
               </a:rPr>
-              <a:t>re-</a:t>
+              <a:t>un-</a:t>
             </a:r>
             <a:endParaRPr lang="en-US" sz="1300" dirty="0"/>
           </a:p>
@@ -43036,7 +43093,7 @@
                 <a:ea typeface="Trebuchet MS" pitchFamily="34" charset="-122"/>
                 <a:cs typeface="Trebuchet MS" pitchFamily="34" charset="-120"/>
               </a:rPr>
-              <a:t>-atory</a:t>
+              <a:t>-edness</a:t>
             </a:r>
             <a:endParaRPr lang="en-US" sz="1300" dirty="0"/>
           </a:p>
@@ -43148,7 +43205,7 @@
                 <a:ea typeface="Trebuchet MS" pitchFamily="34" charset="-122"/>
                 <a:cs typeface="Trebuchet MS" pitchFamily="34" charset="-120"/>
               </a:rPr>
-              <a:t>un-</a:t>
+              <a:t>re-</a:t>
             </a:r>
             <a:endParaRPr lang="en-US" sz="1300" dirty="0"/>
           </a:p>
@@ -43947,7 +44004,7 @@
                 <a:ea typeface="Calibri" pitchFamily="34" charset="-122"/>
                 <a:cs typeface="Calibri" pitchFamily="34" charset="-120"/>
               </a:rPr>
-              <a:t>Currently getting something ready.</a:t>
+              <a:t>In the process of getting things ready right now.</a:t>
             </a:r>
             <a:endParaRPr lang="en-US" sz="1200" dirty="0"/>
           </a:p>
@@ -44086,7 +44143,7 @@
                 <a:ea typeface="Calibri" pitchFamily="34" charset="-122"/>
                 <a:cs typeface="Calibri" pitchFamily="34" charset="-120"/>
               </a:rPr>
-              <a:t>Done in order to get ready for something else.</a:t>
+              <a:t>The state of being fully ready for something that might happen.</a:t>
             </a:r>
             <a:endParaRPr lang="en-US" sz="1200" dirty="0"/>
           </a:p>
@@ -44225,7 +44282,7 @@
                 <a:ea typeface="Calibri" pitchFamily="34" charset="-122"/>
                 <a:cs typeface="Calibri" pitchFamily="34" charset="-120"/>
               </a:rPr>
-              <a:t>To get something ready before it is needed.</a:t>
+              <a:t>To get everything ready before something happens.</a:t>
             </a:r>
             <a:endParaRPr lang="en-US" sz="1200" dirty="0"/>
           </a:p>
@@ -44364,7 +44421,7 @@
                 <a:ea typeface="Calibri" pitchFamily="34" charset="-122"/>
                 <a:cs typeface="Calibri" pitchFamily="34" charset="-120"/>
               </a:rPr>
-              <a:t>Not ready for something that happens.</a:t>
+              <a:t>Not ready for something that happens, often by surprise.</a:t>
             </a:r>
             <a:endParaRPr lang="en-US" sz="1200" dirty="0"/>
           </a:p>
@@ -44437,7 +44494,7 @@
                 <a:ea typeface="Trebuchet MS" pitchFamily="34" charset="-122"/>
                 <a:cs typeface="Trebuchet MS" pitchFamily="34" charset="-120"/>
               </a:rPr>
-              <a:t>preparatory</a:t>
+              <a:t>preparedness</a:t>
             </a:r>
             <a:endParaRPr lang="en-US" sz="1200" dirty="0"/>
           </a:p>
@@ -44503,7 +44560,7 @@
                 <a:ea typeface="Calibri" pitchFamily="34" charset="-122"/>
                 <a:cs typeface="Calibri" pitchFamily="34" charset="-120"/>
               </a:rPr>
-              <a:t>Gets something ready (used with he, she, or it).</a:t>
+              <a:t>To get ready again after something did not go as planned.</a:t>
             </a:r>
             <a:endParaRPr lang="en-US" sz="1200" dirty="0"/>
           </a:p>
@@ -44642,7 +44699,7 @@
                 <a:ea typeface="Calibri" pitchFamily="34" charset="-122"/>
                 <a:cs typeface="Calibri" pitchFamily="34" charset="-120"/>
               </a:rPr>
-              <a:t>The things you do to get ready for something.</a:t>
+              <a:t>The act of getting ready or making things ready before an event.</a:t>
             </a:r>
             <a:endParaRPr lang="en-US" sz="1200" dirty="0"/>
           </a:p>
@@ -44715,7 +44772,7 @@
                 <a:ea typeface="Trebuchet MS" pitchFamily="34" charset="-122"/>
                 <a:cs typeface="Trebuchet MS" pitchFamily="34" charset="-120"/>
               </a:rPr>
-              <a:t>prepares</a:t>
+              <a:t>reprepare</a:t>
             </a:r>
             <a:endParaRPr lang="en-US" sz="1200" dirty="0"/>
           </a:p>
@@ -44781,7 +44838,7 @@
                 <a:ea typeface="Calibri" pitchFamily="34" charset="-122"/>
                 <a:cs typeface="Calibri" pitchFamily="34" charset="-120"/>
               </a:rPr>
-              <a:t>Already made ready or organised for something.</a:t>
+              <a:t>Already made ready for something that is about to happen.</a:t>
             </a:r>
             <a:endParaRPr lang="en-US" sz="1200" dirty="0"/>
           </a:p>
@@ -45276,7 +45333,7 @@
                 <a:ea typeface="Calibri" pitchFamily="34" charset="-122"/>
                 <a:cs typeface="Calibri" pitchFamily="34" charset="-120"/>
               </a:rPr>
-              <a:t>We need to prepare our costumes before the school concert next Friday.</a:t>
+              <a:t>The students needed to prepare their science experiment before the lesson began.</a:t>
             </a:r>
             <a:endParaRPr lang="en-US" sz="1500" dirty="0"/>
           </a:p>
@@ -45440,7 +45497,7 @@
                 <a:ea typeface="Calibri" pitchFamily="34" charset="-122"/>
                 <a:cs typeface="Calibri" pitchFamily="34" charset="-120"/>
               </a:rPr>
-              <a:t>The students were well prepared for the maths test because they had studied all week.</a:t>
+              <a:t>Being well prepared for a bushfire emergency can help keep your family safe.</a:t>
             </a:r>
             <a:endParaRPr lang="en-US" sz="1500" dirty="0"/>
           </a:p>
@@ -45604,7 +45661,7 @@
                 <a:ea typeface="Calibri" pitchFamily="34" charset="-122"/>
                 <a:cs typeface="Calibri" pitchFamily="34" charset="-120"/>
               </a:rPr>
-              <a:t>Good preparation is the key to giving a confident and clear speech in front of the class.</a:t>
+              <a:t>The chef spent hours on the preparation of the three-course meal for the school fundraiser.</a:t>
             </a:r>
             <a:endParaRPr lang="en-US" sz="1500" dirty="0"/>
           </a:p>
